--- a/media/module8/slides.pptx
+++ b/media/module8/slides.pptx
@@ -12,8 +12,8 @@
     <p:sldId id="260" r:id="rId11"/>
     <p:sldId id="261" r:id="rId12"/>
     <p:sldId id="262" r:id="rId13"/>
-    <p:sldId id="263" r:id="rId15"/>
-    <p:sldId id="264" r:id="rId16"/>
+    <p:sldId id="263" r:id="rId14"/>
+    <p:sldId id="264" r:id="rId15"/>
     <p:sldId id="265" r:id="rId17"/>
     <p:sldId id="266" r:id="rId18"/>
     <p:sldId id="267" r:id="rId19"/>
@@ -28,6 +28,17 @@
     <p:sldId id="276" r:id="rId28"/>
     <p:sldId id="277" r:id="rId29"/>
     <p:sldId id="278" r:id="rId30"/>
+    <p:sldId id="279" r:id="rId31"/>
+    <p:sldId id="280" r:id="rId32"/>
+    <p:sldId id="281" r:id="rId33"/>
+    <p:sldId id="282" r:id="rId34"/>
+    <p:sldId id="283" r:id="rId35"/>
+    <p:sldId id="284" r:id="rId36"/>
+    <p:sldId id="285" r:id="rId37"/>
+    <p:sldId id="286" r:id="rId38"/>
+    <p:sldId id="287" r:id="rId39"/>
+    <p:sldId id="288" r:id="rId40"/>
+    <p:sldId id="289" r:id="rId41"/>
   </p:sldIdLst>
   <p:sldSz cx="12191695" cy="6858000" type="screen4x3"/>
   <p:notesSz cx="6858000" cy="9144000"/>
@@ -524,7 +535,7 @@
           <a:lstStyle/>
           <a:p>
             <a:r>
-              <a:t>From MODULE8 Topics Covered.</a:t>
+              <a:t>From MODULE8 Design Architecture.</a:t>
             </a:r>
           </a:p>
         </p:txBody>
@@ -594,7 +605,7 @@
           <a:lstStyle/>
           <a:p>
             <a:r>
-              <a:t>Hands-on: module8/examples/tool_support/</a:t>
+              <a:t>Hands-on: module8/examples/course_map/</a:t>
             </a:r>
           </a:p>
         </p:txBody>
@@ -664,7 +675,7 @@
           <a:lstStyle/>
           <a:p>
             <a:r>
-              <a:t>Hands-on: module8/examples/version_selection/</a:t>
+              <a:t>Hands-on: module8/examples/design_subset/</a:t>
             </a:r>
           </a:p>
         </p:txBody>
@@ -734,6 +745,426 @@
           <a:lstStyle/>
           <a:p>
             <a:r>
+              <a:t>Hands-on: module8/examples/learning_path/</a:t>
+            </a:r>
+          </a:p>
+        </p:txBody>
+      </p:sp>
+      <p:sp>
+        <p:nvSpPr>
+          <p:cNvPr id="4" name="Slide Number Placeholder 3"/>
+          <p:cNvSpPr>
+            <a:spLocks noGrp="1"/>
+          </p:cNvSpPr>
+          <p:nvPr>
+            <p:ph type="sldNum" idx="5" sz="quarter"/>
+          </p:nvPr>
+        </p:nvSpPr>
+        <p:spPr/>
+      </p:sp>
+    </p:spTree>
+  </p:cSld>
+  <p:clrMapOvr>
+    <a:masterClrMapping/>
+  </p:clrMapOvr>
+</p:notes>
+</file>
+
+<file path=ppt/notesSlides/notesSlide13.xml><?xml version="1.0" encoding="utf-8"?>
+<p:notes xmlns:a="http://schemas.openxmlformats.org/drawingml/2006/main" xmlns:p="http://schemas.openxmlformats.org/presentationml/2006/main" xmlns:r="http://schemas.openxmlformats.org/officeDocument/2006/relationships">
+  <p:cSld>
+    <p:spTree>
+      <p:nvGrpSpPr>
+        <p:cNvPr id="1" name=""/>
+        <p:cNvGrpSpPr/>
+        <p:nvPr/>
+      </p:nvGrpSpPr>
+      <p:grpSpPr>
+        <a:xfrm>
+          <a:off x="0" y="0"/>
+          <a:ext cx="0" cy="0"/>
+          <a:chOff x="0" y="0"/>
+          <a:chExt cx="0" cy="0"/>
+        </a:xfrm>
+      </p:grpSpPr>
+      <p:sp>
+        <p:nvSpPr>
+          <p:cNvPr id="2" name="Slide Image Placeholder 1"/>
+          <p:cNvSpPr>
+            <a:spLocks noGrp="1"/>
+          </p:cNvSpPr>
+          <p:nvPr>
+            <p:ph type="sldImg" idx="2"/>
+          </p:nvPr>
+        </p:nvSpPr>
+        <p:spPr/>
+      </p:sp>
+      <p:sp>
+        <p:nvSpPr>
+          <p:cNvPr id="3" name="Notes Placeholder 2"/>
+          <p:cNvSpPr>
+            <a:spLocks noGrp="1"/>
+          </p:cNvSpPr>
+          <p:nvPr>
+            <p:ph type="body" idx="3" sz="quarter"/>
+          </p:nvPr>
+        </p:nvSpPr>
+        <p:spPr/>
+        <p:txBody>
+          <a:bodyPr/>
+          <a:lstStyle/>
+          <a:p>
+            <a:r>
+              <a:t>Hands-on: module8/examples/migration_steps/</a:t>
+            </a:r>
+          </a:p>
+        </p:txBody>
+      </p:sp>
+      <p:sp>
+        <p:nvSpPr>
+          <p:cNvPr id="4" name="Slide Number Placeholder 3"/>
+          <p:cNvSpPr>
+            <a:spLocks noGrp="1"/>
+          </p:cNvSpPr>
+          <p:nvPr>
+            <p:ph type="sldNum" idx="5" sz="quarter"/>
+          </p:nvPr>
+        </p:nvSpPr>
+        <p:spPr/>
+      </p:sp>
+    </p:spTree>
+  </p:cSld>
+  <p:clrMapOvr>
+    <a:masterClrMapping/>
+  </p:clrMapOvr>
+</p:notes>
+</file>
+
+<file path=ppt/notesSlides/notesSlide14.xml><?xml version="1.0" encoding="utf-8"?>
+<p:notes xmlns:a="http://schemas.openxmlformats.org/drawingml/2006/main" xmlns:p="http://schemas.openxmlformats.org/presentationml/2006/main" xmlns:r="http://schemas.openxmlformats.org/officeDocument/2006/relationships">
+  <p:cSld>
+    <p:spTree>
+      <p:nvGrpSpPr>
+        <p:cNvPr id="1" name=""/>
+        <p:cNvGrpSpPr/>
+        <p:nvPr/>
+      </p:nvGrpSpPr>
+      <p:grpSpPr>
+        <a:xfrm>
+          <a:off x="0" y="0"/>
+          <a:ext cx="0" cy="0"/>
+          <a:chOff x="0" y="0"/>
+          <a:chExt cx="0" cy="0"/>
+        </a:xfrm>
+      </p:grpSpPr>
+      <p:sp>
+        <p:nvSpPr>
+          <p:cNvPr id="2" name="Slide Image Placeholder 1"/>
+          <p:cNvSpPr>
+            <a:spLocks noGrp="1"/>
+          </p:cNvSpPr>
+          <p:nvPr>
+            <p:ph type="sldImg" idx="2"/>
+          </p:nvPr>
+        </p:nvSpPr>
+        <p:spPr/>
+      </p:sp>
+      <p:sp>
+        <p:nvSpPr>
+          <p:cNvPr id="3" name="Notes Placeholder 2"/>
+          <p:cNvSpPr>
+            <a:spLocks noGrp="1"/>
+          </p:cNvSpPr>
+          <p:nvPr>
+            <p:ph type="body" idx="3" sz="quarter"/>
+          </p:nvPr>
+        </p:nvSpPr>
+        <p:spPr/>
+        <p:txBody>
+          <a:bodyPr/>
+          <a:lstStyle/>
+          <a:p>
+            <a:r>
+              <a:t>Hands-on: module8/examples/pitfalls/</a:t>
+            </a:r>
+          </a:p>
+        </p:txBody>
+      </p:sp>
+      <p:sp>
+        <p:nvSpPr>
+          <p:cNvPr id="4" name="Slide Number Placeholder 3"/>
+          <p:cNvSpPr>
+            <a:spLocks noGrp="1"/>
+          </p:cNvSpPr>
+          <p:nvPr>
+            <p:ph type="sldNum" idx="5" sz="quarter"/>
+          </p:nvPr>
+        </p:nvSpPr>
+        <p:spPr/>
+      </p:sp>
+    </p:spTree>
+  </p:cSld>
+  <p:clrMapOvr>
+    <a:masterClrMapping/>
+  </p:clrMapOvr>
+</p:notes>
+</file>
+
+<file path=ppt/notesSlides/notesSlide15.xml><?xml version="1.0" encoding="utf-8"?>
+<p:notes xmlns:a="http://schemas.openxmlformats.org/drawingml/2006/main" xmlns:p="http://schemas.openxmlformats.org/presentationml/2006/main" xmlns:r="http://schemas.openxmlformats.org/officeDocument/2006/relationships">
+  <p:cSld>
+    <p:spTree>
+      <p:nvGrpSpPr>
+        <p:cNvPr id="1" name=""/>
+        <p:cNvGrpSpPr/>
+        <p:nvPr/>
+      </p:nvGrpSpPr>
+      <p:grpSpPr>
+        <a:xfrm>
+          <a:off x="0" y="0"/>
+          <a:ext cx="0" cy="0"/>
+          <a:chOff x="0" y="0"/>
+          <a:chExt cx="0" cy="0"/>
+        </a:xfrm>
+      </p:grpSpPr>
+      <p:sp>
+        <p:nvSpPr>
+          <p:cNvPr id="2" name="Slide Image Placeholder 1"/>
+          <p:cNvSpPr>
+            <a:spLocks noGrp="1"/>
+          </p:cNvSpPr>
+          <p:nvPr>
+            <p:ph type="sldImg" idx="2"/>
+          </p:nvPr>
+        </p:nvSpPr>
+        <p:spPr/>
+      </p:sp>
+      <p:sp>
+        <p:nvSpPr>
+          <p:cNvPr id="3" name="Notes Placeholder 2"/>
+          <p:cNvSpPr>
+            <a:spLocks noGrp="1"/>
+          </p:cNvSpPr>
+          <p:nvPr>
+            <p:ph type="body" idx="3" sz="quarter"/>
+          </p:nvPr>
+        </p:nvSpPr>
+        <p:spPr/>
+        <p:txBody>
+          <a:bodyPr/>
+          <a:lstStyle/>
+          <a:p>
+            <a:r>
+              <a:t>Hands-on: module8/examples/synthesizable_subset/</a:t>
+            </a:r>
+          </a:p>
+        </p:txBody>
+      </p:sp>
+      <p:sp>
+        <p:nvSpPr>
+          <p:cNvPr id="4" name="Slide Number Placeholder 3"/>
+          <p:cNvSpPr>
+            <a:spLocks noGrp="1"/>
+          </p:cNvSpPr>
+          <p:nvPr>
+            <p:ph type="sldNum" idx="5" sz="quarter"/>
+          </p:nvPr>
+        </p:nvSpPr>
+        <p:spPr/>
+      </p:sp>
+    </p:spTree>
+  </p:cSld>
+  <p:clrMapOvr>
+    <a:masterClrMapping/>
+  </p:clrMapOvr>
+</p:notes>
+</file>
+
+<file path=ppt/notesSlides/notesSlide16.xml><?xml version="1.0" encoding="utf-8"?>
+<p:notes xmlns:a="http://schemas.openxmlformats.org/drawingml/2006/main" xmlns:p="http://schemas.openxmlformats.org/presentationml/2006/main" xmlns:r="http://schemas.openxmlformats.org/officeDocument/2006/relationships">
+  <p:cSld>
+    <p:spTree>
+      <p:nvGrpSpPr>
+        <p:cNvPr id="1" name=""/>
+        <p:cNvGrpSpPr/>
+        <p:nvPr/>
+      </p:nvGrpSpPr>
+      <p:grpSpPr>
+        <a:xfrm>
+          <a:off x="0" y="0"/>
+          <a:ext cx="0" cy="0"/>
+          <a:chOff x="0" y="0"/>
+          <a:chExt cx="0" cy="0"/>
+        </a:xfrm>
+      </p:grpSpPr>
+      <p:sp>
+        <p:nvSpPr>
+          <p:cNvPr id="2" name="Slide Image Placeholder 1"/>
+          <p:cNvSpPr>
+            <a:spLocks noGrp="1"/>
+          </p:cNvSpPr>
+          <p:nvPr>
+            <p:ph type="sldImg" idx="2"/>
+          </p:nvPr>
+        </p:nvSpPr>
+        <p:spPr/>
+      </p:sp>
+      <p:sp>
+        <p:nvSpPr>
+          <p:cNvPr id="3" name="Notes Placeholder 2"/>
+          <p:cNvSpPr>
+            <a:spLocks noGrp="1"/>
+          </p:cNvSpPr>
+          <p:nvPr>
+            <p:ph type="body" idx="3" sz="quarter"/>
+          </p:nvPr>
+        </p:nvSpPr>
+        <p:spPr/>
+        <p:txBody>
+          <a:bodyPr/>
+          <a:lstStyle/>
+          <a:p>
+            <a:r>
+              <a:t>Hands-on: module8/examples/tool_support/</a:t>
+            </a:r>
+          </a:p>
+        </p:txBody>
+      </p:sp>
+      <p:sp>
+        <p:nvSpPr>
+          <p:cNvPr id="4" name="Slide Number Placeholder 3"/>
+          <p:cNvSpPr>
+            <a:spLocks noGrp="1"/>
+          </p:cNvSpPr>
+          <p:nvPr>
+            <p:ph type="sldNum" idx="5" sz="quarter"/>
+          </p:nvPr>
+        </p:nvSpPr>
+        <p:spPr/>
+      </p:sp>
+    </p:spTree>
+  </p:cSld>
+  <p:clrMapOvr>
+    <a:masterClrMapping/>
+  </p:clrMapOvr>
+</p:notes>
+</file>
+
+<file path=ppt/notesSlides/notesSlide17.xml><?xml version="1.0" encoding="utf-8"?>
+<p:notes xmlns:a="http://schemas.openxmlformats.org/drawingml/2006/main" xmlns:p="http://schemas.openxmlformats.org/presentationml/2006/main" xmlns:r="http://schemas.openxmlformats.org/officeDocument/2006/relationships">
+  <p:cSld>
+    <p:spTree>
+      <p:nvGrpSpPr>
+        <p:cNvPr id="1" name=""/>
+        <p:cNvGrpSpPr/>
+        <p:nvPr/>
+      </p:nvGrpSpPr>
+      <p:grpSpPr>
+        <a:xfrm>
+          <a:off x="0" y="0"/>
+          <a:ext cx="0" cy="0"/>
+          <a:chOff x="0" y="0"/>
+          <a:chExt cx="0" cy="0"/>
+        </a:xfrm>
+      </p:grpSpPr>
+      <p:sp>
+        <p:nvSpPr>
+          <p:cNvPr id="2" name="Slide Image Placeholder 1"/>
+          <p:cNvSpPr>
+            <a:spLocks noGrp="1"/>
+          </p:cNvSpPr>
+          <p:nvPr>
+            <p:ph type="sldImg" idx="2"/>
+          </p:nvPr>
+        </p:nvSpPr>
+        <p:spPr/>
+      </p:sp>
+      <p:sp>
+        <p:nvSpPr>
+          <p:cNvPr id="3" name="Notes Placeholder 2"/>
+          <p:cNvSpPr>
+            <a:spLocks noGrp="1"/>
+          </p:cNvSpPr>
+          <p:nvPr>
+            <p:ph type="body" idx="3" sz="quarter"/>
+          </p:nvPr>
+        </p:nvSpPr>
+        <p:spPr/>
+        <p:txBody>
+          <a:bodyPr/>
+          <a:lstStyle/>
+          <a:p>
+            <a:r>
+              <a:t>Hands-on: module8/examples/version_selection/</a:t>
+            </a:r>
+          </a:p>
+        </p:txBody>
+      </p:sp>
+      <p:sp>
+        <p:nvSpPr>
+          <p:cNvPr id="4" name="Slide Number Placeholder 3"/>
+          <p:cNvSpPr>
+            <a:spLocks noGrp="1"/>
+          </p:cNvSpPr>
+          <p:nvPr>
+            <p:ph type="sldNum" idx="5" sz="quarter"/>
+          </p:nvPr>
+        </p:nvSpPr>
+        <p:spPr/>
+      </p:sp>
+    </p:spTree>
+  </p:cSld>
+  <p:clrMapOvr>
+    <a:masterClrMapping/>
+  </p:clrMapOvr>
+</p:notes>
+</file>
+
+<file path=ppt/notesSlides/notesSlide18.xml><?xml version="1.0" encoding="utf-8"?>
+<p:notes xmlns:a="http://schemas.openxmlformats.org/drawingml/2006/main" xmlns:p="http://schemas.openxmlformats.org/presentationml/2006/main" xmlns:r="http://schemas.openxmlformats.org/officeDocument/2006/relationships">
+  <p:cSld>
+    <p:spTree>
+      <p:nvGrpSpPr>
+        <p:cNvPr id="1" name=""/>
+        <p:cNvGrpSpPr/>
+        <p:nvPr/>
+      </p:nvGrpSpPr>
+      <p:grpSpPr>
+        <a:xfrm>
+          <a:off x="0" y="0"/>
+          <a:ext cx="0" cy="0"/>
+          <a:chOff x="0" y="0"/>
+          <a:chExt cx="0" cy="0"/>
+        </a:xfrm>
+      </p:grpSpPr>
+      <p:sp>
+        <p:nvSpPr>
+          <p:cNvPr id="2" name="Slide Image Placeholder 1"/>
+          <p:cNvSpPr>
+            <a:spLocks noGrp="1"/>
+          </p:cNvSpPr>
+          <p:nvPr>
+            <p:ph type="sldImg" idx="2"/>
+          </p:nvPr>
+        </p:nvSpPr>
+        <p:spPr/>
+      </p:sp>
+      <p:sp>
+        <p:nvSpPr>
+          <p:cNvPr id="3" name="Notes Placeholder 2"/>
+          <p:cNvSpPr>
+            <a:spLocks noGrp="1"/>
+          </p:cNvSpPr>
+          <p:nvPr>
+            <p:ph type="body" idx="3" sz="quarter"/>
+          </p:nvPr>
+        </p:nvSpPr>
+        <p:spPr/>
+        <p:txBody>
+          <a:bodyPr/>
+          <a:lstStyle/>
+          <a:p>
+            <a:r>
               <a:t>Hands-on: module8/examples/version_timeline/</a:t>
             </a:r>
           </a:p>
@@ -804,7 +1235,7 @@
           <a:lstStyle/>
           <a:p>
             <a:r>
-              <a:t>Requires iverilog on PATH (apt install iverilog).</a:t>
+              <a:t>From MODULE8 Design Architecture.</a:t>
             </a:r>
           </a:p>
         </p:txBody>
@@ -874,7 +1305,7 @@
           <a:lstStyle/>
           <a:p>
             <a:r>
-              <a:t>Hands-on: module8/examples/construct_lookup/</a:t>
+              <a:t>From MODULE8 Design Architecture.</a:t>
             </a:r>
           </a:p>
         </p:txBody>
@@ -944,7 +1375,7 @@
           <a:lstStyle/>
           <a:p>
             <a:r>
-              <a:t>Hands-on: module8/examples/course_map/</a:t>
+              <a:t>From MODULE8 Verification &amp; Testing Methods.</a:t>
             </a:r>
           </a:p>
         </p:txBody>
@@ -1014,7 +1445,7 @@
           <a:lstStyle/>
           <a:p>
             <a:r>
-              <a:t>Hands-on: module8/examples/design_subset/</a:t>
+              <a:t>From MODULE8 Verification &amp; Testing Methods.</a:t>
             </a:r>
           </a:p>
         </p:txBody>
@@ -1084,7 +1515,7 @@
           <a:lstStyle/>
           <a:p>
             <a:r>
-              <a:t>Hands-on: module8/examples/learning_path/</a:t>
+              <a:t>From MODULE8 Verification &amp; Testing Methods.</a:t>
             </a:r>
           </a:p>
         </p:txBody>
@@ -1154,7 +1585,7 @@
           <a:lstStyle/>
           <a:p>
             <a:r>
-              <a:t>Hands-on: module8/examples/migration_steps/</a:t>
+              <a:t>From MODULE8 Topics Covered.</a:t>
             </a:r>
           </a:p>
         </p:txBody>
@@ -1224,7 +1655,7 @@
           <a:lstStyle/>
           <a:p>
             <a:r>
-              <a:t>Hands-on: module8/examples/pitfalls/</a:t>
+              <a:t>Run from course repository root.</a:t>
             </a:r>
           </a:p>
         </p:txBody>
@@ -1294,7 +1725,7 @@
           <a:lstStyle/>
           <a:p>
             <a:r>
-              <a:t>Hands-on: module8/examples/synthesizable_subset/</a:t>
+              <a:t>Hands-on: module8/examples/construct_lookup/</a:t>
             </a:r>
           </a:p>
         </p:txBody>
@@ -4452,7 +4883,7 @@
               </a:defRPr>
             </a:pPr>
             <a:r>
-              <a:t>Demo: Construct Lookup</a:t>
+              <a:t>2. How design subsets relate across the course</a:t>
             </a:r>
           </a:p>
         </p:txBody>
@@ -4465,15 +4896,13 @@
         </p:nvSpPr>
         <p:spPr>
           <a:xfrm>
-            <a:off x="548640" y="1051560"/>
-            <a:ext cx="11064240" cy="914400"/>
-          </a:xfrm>
-          <a:prstGeom prst="rect">
-            <a:avLst/>
-          </a:prstGeom>
-          <a:solidFill>
-            <a:srgbClr val="F4F4F4"/>
-          </a:solidFill>
+            <a:off x="548640" y="1234440"/>
+            <a:ext cx="11064240" cy="4937760"/>
+          </a:xfrm>
+          <a:prstGeom prst="rect">
+            <a:avLst/>
+          </a:prstGeom>
+          <a:noFill/>
         </p:spPr>
         <p:txBody>
           <a:bodyPr wrap="square">
@@ -4486,48 +4915,176 @@
                 <a:spcPts val="2200"/>
               </a:lnSpc>
               <a:spcAft>
-                <a:spcPts val="200"/>
+                <a:spcPts val="1000"/>
               </a:spcAft>
               <a:defRPr sz="2000" b="0">
                 <a:solidFill>
                   <a:srgbClr val="333333"/>
                 </a:solidFill>
-                <a:latin typeface="Consolas"/>
-              </a:defRPr>
-            </a:pPr>
-            <a:r>
-              <a:t>$ cd module8/examples/construct_lookup &amp;&amp; make clean &amp;&amp; make run</a:t>
-            </a:r>
-          </a:p>
-        </p:txBody>
-      </p:sp>
-      <p:pic>
-        <p:nvPicPr>
-          <p:cNvPr id="4" name="Picture 3" descr="ex01_construct_lookup.png"/>
-          <p:cNvPicPr>
-            <a:picLocks noChangeAspect="1"/>
-          </p:cNvPicPr>
-          <p:nvPr/>
-        </p:nvPicPr>
-        <p:blipFill>
-          <a:blip r:embed="rId2"/>
-          <a:stretch>
-            <a:fillRect/>
-          </a:stretch>
-        </p:blipFill>
-        <p:spPr>
-          <a:xfrm>
-            <a:off x="548640" y="1965960"/>
-            <a:ext cx="7071358" cy="3977639"/>
-          </a:xfrm>
-          <a:prstGeom prst="rect">
-            <a:avLst/>
-          </a:prstGeom>
-        </p:spPr>
-      </p:pic>
-      <p:sp>
-        <p:nvSpPr>
-          <p:cNvPr id="5" name="TextBox 4"/>
+                <a:latin typeface="Calibri"/>
+              </a:defRPr>
+            </a:pPr>
+            <a:r>
+              <a:t>• Verilog-only path: Modules 1–3 (1364-1995 → 2001 →</a:t>
+            </a:r>
+          </a:p>
+          <a:p>
+            <a:pPr>
+              <a:lnSpc>
+                <a:spcPts val="2200"/>
+              </a:lnSpc>
+              <a:spcAft>
+                <a:spcPts val="1000"/>
+              </a:spcAft>
+              <a:defRPr sz="2000" b="0">
+                <a:solidFill>
+                  <a:srgbClr val="333333"/>
+                </a:solidFill>
+                <a:latin typeface="Calibri"/>
+              </a:defRPr>
+            </a:pPr>
+            <a:r>
+              <a:t>      2005) — `wire`/`reg`, `always @*`</a:t>
+            </a:r>
+          </a:p>
+          <a:p>
+            <a:pPr>
+              <a:lnSpc>
+                <a:spcPts val="2200"/>
+              </a:lnSpc>
+              <a:spcAft>
+                <a:spcPts val="1000"/>
+              </a:spcAft>
+              <a:defRPr sz="2000" b="0">
+                <a:solidFill>
+                  <a:srgbClr val="333333"/>
+                </a:solidFill>
+                <a:latin typeface="Calibri"/>
+              </a:defRPr>
+            </a:pPr>
+            <a:r>
+              <a:t>• SystemVerilog design path: Modules 4–6 — `logic`,</a:t>
+            </a:r>
+          </a:p>
+          <a:p>
+            <a:pPr>
+              <a:lnSpc>
+                <a:spcPts val="2200"/>
+              </a:lnSpc>
+              <a:spcAft>
+                <a:spcPts val="1000"/>
+              </a:spcAft>
+              <a:defRPr sz="2000" b="0">
+                <a:solidFill>
+                  <a:srgbClr val="333333"/>
+                </a:solidFill>
+                <a:latin typeface="Calibri"/>
+              </a:defRPr>
+            </a:pPr>
+            <a:r>
+              <a:t>      `always_comb`/`always_ff`, interfaces, packages</a:t>
+            </a:r>
+          </a:p>
+          <a:p>
+            <a:pPr>
+              <a:lnSpc>
+                <a:spcPts val="2200"/>
+              </a:lnSpc>
+              <a:spcAft>
+                <a:spcPts val="1000"/>
+              </a:spcAft>
+              <a:defRPr sz="2000" b="0">
+                <a:solidFill>
+                  <a:srgbClr val="333333"/>
+                </a:solidFill>
+                <a:latin typeface="Calibri"/>
+              </a:defRPr>
+            </a:pPr>
+            <a:r>
+              <a:t>• Integration path: Module 7 side-by-side pairs;</a:t>
+            </a:r>
+          </a:p>
+          <a:p>
+            <a:pPr>
+              <a:lnSpc>
+                <a:spcPts val="2200"/>
+              </a:lnSpc>
+              <a:spcAft>
+                <a:spcPts val="1000"/>
+              </a:spcAft>
+              <a:defRPr sz="2000" b="0">
+                <a:solidFill>
+                  <a:srgbClr val="333333"/>
+                </a:solidFill>
+                <a:latin typeface="Calibri"/>
+              </a:defRPr>
+            </a:pPr>
+            <a:r>
+              <a:t>      Module 8 tables tie constructs to modules</a:t>
+            </a:r>
+          </a:p>
+          <a:p>
+            <a:pPr>
+              <a:lnSpc>
+                <a:spcPts val="2200"/>
+              </a:lnSpc>
+              <a:spcAft>
+                <a:spcPts val="1000"/>
+              </a:spcAft>
+              <a:defRPr sz="2000" b="0">
+                <a:solidFill>
+                  <a:srgbClr val="333333"/>
+                </a:solidFill>
+                <a:latin typeface="Calibri"/>
+              </a:defRPr>
+            </a:pPr>
+            <a:r>
+              <a:t>• Choosing a subset: project README should state</a:t>
+            </a:r>
+          </a:p>
+          <a:p>
+            <a:pPr>
+              <a:lnSpc>
+                <a:spcPts val="2200"/>
+              </a:lnSpc>
+              <a:spcAft>
+                <a:spcPts val="1000"/>
+              </a:spcAft>
+              <a:defRPr sz="2000" b="0">
+                <a:solidFill>
+                  <a:srgbClr val="333333"/>
+                </a:solidFill>
+                <a:latin typeface="Calibri"/>
+              </a:defRPr>
+            </a:pPr>
+            <a:r>
+              <a:t>      revision + allowed construct list from Module 8</a:t>
+            </a:r>
+          </a:p>
+          <a:p>
+            <a:pPr>
+              <a:lnSpc>
+                <a:spcPts val="2200"/>
+              </a:lnSpc>
+              <a:spcAft>
+                <a:spcPts val="1000"/>
+              </a:spcAft>
+              <a:defRPr sz="2000" b="0">
+                <a:solidFill>
+                  <a:srgbClr val="333333"/>
+                </a:solidFill>
+                <a:latin typeface="Calibri"/>
+              </a:defRPr>
+            </a:pPr>
+            <a:r>
+              <a:t>      tabl…</a:t>
+            </a:r>
+          </a:p>
+        </p:txBody>
+      </p:sp>
+      <p:sp>
+        <p:nvSpPr>
+          <p:cNvPr id="4" name="TextBox 3"/>
           <p:cNvSpPr txBox="1"/>
           <p:nvPr/>
         </p:nvSpPr>
@@ -4616,7 +5173,7 @@
               </a:defRPr>
             </a:pPr>
             <a:r>
-              <a:t>Demo: Course Map</a:t>
+              <a:t>3. Reference-to-RTL traceability</a:t>
             </a:r>
           </a:p>
         </p:txBody>
@@ -4629,15 +5186,13 @@
         </p:nvSpPr>
         <p:spPr>
           <a:xfrm>
-            <a:off x="548640" y="1051560"/>
-            <a:ext cx="11064240" cy="914400"/>
-          </a:xfrm>
-          <a:prstGeom prst="rect">
-            <a:avLst/>
-          </a:prstGeom>
-          <a:solidFill>
-            <a:srgbClr val="F4F4F4"/>
-          </a:solidFill>
+            <a:off x="548640" y="1234440"/>
+            <a:ext cx="11064240" cy="4937760"/>
+          </a:xfrm>
+          <a:prstGeom prst="rect">
+            <a:avLst/>
+          </a:prstGeom>
+          <a:noFill/>
         </p:spPr>
         <p:txBody>
           <a:bodyPr wrap="square">
@@ -4650,48 +5205,138 @@
                 <a:spcPts val="2200"/>
               </a:lnSpc>
               <a:spcAft>
-                <a:spcPts val="200"/>
+                <a:spcPts val="1000"/>
               </a:spcAft>
               <a:defRPr sz="2000" b="0">
                 <a:solidFill>
                   <a:srgbClr val="333333"/>
                 </a:solidFill>
-                <a:latin typeface="Consolas"/>
-              </a:defRPr>
-            </a:pPr>
-            <a:r>
-              <a:t>$ cd module8/examples/course_map &amp;&amp; make clean &amp;&amp; make run</a:t>
-            </a:r>
-          </a:p>
-        </p:txBody>
-      </p:sp>
-      <p:pic>
-        <p:nvPicPr>
-          <p:cNvPr id="4" name="Picture 3" descr="ex02_course_map.png"/>
-          <p:cNvPicPr>
-            <a:picLocks noChangeAspect="1"/>
-          </p:cNvPicPr>
-          <p:nvPr/>
-        </p:nvPicPr>
-        <p:blipFill>
-          <a:blip r:embed="rId2"/>
-          <a:stretch>
-            <a:fillRect/>
-          </a:stretch>
-        </p:blipFill>
-        <p:spPr>
-          <a:xfrm>
-            <a:off x="548640" y="1965960"/>
-            <a:ext cx="7071358" cy="3977639"/>
-          </a:xfrm>
-          <a:prstGeom prst="rect">
-            <a:avLst/>
-          </a:prstGeom>
-        </p:spPr>
-      </p:pic>
-      <p:sp>
-        <p:nvSpPr>
-          <p:cNvPr id="5" name="TextBox 4"/>
+                <a:latin typeface="Calibri"/>
+              </a:defRPr>
+            </a:pPr>
+            <a:r>
+              <a:t>• construct_lookup example: answers “which module</a:t>
+            </a:r>
+          </a:p>
+          <a:p>
+            <a:pPr>
+              <a:lnSpc>
+                <a:spcPts val="2200"/>
+              </a:lnSpc>
+              <a:spcAft>
+                <a:spcPts val="1000"/>
+              </a:spcAft>
+              <a:defRPr sz="2000" b="0">
+                <a:solidFill>
+                  <a:srgbClr val="333333"/>
+                </a:solidFill>
+                <a:latin typeface="Calibri"/>
+              </a:defRPr>
+            </a:pPr>
+            <a:r>
+              <a:t>      introduced X?” — links study back to Modules 1–6 DU…</a:t>
+            </a:r>
+          </a:p>
+          <a:p>
+            <a:pPr>
+              <a:lnSpc>
+                <a:spcPts val="2200"/>
+              </a:lnSpc>
+              <a:spcAft>
+                <a:spcPts val="1000"/>
+              </a:spcAft>
+              <a:defRPr sz="2000" b="0">
+                <a:solidFill>
+                  <a:srgbClr val="333333"/>
+                </a:solidFill>
+                <a:latin typeface="Calibri"/>
+              </a:defRPr>
+            </a:pPr>
+            <a:r>
+              <a:t>• course_map example: module titles map to</a:t>
+            </a:r>
+          </a:p>
+          <a:p>
+            <a:pPr>
+              <a:lnSpc>
+                <a:spcPts val="2200"/>
+              </a:lnSpc>
+              <a:spcAft>
+                <a:spcPts val="1000"/>
+              </a:spcAft>
+              <a:defRPr sz="2000" b="0">
+                <a:solidFill>
+                  <a:srgbClr val="333333"/>
+                </a:solidFill>
+                <a:latin typeface="Calibri"/>
+              </a:defRPr>
+            </a:pPr>
+            <a:r>
+              <a:t>      `docs/MODULEn.md` and `moduleN/dut/` where</a:t>
+            </a:r>
+          </a:p>
+          <a:p>
+            <a:pPr>
+              <a:lnSpc>
+                <a:spcPts val="2200"/>
+              </a:lnSpc>
+              <a:spcAft>
+                <a:spcPts val="1000"/>
+              </a:spcAft>
+              <a:defRPr sz="2000" b="0">
+                <a:solidFill>
+                  <a:srgbClr val="333333"/>
+                </a:solidFill>
+                <a:latin typeface="Calibri"/>
+              </a:defRPr>
+            </a:pPr>
+            <a:r>
+              <a:t>      applicable</a:t>
+            </a:r>
+          </a:p>
+          <a:p>
+            <a:pPr>
+              <a:lnSpc>
+                <a:spcPts val="2200"/>
+              </a:lnSpc>
+              <a:spcAft>
+                <a:spcPts val="1000"/>
+              </a:spcAft>
+              <a:defRPr sz="2000" b="0">
+                <a:solidFill>
+                  <a:srgbClr val="333333"/>
+                </a:solidFill>
+                <a:latin typeface="Calibri"/>
+              </a:defRPr>
+            </a:pPr>
+            <a:r>
+              <a:t>• synthesizable_subset example: do/avoid rules apply</a:t>
+            </a:r>
+          </a:p>
+          <a:p>
+            <a:pPr>
+              <a:lnSpc>
+                <a:spcPts val="2200"/>
+              </a:lnSpc>
+              <a:spcAft>
+                <a:spcPts val="1000"/>
+              </a:spcAft>
+              <a:defRPr sz="2000" b="0">
+                <a:solidFill>
+                  <a:srgbClr val="333333"/>
+                </a:solidFill>
+                <a:latin typeface="Calibri"/>
+              </a:defRPr>
+            </a:pPr>
+            <a:r>
+              <a:t>      to all prior DUT architectures</a:t>
+            </a:r>
+          </a:p>
+        </p:txBody>
+      </p:sp>
+      <p:sp>
+        <p:nvSpPr>
+          <p:cNvPr id="4" name="TextBox 3"/>
           <p:cNvSpPr txBox="1"/>
           <p:nvPr/>
         </p:nvSpPr>
@@ -4754,8 +5399,8 @@
         </p:nvSpPr>
         <p:spPr>
           <a:xfrm>
-            <a:off x="548640" y="411480"/>
-            <a:ext cx="11064240" cy="777240"/>
+            <a:off x="548640" y="2743200"/>
+            <a:ext cx="11064240" cy="1371600"/>
           </a:xfrm>
           <a:prstGeom prst="rect">
             <a:avLst/>
@@ -4768,11 +5413,11 @@
           </a:bodyPr>
           <a:lstStyle/>
           <a:p>
-            <a:pPr>
-              <a:lnSpc>
-                <a:spcPts val="2200"/>
-              </a:lnSpc>
-              <a:defRPr sz="2800" b="1">
+            <a:pPr algn="ctr">
+              <a:lnSpc>
+                <a:spcPts val="2200"/>
+              </a:lnSpc>
+              <a:defRPr sz="3600" b="1">
                 <a:solidFill>
                   <a:srgbClr val="1A1A2E"/>
                 </a:solidFill>
@@ -4780,7 +5425,7 @@
               </a:defRPr>
             </a:pPr>
             <a:r>
-              <a:t>Demo: Design Subset</a:t>
+              <a:t>Verification &amp; testing methods</a:t>
             </a:r>
           </a:p>
         </p:txBody>
@@ -4788,74 +5433,6 @@
       <p:sp>
         <p:nvSpPr>
           <p:cNvPr id="3" name="TextBox 2"/>
-          <p:cNvSpPr txBox="1"/>
-          <p:nvPr/>
-        </p:nvSpPr>
-        <p:spPr>
-          <a:xfrm>
-            <a:off x="548640" y="1051560"/>
-            <a:ext cx="11064240" cy="914400"/>
-          </a:xfrm>
-          <a:prstGeom prst="rect">
-            <a:avLst/>
-          </a:prstGeom>
-          <a:solidFill>
-            <a:srgbClr val="F4F4F4"/>
-          </a:solidFill>
-        </p:spPr>
-        <p:txBody>
-          <a:bodyPr wrap="square">
-            <a:noAutofit/>
-          </a:bodyPr>
-          <a:lstStyle/>
-          <a:p>
-            <a:pPr>
-              <a:lnSpc>
-                <a:spcPts val="2200"/>
-              </a:lnSpc>
-              <a:spcAft>
-                <a:spcPts val="200"/>
-              </a:spcAft>
-              <a:defRPr sz="2000" b="0">
-                <a:solidFill>
-                  <a:srgbClr val="333333"/>
-                </a:solidFill>
-                <a:latin typeface="Consolas"/>
-              </a:defRPr>
-            </a:pPr>
-            <a:r>
-              <a:t>$ cd module8/examples/design_subset &amp;&amp; make clean &amp;&amp; make run</a:t>
-            </a:r>
-          </a:p>
-        </p:txBody>
-      </p:sp>
-      <p:pic>
-        <p:nvPicPr>
-          <p:cNvPr id="4" name="Picture 3" descr="ex03_design_subset.png"/>
-          <p:cNvPicPr>
-            <a:picLocks noChangeAspect="1"/>
-          </p:cNvPicPr>
-          <p:nvPr/>
-        </p:nvPicPr>
-        <p:blipFill>
-          <a:blip r:embed="rId2"/>
-          <a:stretch>
-            <a:fillRect/>
-          </a:stretch>
-        </p:blipFill>
-        <p:spPr>
-          <a:xfrm>
-            <a:off x="548640" y="1965960"/>
-            <a:ext cx="7071358" cy="3977639"/>
-          </a:xfrm>
-          <a:prstGeom prst="rect">
-            <a:avLst/>
-          </a:prstGeom>
-        </p:spPr>
-      </p:pic>
-      <p:sp>
-        <p:nvSpPr>
-          <p:cNvPr id="5" name="TextBox 4"/>
           <p:cNvSpPr txBox="1"/>
           <p:nvPr/>
         </p:nvSpPr>
@@ -4944,58 +5521,14 @@
               </a:defRPr>
             </a:pPr>
             <a:r>
-              <a:t>Demo: Learning Path</a:t>
-            </a:r>
-          </a:p>
-        </p:txBody>
-      </p:sp>
-      <p:sp>
-        <p:nvSpPr>
-          <p:cNvPr id="3" name="TextBox 2"/>
-          <p:cNvSpPr txBox="1"/>
-          <p:nvPr/>
-        </p:nvSpPr>
-        <p:spPr>
-          <a:xfrm>
-            <a:off x="548640" y="1051560"/>
-            <a:ext cx="11064240" cy="914400"/>
-          </a:xfrm>
-          <a:prstGeom prst="rect">
-            <a:avLst/>
-          </a:prstGeom>
-          <a:solidFill>
-            <a:srgbClr val="F4F4F4"/>
-          </a:solidFill>
-        </p:spPr>
-        <p:txBody>
-          <a:bodyPr wrap="square">
-            <a:noAutofit/>
-          </a:bodyPr>
-          <a:lstStyle/>
-          <a:p>
-            <a:pPr>
-              <a:lnSpc>
-                <a:spcPts val="2200"/>
-              </a:lnSpc>
-              <a:spcAft>
-                <a:spcPts val="200"/>
-              </a:spcAft>
-              <a:defRPr sz="2000" b="0">
-                <a:solidFill>
-                  <a:srgbClr val="333333"/>
-                </a:solidFill>
-                <a:latin typeface="Consolas"/>
-              </a:defRPr>
-            </a:pPr>
-            <a:r>
-              <a:t>$ cd module8/examples/learning_path &amp;&amp; make clean &amp;&amp; make run</a:t>
+              <a:t>Testing and closure flow</a:t>
             </a:r>
           </a:p>
         </p:txBody>
       </p:sp>
       <p:pic>
         <p:nvPicPr>
-          <p:cNvPr id="4" name="Picture 3" descr="ex04_learning_path.png"/>
+          <p:cNvPr id="3" name="Picture 2" descr="testing_methods.png"/>
           <p:cNvPicPr>
             <a:picLocks noChangeAspect="1"/>
           </p:cNvPicPr>
@@ -5009,14 +5542,53 @@
         </p:blipFill>
         <p:spPr>
           <a:xfrm>
-            <a:off x="548640" y="1965960"/>
-            <a:ext cx="7071358" cy="3977639"/>
+            <a:off x="548640" y="1143000"/>
+            <a:ext cx="8128000" cy="4572000"/>
           </a:xfrm>
           <a:prstGeom prst="rect">
             <a:avLst/>
           </a:prstGeom>
         </p:spPr>
       </p:pic>
+      <p:sp>
+        <p:nvSpPr>
+          <p:cNvPr id="4" name="TextBox 3"/>
+          <p:cNvSpPr txBox="1"/>
+          <p:nvPr/>
+        </p:nvSpPr>
+        <p:spPr>
+          <a:xfrm>
+            <a:off x="548640" y="5897880"/>
+            <a:ext cx="11064240" cy="411480"/>
+          </a:xfrm>
+          <a:prstGeom prst="rect">
+            <a:avLst/>
+          </a:prstGeom>
+          <a:noFill/>
+        </p:spPr>
+        <p:txBody>
+          <a:bodyPr wrap="square">
+            <a:noAutofit/>
+          </a:bodyPr>
+          <a:lstStyle/>
+          <a:p>
+            <a:pPr>
+              <a:lnSpc>
+                <a:spcPts val="2200"/>
+              </a:lnSpc>
+              <a:defRPr sz="1200" b="0">
+                <a:solidFill>
+                  <a:srgbClr val="333333"/>
+                </a:solidFill>
+                <a:latin typeface="Calibri"/>
+              </a:defRPr>
+            </a:pPr>
+            <a:r>
+              <a:t>Module 8: how tests, checks, and metrics close verification goals.</a:t>
+            </a:r>
+          </a:p>
+        </p:txBody>
+      </p:sp>
       <p:sp>
         <p:nvSpPr>
           <p:cNvPr id="5" name="TextBox 4"/>
@@ -5108,7 +5680,7 @@
               </a:defRPr>
             </a:pPr>
             <a:r>
-              <a:t>Demo: Migration Steps</a:t>
+              <a:t>1. Verification strategy without new testbenches</a:t>
             </a:r>
           </a:p>
         </p:txBody>
@@ -5121,15 +5693,13 @@
         </p:nvSpPr>
         <p:spPr>
           <a:xfrm>
-            <a:off x="548640" y="1051560"/>
-            <a:ext cx="11064240" cy="914400"/>
-          </a:xfrm>
-          <a:prstGeom prst="rect">
-            <a:avLst/>
-          </a:prstGeom>
-          <a:solidFill>
-            <a:srgbClr val="F4F4F4"/>
-          </a:solidFill>
+            <a:off x="548640" y="1234440"/>
+            <a:ext cx="11064240" cy="4937760"/>
+          </a:xfrm>
+          <a:prstGeom prst="rect">
+            <a:avLst/>
+          </a:prstGeom>
+          <a:noFill/>
         </p:spPr>
         <p:txBody>
           <a:bodyPr wrap="square">
@@ -5142,48 +5712,176 @@
                 <a:spcPts val="2200"/>
               </a:lnSpc>
               <a:spcAft>
-                <a:spcPts val="200"/>
+                <a:spcPts val="1000"/>
               </a:spcAft>
               <a:defRPr sz="2000" b="0">
                 <a:solidFill>
                   <a:srgbClr val="333333"/>
                 </a:solidFill>
-                <a:latin typeface="Consolas"/>
-              </a:defRPr>
-            </a:pPr>
-            <a:r>
-              <a:t>$ cd module8/examples/migration_steps &amp;&amp; make clean &amp;&amp; make run</a:t>
-            </a:r>
-          </a:p>
-        </p:txBody>
-      </p:sp>
-      <p:pic>
-        <p:nvPicPr>
-          <p:cNvPr id="4" name="Picture 3" descr="ex05_migration_steps.png"/>
-          <p:cNvPicPr>
-            <a:picLocks noChangeAspect="1"/>
-          </p:cNvPicPr>
-          <p:nvPr/>
-        </p:nvPicPr>
-        <p:blipFill>
-          <a:blip r:embed="rId2"/>
-          <a:stretch>
-            <a:fillRect/>
-          </a:stretch>
-        </p:blipFill>
-        <p:spPr>
-          <a:xfrm>
-            <a:off x="548640" y="1965960"/>
-            <a:ext cx="7071358" cy="3977639"/>
-          </a:xfrm>
-          <a:prstGeom prst="rect">
-            <a:avLst/>
-          </a:prstGeom>
-        </p:spPr>
-      </p:pic>
-      <p:sp>
-        <p:nvSpPr>
-          <p:cNvPr id="5" name="TextBox 4"/>
+                <a:latin typeface="Calibri"/>
+              </a:defRPr>
+            </a:pPr>
+            <a:r>
+              <a:t>• Module 8 does not add tests — it documents how to</a:t>
+            </a:r>
+          </a:p>
+          <a:p>
+            <a:pPr>
+              <a:lnSpc>
+                <a:spcPts val="2200"/>
+              </a:lnSpc>
+              <a:spcAft>
+                <a:spcPts val="1000"/>
+              </a:spcAft>
+              <a:defRPr sz="2000" b="0">
+                <a:solidFill>
+                  <a:srgbClr val="333333"/>
+                </a:solidFill>
+                <a:latin typeface="Calibri"/>
+              </a:defRPr>
+            </a:pPr>
+            <a:r>
+              <a:t>      test when applying course knowledge</a:t>
+            </a:r>
+          </a:p>
+          <a:p>
+            <a:pPr>
+              <a:lnSpc>
+                <a:spcPts val="2200"/>
+              </a:lnSpc>
+              <a:spcAft>
+                <a:spcPts val="1000"/>
+              </a:spcAft>
+              <a:defRPr sz="2000" b="0">
+                <a:solidFill>
+                  <a:srgbClr val="333333"/>
+                </a:solidFill>
+                <a:latin typeface="Calibri"/>
+              </a:defRPr>
+            </a:pPr>
+            <a:r>
+              <a:t>• Regression rule: after picking a standard from</a:t>
+            </a:r>
+          </a:p>
+          <a:p>
+            <a:pPr>
+              <a:lnSpc>
+                <a:spcPts val="2200"/>
+              </a:lnSpc>
+              <a:spcAft>
+                <a:spcPts val="1000"/>
+              </a:spcAft>
+              <a:defRPr sz="2000" b="0">
+                <a:solidFill>
+                  <a:srgbClr val="333333"/>
+                </a:solidFill>
+                <a:latin typeface="Calibri"/>
+              </a:defRPr>
+            </a:pPr>
+            <a:r>
+              <a:t>      Module 8 tables, run the owning module's</a:t>
+            </a:r>
+          </a:p>
+          <a:p>
+            <a:pPr>
+              <a:lnSpc>
+                <a:spcPts val="2200"/>
+              </a:lnSpc>
+              <a:spcAft>
+                <a:spcPts val="1000"/>
+              </a:spcAft>
+              <a:defRPr sz="2000" b="0">
+                <a:solidFill>
+                  <a:srgbClr val="333333"/>
+                </a:solidFill>
+                <a:latin typeface="Calibri"/>
+              </a:defRPr>
+            </a:pPr>
+            <a:r>
+              <a:t>      `./scripts/…</a:t>
+            </a:r>
+          </a:p>
+          <a:p>
+            <a:pPr>
+              <a:lnSpc>
+                <a:spcPts val="2200"/>
+              </a:lnSpc>
+              <a:spcAft>
+                <a:spcPts val="1000"/>
+              </a:spcAft>
+              <a:defRPr sz="2000" b="0">
+                <a:solidFill>
+                  <a:srgbClr val="333333"/>
+                </a:solidFill>
+                <a:latin typeface="Calibri"/>
+              </a:defRPr>
+            </a:pPr>
+            <a:r>
+              <a:t>• Migration rule: use Module 7 equivalence tests</a:t>
+            </a:r>
+          </a:p>
+          <a:p>
+            <a:pPr>
+              <a:lnSpc>
+                <a:spcPts val="2200"/>
+              </a:lnSpc>
+              <a:spcAft>
+                <a:spcPts val="1000"/>
+              </a:spcAft>
+              <a:defRPr sz="2000" b="0">
+                <a:solidFill>
+                  <a:srgbClr val="333333"/>
+                </a:solidFill>
+                <a:latin typeface="Calibri"/>
+              </a:defRPr>
+            </a:pPr>
+            <a:r>
+              <a:t>      whenever syntax changes under stable behavior</a:t>
+            </a:r>
+          </a:p>
+          <a:p>
+            <a:pPr>
+              <a:lnSpc>
+                <a:spcPts val="2200"/>
+              </a:lnSpc>
+              <a:spcAft>
+                <a:spcPts val="1000"/>
+              </a:spcAft>
+              <a:defRPr sz="2000" b="0">
+                <a:solidFill>
+                  <a:srgbClr val="333333"/>
+                </a:solidFill>
+                <a:latin typeface="Calibri"/>
+              </a:defRPr>
+            </a:pPr>
+            <a:r>
+              <a:t>• Subset rule: CI/lint flags should match the</a:t>
+            </a:r>
+          </a:p>
+          <a:p>
+            <a:pPr>
+              <a:lnSpc>
+                <a:spcPts val="2200"/>
+              </a:lnSpc>
+              <a:spcAft>
+                <a:spcPts val="1000"/>
+              </a:spcAft>
+              <a:defRPr sz="2000" b="0">
+                <a:solidFill>
+                  <a:srgbClr val="333333"/>
+                </a:solidFill>
+                <a:latin typeface="Calibri"/>
+              </a:defRPr>
+            </a:pPr>
+            <a:r>
+              <a:t>      documented Verilog-only vs SV-design subset</a:t>
+            </a:r>
+          </a:p>
+        </p:txBody>
+      </p:sp>
+      <p:sp>
+        <p:nvSpPr>
+          <p:cNvPr id="4" name="TextBox 3"/>
           <p:cNvSpPr txBox="1"/>
           <p:nvPr/>
         </p:nvSpPr>
@@ -5272,7 +5970,7 @@
               </a:defRPr>
             </a:pPr>
             <a:r>
-              <a:t>Demo: Pitfalls</a:t>
+              <a:t>2. Lookup-driven test planning</a:t>
             </a:r>
           </a:p>
         </p:txBody>
@@ -5285,15 +5983,13 @@
         </p:nvSpPr>
         <p:spPr>
           <a:xfrm>
-            <a:off x="548640" y="1051560"/>
-            <a:ext cx="11064240" cy="914400"/>
-          </a:xfrm>
-          <a:prstGeom prst="rect">
-            <a:avLst/>
-          </a:prstGeom>
-          <a:solidFill>
-            <a:srgbClr val="F4F4F4"/>
-          </a:solidFill>
+            <a:off x="548640" y="1234440"/>
+            <a:ext cx="11064240" cy="4937760"/>
+          </a:xfrm>
+          <a:prstGeom prst="rect">
+            <a:avLst/>
+          </a:prstGeom>
+          <a:noFill/>
         </p:spPr>
         <p:txBody>
           <a:bodyPr wrap="square">
@@ -5306,48 +6002,138 @@
                 <a:spcPts val="2200"/>
               </a:lnSpc>
               <a:spcAft>
-                <a:spcPts val="200"/>
+                <a:spcPts val="1000"/>
               </a:spcAft>
               <a:defRPr sz="2000" b="0">
                 <a:solidFill>
                   <a:srgbClr val="333333"/>
                 </a:solidFill>
-                <a:latin typeface="Consolas"/>
-              </a:defRPr>
-            </a:pPr>
-            <a:r>
-              <a:t>$ cd module8/examples/pitfalls &amp;&amp; make clean &amp;&amp; make run</a:t>
-            </a:r>
-          </a:p>
-        </p:txBody>
-      </p:sp>
-      <p:pic>
-        <p:nvPicPr>
-          <p:cNvPr id="4" name="Picture 3" descr="ex06_pitfalls.png"/>
-          <p:cNvPicPr>
-            <a:picLocks noChangeAspect="1"/>
-          </p:cNvPicPr>
-          <p:nvPr/>
-        </p:nvPicPr>
-        <p:blipFill>
-          <a:blip r:embed="rId2"/>
-          <a:stretch>
-            <a:fillRect/>
-          </a:stretch>
-        </p:blipFill>
-        <p:spPr>
-          <a:xfrm>
-            <a:off x="548640" y="1965960"/>
-            <a:ext cx="7071358" cy="3977639"/>
-          </a:xfrm>
-          <a:prstGeom prst="rect">
-            <a:avLst/>
-          </a:prstGeom>
-        </p:spPr>
-      </p:pic>
-      <p:sp>
-        <p:nvSpPr>
-          <p:cNvPr id="5" name="TextBox 4"/>
+                <a:latin typeface="Calibri"/>
+              </a:defRPr>
+            </a:pPr>
+            <a:r>
+              <a:t>• Before using a construct, run construct_lookup /</a:t>
+            </a:r>
+          </a:p>
+          <a:p>
+            <a:pPr>
+              <a:lnSpc>
+                <a:spcPts val="2200"/>
+              </a:lnSpc>
+              <a:spcAft>
+                <a:spcPts val="1000"/>
+              </a:spcAft>
+              <a:defRPr sz="2000" b="0">
+                <a:solidFill>
+                  <a:srgbClr val="333333"/>
+                </a:solidFill>
+                <a:latin typeface="Calibri"/>
+              </a:defRPr>
+            </a:pPr>
+            <a:r>
+              <a:t>      Section 2 table — note minimum module and revision</a:t>
+            </a:r>
+          </a:p>
+          <a:p>
+            <a:pPr>
+              <a:lnSpc>
+                <a:spcPts val="2200"/>
+              </a:lnSpc>
+              <a:spcAft>
+                <a:spcPts val="1000"/>
+              </a:spcAft>
+              <a:defRPr sz="2000" b="0">
+                <a:solidFill>
+                  <a:srgbClr val="333333"/>
+                </a:solidFill>
+                <a:latin typeface="Calibri"/>
+              </a:defRPr>
+            </a:pPr>
+            <a:r>
+              <a:t>• pitfalls example: common mistakes (wrong standard,</a:t>
+            </a:r>
+          </a:p>
+          <a:p>
+            <a:pPr>
+              <a:lnSpc>
+                <a:spcPts val="2200"/>
+              </a:lnSpc>
+              <a:spcAft>
+                <a:spcPts val="1000"/>
+              </a:spcAft>
+              <a:defRPr sz="2000" b="0">
+                <a:solidFill>
+                  <a:srgbClr val="333333"/>
+                </a:solidFill>
+                <a:latin typeface="Calibri"/>
+              </a:defRPr>
+            </a:pPr>
+            <a:r>
+              <a:t>      mixed subsets) become test-plan checklist items</a:t>
+            </a:r>
+          </a:p>
+          <a:p>
+            <a:pPr>
+              <a:lnSpc>
+                <a:spcPts val="2200"/>
+              </a:lnSpc>
+              <a:spcAft>
+                <a:spcPts val="1000"/>
+              </a:spcAft>
+              <a:defRPr sz="2000" b="0">
+                <a:solidFill>
+                  <a:srgbClr val="333333"/>
+                </a:solidFill>
+                <a:latin typeface="Calibri"/>
+              </a:defRPr>
+            </a:pPr>
+            <a:r>
+              <a:t>• version_selection example: document</a:t>
+            </a:r>
+          </a:p>
+          <a:p>
+            <a:pPr>
+              <a:lnSpc>
+                <a:spcPts val="2200"/>
+              </a:lnSpc>
+              <a:spcAft>
+                <a:spcPts val="1000"/>
+              </a:spcAft>
+              <a:defRPr sz="2000" b="0">
+                <a:solidFill>
+                  <a:srgbClr val="333333"/>
+                </a:solidFill>
+                <a:latin typeface="Calibri"/>
+              </a:defRPr>
+            </a:pPr>
+            <a:r>
+              <a:t>      simulator/synthesis flags next to chosen revision in</a:t>
+            </a:r>
+          </a:p>
+          <a:p>
+            <a:pPr>
+              <a:lnSpc>
+                <a:spcPts val="2200"/>
+              </a:lnSpc>
+              <a:spcAft>
+                <a:spcPts val="1000"/>
+              </a:spcAft>
+              <a:defRPr sz="2000" b="0">
+                <a:solidFill>
+                  <a:srgbClr val="333333"/>
+                </a:solidFill>
+                <a:latin typeface="Calibri"/>
+              </a:defRPr>
+            </a:pPr>
+            <a:r>
+              <a:t>      project RE…</a:t>
+            </a:r>
+          </a:p>
+        </p:txBody>
+      </p:sp>
+      <p:sp>
+        <p:nvSpPr>
+          <p:cNvPr id="4" name="TextBox 3"/>
           <p:cNvSpPr txBox="1"/>
           <p:nvPr/>
         </p:nvSpPr>
@@ -5436,7 +6222,7 @@
               </a:defRPr>
             </a:pPr>
             <a:r>
-              <a:t>Demo: Synthesizable Subset</a:t>
+              <a:t>3. Closure and ongoing maintenance</a:t>
             </a:r>
           </a:p>
         </p:txBody>
@@ -5449,15 +6235,13 @@
         </p:nvSpPr>
         <p:spPr>
           <a:xfrm>
-            <a:off x="548640" y="1051560"/>
-            <a:ext cx="11064240" cy="914400"/>
-          </a:xfrm>
-          <a:prstGeom prst="rect">
-            <a:avLst/>
-          </a:prstGeom>
-          <a:solidFill>
-            <a:srgbClr val="F4F4F4"/>
-          </a:solidFill>
+            <a:off x="548640" y="1234440"/>
+            <a:ext cx="11064240" cy="4937760"/>
+          </a:xfrm>
+          <a:prstGeom prst="rect">
+            <a:avLst/>
+          </a:prstGeom>
+          <a:noFill/>
         </p:spPr>
         <p:txBody>
           <a:bodyPr wrap="square">
@@ -5470,48 +6254,119 @@
                 <a:spcPts val="2200"/>
               </a:lnSpc>
               <a:spcAft>
-                <a:spcPts val="200"/>
+                <a:spcPts val="1000"/>
               </a:spcAft>
               <a:defRPr sz="2000" b="0">
                 <a:solidFill>
                   <a:srgbClr val="333333"/>
                 </a:solidFill>
-                <a:latin typeface="Consolas"/>
-              </a:defRPr>
-            </a:pPr>
-            <a:r>
-              <a:t>$ cd module8/examples/synthesizable_subset &amp;&amp; make clean &amp;&amp; make run</a:t>
-            </a:r>
-          </a:p>
-        </p:txBody>
-      </p:sp>
-      <p:pic>
-        <p:nvPicPr>
-          <p:cNvPr id="4" name="Picture 3" descr="ex07_synthesizable_subset.png"/>
-          <p:cNvPicPr>
-            <a:picLocks noChangeAspect="1"/>
-          </p:cNvPicPr>
-          <p:nvPr/>
-        </p:nvPicPr>
-        <p:blipFill>
-          <a:blip r:embed="rId2"/>
-          <a:stretch>
-            <a:fillRect/>
-          </a:stretch>
-        </p:blipFill>
-        <p:spPr>
-          <a:xfrm>
-            <a:off x="548640" y="1965960"/>
-            <a:ext cx="7071358" cy="3977639"/>
-          </a:xfrm>
-          <a:prstGeom prst="rect">
-            <a:avLst/>
-          </a:prstGeom>
-        </p:spPr>
-      </p:pic>
-      <p:sp>
-        <p:nvSpPr>
-          <p:cNvPr id="5" name="TextBox 4"/>
+                <a:latin typeface="Calibri"/>
+              </a:defRPr>
+            </a:pPr>
+            <a:r>
+              <a:t>• learning_path example: ordered study 1→6, then 7;</a:t>
+            </a:r>
+          </a:p>
+          <a:p>
+            <a:pPr>
+              <a:lnSpc>
+                <a:spcPts val="2200"/>
+              </a:lnSpc>
+              <a:spcAft>
+                <a:spcPts val="1000"/>
+              </a:spcAft>
+              <a:defRPr sz="2000" b="0">
+                <a:solidFill>
+                  <a:srgbClr val="333333"/>
+                </a:solidFill>
+                <a:latin typeface="Calibri"/>
+              </a:defRPr>
+            </a:pPr>
+            <a:r>
+              <a:t>      use 8 during real projects as guardrails</a:t>
+            </a:r>
+          </a:p>
+          <a:p>
+            <a:pPr>
+              <a:lnSpc>
+                <a:spcPts val="2200"/>
+              </a:lnSpc>
+              <a:spcAft>
+                <a:spcPts val="1000"/>
+              </a:spcAft>
+              <a:defRPr sz="2000" b="0">
+                <a:solidFill>
+                  <a:srgbClr val="333333"/>
+                </a:solidFill>
+                <a:latin typeface="Calibri"/>
+              </a:defRPr>
+            </a:pPr>
+            <a:r>
+              <a:t>• When a new IEEE revision ships: add Module N, update</a:t>
+            </a:r>
+          </a:p>
+          <a:p>
+            <a:pPr>
+              <a:lnSpc>
+                <a:spcPts val="2200"/>
+              </a:lnSpc>
+              <a:spcAft>
+                <a:spcPts val="1000"/>
+              </a:spcAft>
+              <a:defRPr sz="2000" b="0">
+                <a:solidFill>
+                  <a:srgbClr val="333333"/>
+                </a:solidFill>
+                <a:latin typeface="Calibri"/>
+              </a:defRPr>
+            </a:pPr>
+            <a:r>
+              <a:t>      Module 7 pairs and Module 8 tables — re-run al…</a:t>
+            </a:r>
+          </a:p>
+          <a:p>
+            <a:pPr>
+              <a:lnSpc>
+                <a:spcPts val="2200"/>
+              </a:lnSpc>
+              <a:spcAft>
+                <a:spcPts val="1000"/>
+              </a:spcAft>
+              <a:defRPr sz="2000" b="0">
+                <a:solidFill>
+                  <a:srgbClr val="333333"/>
+                </a:solidFill>
+                <a:latin typeface="Calibri"/>
+              </a:defRPr>
+            </a:pPr>
+            <a:r>
+              <a:t>• Golden rule: Module 8 guides *what* to run; Modules</a:t>
+            </a:r>
+          </a:p>
+          <a:p>
+            <a:pPr>
+              <a:lnSpc>
+                <a:spcPts val="2200"/>
+              </a:lnSpc>
+              <a:spcAft>
+                <a:spcPts val="1000"/>
+              </a:spcAft>
+              <a:defRPr sz="2000" b="0">
+                <a:solidFill>
+                  <a:srgbClr val="333333"/>
+                </a:solidFill>
+                <a:latin typeface="Calibri"/>
+              </a:defRPr>
+            </a:pPr>
+            <a:r>
+              <a:t>      1–7 provide the actual tests and DUTs</a:t>
+            </a:r>
+          </a:p>
+        </p:txBody>
+      </p:sp>
+      <p:sp>
+        <p:nvSpPr>
+          <p:cNvPr id="4" name="TextBox 3"/>
           <p:cNvSpPr txBox="1"/>
           <p:nvPr/>
         </p:nvSpPr>
@@ -5574,8 +6429,8 @@
         </p:nvSpPr>
         <p:spPr>
           <a:xfrm>
-            <a:off x="548640" y="411480"/>
-            <a:ext cx="11064240" cy="777240"/>
+            <a:off x="548640" y="2743200"/>
+            <a:ext cx="11064240" cy="1371600"/>
           </a:xfrm>
           <a:prstGeom prst="rect">
             <a:avLst/>
@@ -5588,11 +6443,11 @@
           </a:bodyPr>
           <a:lstStyle/>
           <a:p>
-            <a:pPr>
-              <a:lnSpc>
-                <a:spcPts val="2200"/>
-              </a:lnSpc>
-              <a:defRPr sz="2800" b="1">
+            <a:pPr algn="ctr">
+              <a:lnSpc>
+                <a:spcPts val="2200"/>
+              </a:lnSpc>
+              <a:defRPr sz="3600" b="1">
                 <a:solidFill>
                   <a:srgbClr val="1A1A2E"/>
                 </a:solidFill>
@@ -5600,7 +6455,7 @@
               </a:defRPr>
             </a:pPr>
             <a:r>
-              <a:t>Demo: Tool Support</a:t>
+              <a:t>Syllabus topics</a:t>
             </a:r>
           </a:p>
         </p:txBody>
@@ -5608,74 +6463,6 @@
       <p:sp>
         <p:nvSpPr>
           <p:cNvPr id="3" name="TextBox 2"/>
-          <p:cNvSpPr txBox="1"/>
-          <p:nvPr/>
-        </p:nvSpPr>
-        <p:spPr>
-          <a:xfrm>
-            <a:off x="548640" y="1051560"/>
-            <a:ext cx="11064240" cy="914400"/>
-          </a:xfrm>
-          <a:prstGeom prst="rect">
-            <a:avLst/>
-          </a:prstGeom>
-          <a:solidFill>
-            <a:srgbClr val="F4F4F4"/>
-          </a:solidFill>
-        </p:spPr>
-        <p:txBody>
-          <a:bodyPr wrap="square">
-            <a:noAutofit/>
-          </a:bodyPr>
-          <a:lstStyle/>
-          <a:p>
-            <a:pPr>
-              <a:lnSpc>
-                <a:spcPts val="2200"/>
-              </a:lnSpc>
-              <a:spcAft>
-                <a:spcPts val="200"/>
-              </a:spcAft>
-              <a:defRPr sz="2000" b="0">
-                <a:solidFill>
-                  <a:srgbClr val="333333"/>
-                </a:solidFill>
-                <a:latin typeface="Consolas"/>
-              </a:defRPr>
-            </a:pPr>
-            <a:r>
-              <a:t>$ cd module8/examples/tool_support &amp;&amp; make clean &amp;&amp; make run</a:t>
-            </a:r>
-          </a:p>
-        </p:txBody>
-      </p:sp>
-      <p:pic>
-        <p:nvPicPr>
-          <p:cNvPr id="4" name="Picture 3" descr="ex08_tool_support.png"/>
-          <p:cNvPicPr>
-            <a:picLocks noChangeAspect="1"/>
-          </p:cNvPicPr>
-          <p:nvPr/>
-        </p:nvPicPr>
-        <p:blipFill>
-          <a:blip r:embed="rId2"/>
-          <a:stretch>
-            <a:fillRect/>
-          </a:stretch>
-        </p:blipFill>
-        <p:spPr>
-          <a:xfrm>
-            <a:off x="548640" y="1965960"/>
-            <a:ext cx="7071358" cy="3977639"/>
-          </a:xfrm>
-          <a:prstGeom prst="rect">
-            <a:avLst/>
-          </a:prstGeom>
-        </p:spPr>
-      </p:pic>
-      <p:sp>
-        <p:nvSpPr>
-          <p:cNvPr id="5" name="TextBox 4"/>
           <p:cNvSpPr txBox="1"/>
           <p:nvPr/>
         </p:nvSpPr>
@@ -5764,7 +6551,7 @@
               </a:defRPr>
             </a:pPr>
             <a:r>
-              <a:t>Demo: Version Selection</a:t>
+              <a:t>1. Version Timeline (One Table)</a:t>
             </a:r>
           </a:p>
         </p:txBody>
@@ -5777,15 +6564,13 @@
         </p:nvSpPr>
         <p:spPr>
           <a:xfrm>
-            <a:off x="548640" y="1051560"/>
-            <a:ext cx="11064240" cy="914400"/>
-          </a:xfrm>
-          <a:prstGeom prst="rect">
-            <a:avLst/>
-          </a:prstGeom>
-          <a:solidFill>
-            <a:srgbClr val="F4F4F4"/>
-          </a:solidFill>
+            <a:off x="548640" y="1234440"/>
+            <a:ext cx="11064240" cy="4937760"/>
+          </a:xfrm>
+          <a:prstGeom prst="rect">
+            <a:avLst/>
+          </a:prstGeom>
+          <a:noFill/>
         </p:spPr>
         <p:txBody>
           <a:bodyPr wrap="square">
@@ -5798,48 +6583,24 @@
                 <a:spcPts val="2200"/>
               </a:lnSpc>
               <a:spcAft>
-                <a:spcPts val="200"/>
+                <a:spcPts val="1000"/>
               </a:spcAft>
               <a:defRPr sz="2000" b="0">
                 <a:solidFill>
                   <a:srgbClr val="333333"/>
                 </a:solidFill>
-                <a:latin typeface="Consolas"/>
-              </a:defRPr>
-            </a:pPr>
-            <a:r>
-              <a:t>$ cd module8/examples/version_selection &amp;&amp; make clean &amp;&amp; make run</a:t>
-            </a:r>
-          </a:p>
-        </p:txBody>
-      </p:sp>
-      <p:pic>
-        <p:nvPicPr>
-          <p:cNvPr id="4" name="Picture 3" descr="ex09_version_selection.png"/>
-          <p:cNvPicPr>
-            <a:picLocks noChangeAspect="1"/>
-          </p:cNvPicPr>
-          <p:nvPr/>
-        </p:nvPicPr>
-        <p:blipFill>
-          <a:blip r:embed="rId2"/>
-          <a:stretch>
-            <a:fillRect/>
-          </a:stretch>
-        </p:blipFill>
-        <p:spPr>
-          <a:xfrm>
-            <a:off x="548640" y="1965960"/>
-            <a:ext cx="7071358" cy="3977639"/>
-          </a:xfrm>
-          <a:prstGeom prst="rect">
-            <a:avLst/>
-          </a:prstGeom>
-        </p:spPr>
-      </p:pic>
-      <p:sp>
-        <p:nvSpPr>
-          <p:cNvPr id="5" name="TextBox 4"/>
+                <a:latin typeface="Calibri"/>
+              </a:defRPr>
+            </a:pPr>
+            <a:r>
+              <a:t>• See docs/MODULE8.md</a:t>
+            </a:r>
+          </a:p>
+        </p:txBody>
+      </p:sp>
+      <p:sp>
+        <p:nvSpPr>
+          <p:cNvPr id="4" name="TextBox 3"/>
           <p:cNvSpPr txBox="1"/>
           <p:nvPr/>
         </p:nvSpPr>
@@ -5902,8 +6663,8 @@
         </p:nvSpPr>
         <p:spPr>
           <a:xfrm>
-            <a:off x="548640" y="411480"/>
-            <a:ext cx="11064240" cy="777240"/>
+            <a:off x="548640" y="2743200"/>
+            <a:ext cx="11064240" cy="1371600"/>
           </a:xfrm>
           <a:prstGeom prst="rect">
             <a:avLst/>
@@ -5916,11 +6677,11 @@
           </a:bodyPr>
           <a:lstStyle/>
           <a:p>
-            <a:pPr>
-              <a:lnSpc>
-                <a:spcPts val="2200"/>
-              </a:lnSpc>
-              <a:defRPr sz="2800" b="1">
+            <a:pPr algn="ctr">
+              <a:lnSpc>
+                <a:spcPts val="2200"/>
+              </a:lnSpc>
+              <a:defRPr sz="3600" b="1">
                 <a:solidFill>
                   <a:srgbClr val="1A1A2E"/>
                 </a:solidFill>
@@ -5928,7 +6689,7 @@
               </a:defRPr>
             </a:pPr>
             <a:r>
-              <a:t>Demo: Version Timeline</a:t>
+              <a:t>Hands-on examples</a:t>
             </a:r>
           </a:p>
         </p:txBody>
@@ -5936,74 +6697,6 @@
       <p:sp>
         <p:nvSpPr>
           <p:cNvPr id="3" name="TextBox 2"/>
-          <p:cNvSpPr txBox="1"/>
-          <p:nvPr/>
-        </p:nvSpPr>
-        <p:spPr>
-          <a:xfrm>
-            <a:off x="548640" y="1051560"/>
-            <a:ext cx="11064240" cy="914400"/>
-          </a:xfrm>
-          <a:prstGeom prst="rect">
-            <a:avLst/>
-          </a:prstGeom>
-          <a:solidFill>
-            <a:srgbClr val="F4F4F4"/>
-          </a:solidFill>
-        </p:spPr>
-        <p:txBody>
-          <a:bodyPr wrap="square">
-            <a:noAutofit/>
-          </a:bodyPr>
-          <a:lstStyle/>
-          <a:p>
-            <a:pPr>
-              <a:lnSpc>
-                <a:spcPts val="2200"/>
-              </a:lnSpc>
-              <a:spcAft>
-                <a:spcPts val="200"/>
-              </a:spcAft>
-              <a:defRPr sz="2000" b="0">
-                <a:solidFill>
-                  <a:srgbClr val="333333"/>
-                </a:solidFill>
-                <a:latin typeface="Consolas"/>
-              </a:defRPr>
-            </a:pPr>
-            <a:r>
-              <a:t>$ cd module8/examples/version_timeline &amp;&amp; make clean &amp;&amp; make run</a:t>
-            </a:r>
-          </a:p>
-        </p:txBody>
-      </p:sp>
-      <p:pic>
-        <p:nvPicPr>
-          <p:cNvPr id="4" name="Picture 3" descr="ex10_version_timeline.png"/>
-          <p:cNvPicPr>
-            <a:picLocks noChangeAspect="1"/>
-          </p:cNvPicPr>
-          <p:nvPr/>
-        </p:nvPicPr>
-        <p:blipFill>
-          <a:blip r:embed="rId2"/>
-          <a:stretch>
-            <a:fillRect/>
-          </a:stretch>
-        </p:blipFill>
-        <p:spPr>
-          <a:xfrm>
-            <a:off x="548640" y="1965960"/>
-            <a:ext cx="7071358" cy="3977639"/>
-          </a:xfrm>
-          <a:prstGeom prst="rect">
-            <a:avLst/>
-          </a:prstGeom>
-        </p:spPr>
-      </p:pic>
-      <p:sp>
-        <p:nvSpPr>
-          <p:cNvPr id="5" name="TextBox 4"/>
           <p:cNvSpPr txBox="1"/>
           <p:nvPr/>
         </p:nvSpPr>
@@ -6223,8 +6916,8 @@
         </p:nvSpPr>
         <p:spPr>
           <a:xfrm>
-            <a:off x="548640" y="2743200"/>
-            <a:ext cx="11064240" cy="1371600"/>
+            <a:off x="548640" y="411480"/>
+            <a:ext cx="11064240" cy="777240"/>
           </a:xfrm>
           <a:prstGeom prst="rect">
             <a:avLst/>
@@ -6237,11 +6930,11 @@
           </a:bodyPr>
           <a:lstStyle/>
           <a:p>
-            <a:pPr algn="ctr">
-              <a:lnSpc>
-                <a:spcPts val="2200"/>
-              </a:lnSpc>
-              <a:defRPr sz="3600" b="1">
+            <a:pPr>
+              <a:lnSpc>
+                <a:spcPts val="2200"/>
+              </a:lnSpc>
+              <a:defRPr sz="2800" b="1">
                 <a:solidFill>
                   <a:srgbClr val="1A1A2E"/>
                 </a:solidFill>
@@ -6249,7 +6942,7 @@
               </a:defRPr>
             </a:pPr>
             <a:r>
-              <a:t>Practice &amp; assessment</a:t>
+              <a:t>Module 8 self-check</a:t>
             </a:r>
           </a:p>
         </p:txBody>
@@ -6257,6 +6950,74 @@
       <p:sp>
         <p:nvSpPr>
           <p:cNvPr id="3" name="TextBox 2"/>
+          <p:cNvSpPr txBox="1"/>
+          <p:nvPr/>
+        </p:nvSpPr>
+        <p:spPr>
+          <a:xfrm>
+            <a:off x="548640" y="1051560"/>
+            <a:ext cx="11064240" cy="914400"/>
+          </a:xfrm>
+          <a:prstGeom prst="rect">
+            <a:avLst/>
+          </a:prstGeom>
+          <a:solidFill>
+            <a:srgbClr val="F4F4F4"/>
+          </a:solidFill>
+        </p:spPr>
+        <p:txBody>
+          <a:bodyPr wrap="square">
+            <a:noAutofit/>
+          </a:bodyPr>
+          <a:lstStyle/>
+          <a:p>
+            <a:pPr>
+              <a:lnSpc>
+                <a:spcPts val="2200"/>
+              </a:lnSpc>
+              <a:spcAft>
+                <a:spcPts val="200"/>
+              </a:spcAft>
+              <a:defRPr sz="2000" b="0">
+                <a:solidFill>
+                  <a:srgbClr val="333333"/>
+                </a:solidFill>
+                <a:latin typeface="Consolas"/>
+              </a:defRPr>
+            </a:pPr>
+            <a:r>
+              <a:t>$ ./scripts/module8.sh --check</a:t>
+            </a:r>
+          </a:p>
+        </p:txBody>
+      </p:sp>
+      <p:pic>
+        <p:nvPicPr>
+          <p:cNvPr id="4" name="Picture 3" descr="module8_check.png"/>
+          <p:cNvPicPr>
+            <a:picLocks noChangeAspect="1"/>
+          </p:cNvPicPr>
+          <p:nvPr/>
+        </p:nvPicPr>
+        <p:blipFill>
+          <a:blip r:embed="rId2"/>
+          <a:stretch>
+            <a:fillRect/>
+          </a:stretch>
+        </p:blipFill>
+        <p:spPr>
+          <a:xfrm>
+            <a:off x="548640" y="1965960"/>
+            <a:ext cx="7071358" cy="3977639"/>
+          </a:xfrm>
+          <a:prstGeom prst="rect">
+            <a:avLst/>
+          </a:prstGeom>
+        </p:spPr>
+      </p:pic>
+      <p:sp>
+        <p:nvSpPr>
+          <p:cNvPr id="5" name="TextBox 4"/>
           <p:cNvSpPr txBox="1"/>
           <p:nvPr/>
         </p:nvSpPr>
@@ -6345,7 +7106,7 @@
               </a:defRPr>
             </a:pPr>
             <a:r>
-              <a:t>Exercises</a:t>
+              <a:t>Demo: Construct Lookup</a:t>
             </a:r>
           </a:p>
         </p:txBody>
@@ -6358,13 +7119,15 @@
         </p:nvSpPr>
         <p:spPr>
           <a:xfrm>
-            <a:off x="548640" y="1234440"/>
-            <a:ext cx="11064240" cy="4937760"/>
-          </a:xfrm>
-          <a:prstGeom prst="rect">
-            <a:avLst/>
-          </a:prstGeom>
-          <a:noFill/>
+            <a:off x="548640" y="1051560"/>
+            <a:ext cx="11064240" cy="914400"/>
+          </a:xfrm>
+          <a:prstGeom prst="rect">
+            <a:avLst/>
+          </a:prstGeom>
+          <a:solidFill>
+            <a:srgbClr val="F4F4F4"/>
+          </a:solidFill>
         </p:spPr>
         <p:txBody>
           <a:bodyPr wrap="square">
@@ -6377,100 +7140,48 @@
                 <a:spcPts val="2200"/>
               </a:lnSpc>
               <a:spcAft>
-                <a:spcPts val="1000"/>
+                <a:spcPts val="200"/>
               </a:spcAft>
               <a:defRPr sz="2000" b="0">
                 <a:solidFill>
                   <a:srgbClr val="333333"/>
                 </a:solidFill>
-                <a:latin typeface="Calibri"/>
-              </a:defRPr>
-            </a:pPr>
-            <a:r>
-              <a:t>• Lookup</a:t>
-            </a:r>
-          </a:p>
-          <a:p>
-            <a:pPr>
-              <a:lnSpc>
-                <a:spcPts val="2200"/>
-              </a:lnSpc>
-              <a:spcAft>
-                <a:spcPts val="1000"/>
-              </a:spcAft>
-              <a:defRPr sz="2000" b="0">
-                <a:solidFill>
-                  <a:srgbClr val="333333"/>
-                </a:solidFill>
-                <a:latin typeface="Calibri"/>
-              </a:defRPr>
-            </a:pPr>
-            <a:r>
-              <a:t>• Subset</a:t>
-            </a:r>
-          </a:p>
-          <a:p>
-            <a:pPr>
-              <a:lnSpc>
-                <a:spcPts val="2200"/>
-              </a:lnSpc>
-              <a:spcAft>
-                <a:spcPts val="1000"/>
-              </a:spcAft>
-              <a:defRPr sz="2000" b="0">
-                <a:solidFill>
-                  <a:srgbClr val="333333"/>
-                </a:solidFill>
-                <a:latin typeface="Calibri"/>
-              </a:defRPr>
-            </a:pPr>
-            <a:r>
-              <a:t>• Migration</a:t>
-            </a:r>
-          </a:p>
-          <a:p>
-            <a:pPr>
-              <a:lnSpc>
-                <a:spcPts val="2200"/>
-              </a:lnSpc>
-              <a:spcAft>
-                <a:spcPts val="1000"/>
-              </a:spcAft>
-              <a:defRPr sz="2000" b="0">
-                <a:solidFill>
-                  <a:srgbClr val="333333"/>
-                </a:solidFill>
-                <a:latin typeface="Calibri"/>
-              </a:defRPr>
-            </a:pPr>
-            <a:r>
-              <a:t>• Course map</a:t>
-            </a:r>
-          </a:p>
-          <a:p>
-            <a:pPr>
-              <a:lnSpc>
-                <a:spcPts val="2200"/>
-              </a:lnSpc>
-              <a:spcAft>
-                <a:spcPts val="1000"/>
-              </a:spcAft>
-              <a:defRPr sz="2000" b="0">
-                <a:solidFill>
-                  <a:srgbClr val="333333"/>
-                </a:solidFill>
-                <a:latin typeface="Calibri"/>
-              </a:defRPr>
-            </a:pPr>
-            <a:r>
-              <a:t>• Cheat sheet</a:t>
-            </a:r>
-          </a:p>
-        </p:txBody>
-      </p:sp>
-      <p:sp>
-        <p:nvSpPr>
-          <p:cNvPr id="4" name="TextBox 3"/>
+                <a:latin typeface="Consolas"/>
+              </a:defRPr>
+            </a:pPr>
+            <a:r>
+              <a:t>$ cd module8/examples/construct_lookup &amp;&amp; make clean &amp;&amp; make run</a:t>
+            </a:r>
+          </a:p>
+        </p:txBody>
+      </p:sp>
+      <p:pic>
+        <p:nvPicPr>
+          <p:cNvPr id="4" name="Picture 3" descr="ex01_construct_lookup.png"/>
+          <p:cNvPicPr>
+            <a:picLocks noChangeAspect="1"/>
+          </p:cNvPicPr>
+          <p:nvPr/>
+        </p:nvPicPr>
+        <p:blipFill>
+          <a:blip r:embed="rId2"/>
+          <a:stretch>
+            <a:fillRect/>
+          </a:stretch>
+        </p:blipFill>
+        <p:spPr>
+          <a:xfrm>
+            <a:off x="548640" y="1965960"/>
+            <a:ext cx="7071358" cy="3977639"/>
+          </a:xfrm>
+          <a:prstGeom prst="rect">
+            <a:avLst/>
+          </a:prstGeom>
+        </p:spPr>
+      </p:pic>
+      <p:sp>
+        <p:nvSpPr>
+          <p:cNvPr id="5" name="TextBox 4"/>
           <p:cNvSpPr txBox="1"/>
           <p:nvPr/>
         </p:nvSpPr>
@@ -6559,7 +7270,7 @@
               </a:defRPr>
             </a:pPr>
             <a:r>
-              <a:t>Exercises</a:t>
+              <a:t>Demo: Course Map</a:t>
             </a:r>
           </a:p>
         </p:txBody>
@@ -6572,13 +7283,15 @@
         </p:nvSpPr>
         <p:spPr>
           <a:xfrm>
-            <a:off x="548640" y="1234440"/>
-            <a:ext cx="11064240" cy="4937760"/>
-          </a:xfrm>
-          <a:prstGeom prst="rect">
-            <a:avLst/>
-          </a:prstGeom>
-          <a:noFill/>
+            <a:off x="548640" y="1051560"/>
+            <a:ext cx="11064240" cy="914400"/>
+          </a:xfrm>
+          <a:prstGeom prst="rect">
+            <a:avLst/>
+          </a:prstGeom>
+          <a:solidFill>
+            <a:srgbClr val="F4F4F4"/>
+          </a:solidFill>
         </p:spPr>
         <p:txBody>
           <a:bodyPr wrap="square">
@@ -6591,119 +7304,48 @@
                 <a:spcPts val="2200"/>
               </a:lnSpc>
               <a:spcAft>
-                <a:spcPts val="1000"/>
+                <a:spcPts val="200"/>
               </a:spcAft>
               <a:defRPr sz="2000" b="0">
                 <a:solidFill>
                   <a:srgbClr val="333333"/>
                 </a:solidFill>
-                <a:latin typeface="Calibri"/>
-              </a:defRPr>
-            </a:pPr>
-            <a:r>
-              <a:t>• Assuming a construct is in an older standard</a:t>
-            </a:r>
-          </a:p>
-          <a:p>
-            <a:pPr>
-              <a:lnSpc>
-                <a:spcPts val="2200"/>
-              </a:lnSpc>
-              <a:spcAft>
-                <a:spcPts val="1000"/>
-              </a:spcAft>
-              <a:defRPr sz="2000" b="0">
-                <a:solidFill>
-                  <a:srgbClr val="333333"/>
-                </a:solidFill>
-                <a:latin typeface="Calibri"/>
-              </a:defRPr>
-            </a:pPr>
-            <a:r>
-              <a:t>• Mixing subsets without a rule</a:t>
-            </a:r>
-          </a:p>
-          <a:p>
-            <a:pPr>
-              <a:lnSpc>
-                <a:spcPts val="2200"/>
-              </a:lnSpc>
-              <a:spcAft>
-                <a:spcPts val="1000"/>
-              </a:spcAft>
-              <a:defRPr sz="2000" b="0">
-                <a:solidFill>
-                  <a:srgbClr val="333333"/>
-                </a:solidFill>
-                <a:latin typeface="Calibri"/>
-              </a:defRPr>
-            </a:pPr>
-            <a:r>
-              <a:t>• Skipping regression after migration</a:t>
-            </a:r>
-          </a:p>
-          <a:p>
-            <a:pPr>
-              <a:lnSpc>
-                <a:spcPts val="2200"/>
-              </a:lnSpc>
-              <a:spcAft>
-                <a:spcPts val="1000"/>
-              </a:spcAft>
-              <a:defRPr sz="2000" b="0">
-                <a:solidFill>
-                  <a:srgbClr val="333333"/>
-                </a:solidFill>
-                <a:latin typeface="Calibri"/>
-              </a:defRPr>
-            </a:pPr>
-            <a:r>
-              <a:t>• Forgetting tool support</a:t>
-            </a:r>
-          </a:p>
-          <a:p>
-            <a:pPr>
-              <a:lnSpc>
-                <a:spcPts val="2200"/>
-              </a:lnSpc>
-              <a:spcAft>
-                <a:spcPts val="1000"/>
-              </a:spcAft>
-              <a:defRPr sz="2000" b="0">
-                <a:solidFill>
-                  <a:srgbClr val="333333"/>
-                </a:solidFill>
-                <a:latin typeface="Calibri"/>
-              </a:defRPr>
-            </a:pPr>
-            <a:r>
-              <a:t>• Treating this module as a replacement for Modules</a:t>
-            </a:r>
-          </a:p>
-          <a:p>
-            <a:pPr>
-              <a:lnSpc>
-                <a:spcPts val="2200"/>
-              </a:lnSpc>
-              <a:spcAft>
-                <a:spcPts val="1000"/>
-              </a:spcAft>
-              <a:defRPr sz="2000" b="0">
-                <a:solidFill>
-                  <a:srgbClr val="333333"/>
-                </a:solidFill>
-                <a:latin typeface="Calibri"/>
-              </a:defRPr>
-            </a:pPr>
-            <a:r>
-              <a:t>      1–7</a:t>
-            </a:r>
-          </a:p>
-        </p:txBody>
-      </p:sp>
-      <p:sp>
-        <p:nvSpPr>
-          <p:cNvPr id="4" name="TextBox 3"/>
+                <a:latin typeface="Consolas"/>
+              </a:defRPr>
+            </a:pPr>
+            <a:r>
+              <a:t>$ cd module8/examples/course_map &amp;&amp; make clean &amp;&amp; make run</a:t>
+            </a:r>
+          </a:p>
+        </p:txBody>
+      </p:sp>
+      <p:pic>
+        <p:nvPicPr>
+          <p:cNvPr id="4" name="Picture 3" descr="ex02_course_map.png"/>
+          <p:cNvPicPr>
+            <a:picLocks noChangeAspect="1"/>
+          </p:cNvPicPr>
+          <p:nvPr/>
+        </p:nvPicPr>
+        <p:blipFill>
+          <a:blip r:embed="rId2"/>
+          <a:stretch>
+            <a:fillRect/>
+          </a:stretch>
+        </p:blipFill>
+        <p:spPr>
+          <a:xfrm>
+            <a:off x="548640" y="1965960"/>
+            <a:ext cx="7071358" cy="3977639"/>
+          </a:xfrm>
+          <a:prstGeom prst="rect">
+            <a:avLst/>
+          </a:prstGeom>
+        </p:spPr>
+      </p:pic>
+      <p:sp>
+        <p:nvSpPr>
+          <p:cNvPr id="5" name="TextBox 4"/>
           <p:cNvSpPr txBox="1"/>
           <p:nvPr/>
         </p:nvSpPr>
@@ -6792,7 +7434,7 @@
               </a:defRPr>
             </a:pPr>
             <a:r>
-              <a:t>Summary &amp; next steps</a:t>
+              <a:t>Demo: Design Subset</a:t>
             </a:r>
           </a:p>
         </p:txBody>
@@ -6805,13 +7447,15 @@
         </p:nvSpPr>
         <p:spPr>
           <a:xfrm>
-            <a:off x="548640" y="1234440"/>
-            <a:ext cx="11064240" cy="4937760"/>
-          </a:xfrm>
-          <a:prstGeom prst="rect">
-            <a:avLst/>
-          </a:prstGeom>
-          <a:noFill/>
+            <a:off x="548640" y="1051560"/>
+            <a:ext cx="11064240" cy="914400"/>
+          </a:xfrm>
+          <a:prstGeom prst="rect">
+            <a:avLst/>
+          </a:prstGeom>
+          <a:solidFill>
+            <a:srgbClr val="F4F4F4"/>
+          </a:solidFill>
         </p:spPr>
         <p:txBody>
           <a:bodyPr wrap="square">
@@ -6824,100 +7468,1032 @@
                 <a:spcPts val="2200"/>
               </a:lnSpc>
               <a:spcAft>
-                <a:spcPts val="1000"/>
+                <a:spcPts val="200"/>
               </a:spcAft>
               <a:defRPr sz="2000" b="0">
                 <a:solidFill>
                   <a:srgbClr val="333333"/>
                 </a:solidFill>
-                <a:latin typeface="Calibri"/>
-              </a:defRPr>
-            </a:pPr>
-            <a:r>
-              <a:t>• Provide a single quick reference and course summary</a:t>
-            </a:r>
-          </a:p>
+                <a:latin typeface="Consolas"/>
+              </a:defRPr>
+            </a:pPr>
+            <a:r>
+              <a:t>$ cd module8/examples/design_subset &amp;&amp; make clean &amp;&amp; make run</a:t>
+            </a:r>
+          </a:p>
+        </p:txBody>
+      </p:sp>
+      <p:pic>
+        <p:nvPicPr>
+          <p:cNvPr id="4" name="Picture 3" descr="ex03_design_subset.png"/>
+          <p:cNvPicPr>
+            <a:picLocks noChangeAspect="1"/>
+          </p:cNvPicPr>
+          <p:nvPr/>
+        </p:nvPicPr>
+        <p:blipFill>
+          <a:blip r:embed="rId2"/>
+          <a:stretch>
+            <a:fillRect/>
+          </a:stretch>
+        </p:blipFill>
+        <p:spPr>
+          <a:xfrm>
+            <a:off x="548640" y="1965960"/>
+            <a:ext cx="7071358" cy="3977639"/>
+          </a:xfrm>
+          <a:prstGeom prst="rect">
+            <a:avLst/>
+          </a:prstGeom>
+        </p:spPr>
+      </p:pic>
+      <p:sp>
+        <p:nvSpPr>
+          <p:cNvPr id="5" name="TextBox 4"/>
+          <p:cNvSpPr txBox="1"/>
+          <p:nvPr/>
+        </p:nvSpPr>
+        <p:spPr>
+          <a:xfrm>
+            <a:off x="548640" y="6355080"/>
+            <a:ext cx="11064240" cy="320040"/>
+          </a:xfrm>
+          <a:prstGeom prst="rect">
+            <a:avLst/>
+          </a:prstGeom>
+          <a:noFill/>
+        </p:spPr>
+        <p:txBody>
+          <a:bodyPr wrap="square">
+            <a:noAutofit/>
+          </a:bodyPr>
+          <a:lstStyle/>
+          <a:p>
+            <a:pPr algn="r">
+              <a:lnSpc>
+                <a:spcPts val="2200"/>
+              </a:lnSpc>
+              <a:defRPr sz="1000" b="0">
+                <a:solidFill>
+                  <a:srgbClr val="666666"/>
+                </a:solidFill>
+                <a:latin typeface="Calibri"/>
+              </a:defRPr>
+            </a:pPr>
+            <a:r>
+              <a:t>learn_verilog_systemverilog / Module 8</a:t>
+            </a:r>
+          </a:p>
+        </p:txBody>
+      </p:sp>
+    </p:spTree>
+  </p:cSld>
+  <p:clrMapOvr>
+    <a:masterClrMapping/>
+  </p:clrMapOvr>
+</p:sld>
+</file>
+
+<file path=ppt/slides/slide24.xml><?xml version="1.0" encoding="utf-8"?>
+<p:sld xmlns:a="http://schemas.openxmlformats.org/drawingml/2006/main" xmlns:p="http://schemas.openxmlformats.org/presentationml/2006/main" xmlns:r="http://schemas.openxmlformats.org/officeDocument/2006/relationships">
+  <p:cSld>
+    <p:spTree>
+      <p:nvGrpSpPr>
+        <p:cNvPr id="1" name=""/>
+        <p:cNvGrpSpPr/>
+        <p:nvPr/>
+      </p:nvGrpSpPr>
+      <p:grpSpPr/>
+      <p:sp>
+        <p:nvSpPr>
+          <p:cNvPr id="2" name="TextBox 1"/>
+          <p:cNvSpPr txBox="1"/>
+          <p:nvPr/>
+        </p:nvSpPr>
+        <p:spPr>
+          <a:xfrm>
+            <a:off x="548640" y="411480"/>
+            <a:ext cx="11064240" cy="777240"/>
+          </a:xfrm>
+          <a:prstGeom prst="rect">
+            <a:avLst/>
+          </a:prstGeom>
+          <a:noFill/>
+        </p:spPr>
+        <p:txBody>
+          <a:bodyPr wrap="square">
+            <a:noAutofit/>
+          </a:bodyPr>
+          <a:lstStyle/>
           <a:p>
             <a:pPr>
               <a:lnSpc>
                 <a:spcPts val="2200"/>
               </a:lnSpc>
+              <a:defRPr sz="2800" b="1">
+                <a:solidFill>
+                  <a:srgbClr val="1A1A2E"/>
+                </a:solidFill>
+                <a:latin typeface="Calibri"/>
+              </a:defRPr>
+            </a:pPr>
+            <a:r>
+              <a:t>Demo: Learning Path</a:t>
+            </a:r>
+          </a:p>
+        </p:txBody>
+      </p:sp>
+      <p:sp>
+        <p:nvSpPr>
+          <p:cNvPr id="3" name="TextBox 2"/>
+          <p:cNvSpPr txBox="1"/>
+          <p:nvPr/>
+        </p:nvSpPr>
+        <p:spPr>
+          <a:xfrm>
+            <a:off x="548640" y="1051560"/>
+            <a:ext cx="11064240" cy="914400"/>
+          </a:xfrm>
+          <a:prstGeom prst="rect">
+            <a:avLst/>
+          </a:prstGeom>
+          <a:solidFill>
+            <a:srgbClr val="F4F4F4"/>
+          </a:solidFill>
+        </p:spPr>
+        <p:txBody>
+          <a:bodyPr wrap="square">
+            <a:noAutofit/>
+          </a:bodyPr>
+          <a:lstStyle/>
+          <a:p>
+            <a:pPr>
+              <a:lnSpc>
+                <a:spcPts val="2200"/>
+              </a:lnSpc>
               <a:spcAft>
-                <a:spcPts val="1000"/>
+                <a:spcPts val="200"/>
               </a:spcAft>
               <a:defRPr sz="2000" b="0">
                 <a:solidFill>
                   <a:srgbClr val="333333"/>
                 </a:solidFill>
-                <a:latin typeface="Calibri"/>
-              </a:defRPr>
-            </a:pPr>
-            <a:r>
-              <a:t>      for Verilog and SystemVerilog across IEEE versi…</a:t>
-            </a:r>
-          </a:p>
+                <a:latin typeface="Consolas"/>
+              </a:defRPr>
+            </a:pPr>
+            <a:r>
+              <a:t>$ cd module8/examples/learning_path &amp;&amp; make clean &amp;&amp; make run</a:t>
+            </a:r>
+          </a:p>
+        </p:txBody>
+      </p:sp>
+      <p:pic>
+        <p:nvPicPr>
+          <p:cNvPr id="4" name="Picture 3" descr="ex04_learning_path.png"/>
+          <p:cNvPicPr>
+            <a:picLocks noChangeAspect="1"/>
+          </p:cNvPicPr>
+          <p:nvPr/>
+        </p:nvPicPr>
+        <p:blipFill>
+          <a:blip r:embed="rId2"/>
+          <a:stretch>
+            <a:fillRect/>
+          </a:stretch>
+        </p:blipFill>
+        <p:spPr>
+          <a:xfrm>
+            <a:off x="548640" y="1965960"/>
+            <a:ext cx="7071358" cy="3977639"/>
+          </a:xfrm>
+          <a:prstGeom prst="rect">
+            <a:avLst/>
+          </a:prstGeom>
+        </p:spPr>
+      </p:pic>
+      <p:sp>
+        <p:nvSpPr>
+          <p:cNvPr id="5" name="TextBox 4"/>
+          <p:cNvSpPr txBox="1"/>
+          <p:nvPr/>
+        </p:nvSpPr>
+        <p:spPr>
+          <a:xfrm>
+            <a:off x="548640" y="6355080"/>
+            <a:ext cx="11064240" cy="320040"/>
+          </a:xfrm>
+          <a:prstGeom prst="rect">
+            <a:avLst/>
+          </a:prstGeom>
+          <a:noFill/>
+        </p:spPr>
+        <p:txBody>
+          <a:bodyPr wrap="square">
+            <a:noAutofit/>
+          </a:bodyPr>
+          <a:lstStyle/>
+          <a:p>
+            <a:pPr algn="r">
+              <a:lnSpc>
+                <a:spcPts val="2200"/>
+              </a:lnSpc>
+              <a:defRPr sz="1000" b="0">
+                <a:solidFill>
+                  <a:srgbClr val="666666"/>
+                </a:solidFill>
+                <a:latin typeface="Calibri"/>
+              </a:defRPr>
+            </a:pPr>
+            <a:r>
+              <a:t>learn_verilog_systemverilog / Module 8</a:t>
+            </a:r>
+          </a:p>
+        </p:txBody>
+      </p:sp>
+    </p:spTree>
+  </p:cSld>
+  <p:clrMapOvr>
+    <a:masterClrMapping/>
+  </p:clrMapOvr>
+</p:sld>
+</file>
+
+<file path=ppt/slides/slide25.xml><?xml version="1.0" encoding="utf-8"?>
+<p:sld xmlns:a="http://schemas.openxmlformats.org/drawingml/2006/main" xmlns:p="http://schemas.openxmlformats.org/presentationml/2006/main" xmlns:r="http://schemas.openxmlformats.org/officeDocument/2006/relationships">
+  <p:cSld>
+    <p:spTree>
+      <p:nvGrpSpPr>
+        <p:cNvPr id="1" name=""/>
+        <p:cNvGrpSpPr/>
+        <p:nvPr/>
+      </p:nvGrpSpPr>
+      <p:grpSpPr/>
+      <p:sp>
+        <p:nvSpPr>
+          <p:cNvPr id="2" name="TextBox 1"/>
+          <p:cNvSpPr txBox="1"/>
+          <p:nvPr/>
+        </p:nvSpPr>
+        <p:spPr>
+          <a:xfrm>
+            <a:off x="548640" y="411480"/>
+            <a:ext cx="11064240" cy="777240"/>
+          </a:xfrm>
+          <a:prstGeom prst="rect">
+            <a:avLst/>
+          </a:prstGeom>
+          <a:noFill/>
+        </p:spPr>
+        <p:txBody>
+          <a:bodyPr wrap="square">
+            <a:noAutofit/>
+          </a:bodyPr>
+          <a:lstStyle/>
           <a:p>
             <a:pPr>
               <a:lnSpc>
                 <a:spcPts val="2200"/>
               </a:lnSpc>
+              <a:defRPr sz="2800" b="1">
+                <a:solidFill>
+                  <a:srgbClr val="1A1A2E"/>
+                </a:solidFill>
+                <a:latin typeface="Calibri"/>
+              </a:defRPr>
+            </a:pPr>
+            <a:r>
+              <a:t>Demo: Migration Steps</a:t>
+            </a:r>
+          </a:p>
+        </p:txBody>
+      </p:sp>
+      <p:sp>
+        <p:nvSpPr>
+          <p:cNvPr id="3" name="TextBox 2"/>
+          <p:cNvSpPr txBox="1"/>
+          <p:nvPr/>
+        </p:nvSpPr>
+        <p:spPr>
+          <a:xfrm>
+            <a:off x="548640" y="1051560"/>
+            <a:ext cx="11064240" cy="914400"/>
+          </a:xfrm>
+          <a:prstGeom prst="rect">
+            <a:avLst/>
+          </a:prstGeom>
+          <a:solidFill>
+            <a:srgbClr val="F4F4F4"/>
+          </a:solidFill>
+        </p:spPr>
+        <p:txBody>
+          <a:bodyPr wrap="square">
+            <a:noAutofit/>
+          </a:bodyPr>
+          <a:lstStyle/>
+          <a:p>
+            <a:pPr>
+              <a:lnSpc>
+                <a:spcPts val="2200"/>
+              </a:lnSpc>
               <a:spcAft>
-                <a:spcPts val="1000"/>
+                <a:spcPts val="200"/>
               </a:spcAft>
               <a:defRPr sz="2000" b="0">
                 <a:solidFill>
                   <a:srgbClr val="333333"/>
                 </a:solidFill>
-                <a:latin typeface="Calibri"/>
-              </a:defRPr>
-            </a:pPr>
-            <a:r>
-              <a:t>• Complete module8/CHECKLIST.md</a:t>
-            </a:r>
-          </a:p>
+                <a:latin typeface="Consolas"/>
+              </a:defRPr>
+            </a:pPr>
+            <a:r>
+              <a:t>$ cd module8/examples/migration_steps &amp;&amp; make clean &amp;&amp; make run</a:t>
+            </a:r>
+          </a:p>
+        </p:txBody>
+      </p:sp>
+      <p:pic>
+        <p:nvPicPr>
+          <p:cNvPr id="4" name="Picture 3" descr="ex05_migration_steps.png"/>
+          <p:cNvPicPr>
+            <a:picLocks noChangeAspect="1"/>
+          </p:cNvPicPr>
+          <p:nvPr/>
+        </p:nvPicPr>
+        <p:blipFill>
+          <a:blip r:embed="rId2"/>
+          <a:stretch>
+            <a:fillRect/>
+          </a:stretch>
+        </p:blipFill>
+        <p:spPr>
+          <a:xfrm>
+            <a:off x="548640" y="1965960"/>
+            <a:ext cx="7071358" cy="3977639"/>
+          </a:xfrm>
+          <a:prstGeom prst="rect">
+            <a:avLst/>
+          </a:prstGeom>
+        </p:spPr>
+      </p:pic>
+      <p:sp>
+        <p:nvSpPr>
+          <p:cNvPr id="5" name="TextBox 4"/>
+          <p:cNvSpPr txBox="1"/>
+          <p:nvPr/>
+        </p:nvSpPr>
+        <p:spPr>
+          <a:xfrm>
+            <a:off x="548640" y="6355080"/>
+            <a:ext cx="11064240" cy="320040"/>
+          </a:xfrm>
+          <a:prstGeom prst="rect">
+            <a:avLst/>
+          </a:prstGeom>
+          <a:noFill/>
+        </p:spPr>
+        <p:txBody>
+          <a:bodyPr wrap="square">
+            <a:noAutofit/>
+          </a:bodyPr>
+          <a:lstStyle/>
+          <a:p>
+            <a:pPr algn="r">
+              <a:lnSpc>
+                <a:spcPts val="2200"/>
+              </a:lnSpc>
+              <a:defRPr sz="1000" b="0">
+                <a:solidFill>
+                  <a:srgbClr val="666666"/>
+                </a:solidFill>
+                <a:latin typeface="Calibri"/>
+              </a:defRPr>
+            </a:pPr>
+            <a:r>
+              <a:t>learn_verilog_systemverilog / Module 8</a:t>
+            </a:r>
+          </a:p>
+        </p:txBody>
+      </p:sp>
+    </p:spTree>
+  </p:cSld>
+  <p:clrMapOvr>
+    <a:masterClrMapping/>
+  </p:clrMapOvr>
+</p:sld>
+</file>
+
+<file path=ppt/slides/slide26.xml><?xml version="1.0" encoding="utf-8"?>
+<p:sld xmlns:a="http://schemas.openxmlformats.org/drawingml/2006/main" xmlns:p="http://schemas.openxmlformats.org/presentationml/2006/main" xmlns:r="http://schemas.openxmlformats.org/officeDocument/2006/relationships">
+  <p:cSld>
+    <p:spTree>
+      <p:nvGrpSpPr>
+        <p:cNvPr id="1" name=""/>
+        <p:cNvGrpSpPr/>
+        <p:nvPr/>
+      </p:nvGrpSpPr>
+      <p:grpSpPr/>
+      <p:sp>
+        <p:nvSpPr>
+          <p:cNvPr id="2" name="TextBox 1"/>
+          <p:cNvSpPr txBox="1"/>
+          <p:nvPr/>
+        </p:nvSpPr>
+        <p:spPr>
+          <a:xfrm>
+            <a:off x="548640" y="411480"/>
+            <a:ext cx="11064240" cy="777240"/>
+          </a:xfrm>
+          <a:prstGeom prst="rect">
+            <a:avLst/>
+          </a:prstGeom>
+          <a:noFill/>
+        </p:spPr>
+        <p:txBody>
+          <a:bodyPr wrap="square">
+            <a:noAutofit/>
+          </a:bodyPr>
+          <a:lstStyle/>
           <a:p>
             <a:pPr>
               <a:lnSpc>
                 <a:spcPts val="2200"/>
               </a:lnSpc>
+              <a:defRPr sz="2800" b="1">
+                <a:solidFill>
+                  <a:srgbClr val="1A1A2E"/>
+                </a:solidFill>
+                <a:latin typeface="Calibri"/>
+              </a:defRPr>
+            </a:pPr>
+            <a:r>
+              <a:t>Demo: Pitfalls</a:t>
+            </a:r>
+          </a:p>
+        </p:txBody>
+      </p:sp>
+      <p:sp>
+        <p:nvSpPr>
+          <p:cNvPr id="3" name="TextBox 2"/>
+          <p:cNvSpPr txBox="1"/>
+          <p:nvPr/>
+        </p:nvSpPr>
+        <p:spPr>
+          <a:xfrm>
+            <a:off x="548640" y="1051560"/>
+            <a:ext cx="11064240" cy="914400"/>
+          </a:xfrm>
+          <a:prstGeom prst="rect">
+            <a:avLst/>
+          </a:prstGeom>
+          <a:solidFill>
+            <a:srgbClr val="F4F4F4"/>
+          </a:solidFill>
+        </p:spPr>
+        <p:txBody>
+          <a:bodyPr wrap="square">
+            <a:noAutofit/>
+          </a:bodyPr>
+          <a:lstStyle/>
+          <a:p>
+            <a:pPr>
+              <a:lnSpc>
+                <a:spcPts val="2200"/>
+              </a:lnSpc>
               <a:spcAft>
-                <a:spcPts val="1000"/>
+                <a:spcPts val="200"/>
               </a:spcAft>
               <a:defRPr sz="2000" b="0">
                 <a:solidFill>
                   <a:srgbClr val="333333"/>
                 </a:solidFill>
-                <a:latin typeface="Calibri"/>
-              </a:defRPr>
-            </a:pPr>
-            <a:r>
-              <a:t>• Run ./scripts/module8.sh --check</a:t>
-            </a:r>
-          </a:p>
+                <a:latin typeface="Consolas"/>
+              </a:defRPr>
+            </a:pPr>
+            <a:r>
+              <a:t>$ cd module8/examples/pitfalls &amp;&amp; make clean &amp;&amp; make run</a:t>
+            </a:r>
+          </a:p>
+        </p:txBody>
+      </p:sp>
+      <p:pic>
+        <p:nvPicPr>
+          <p:cNvPr id="4" name="Picture 3" descr="ex06_pitfalls.png"/>
+          <p:cNvPicPr>
+            <a:picLocks noChangeAspect="1"/>
+          </p:cNvPicPr>
+          <p:nvPr/>
+        </p:nvPicPr>
+        <p:blipFill>
+          <a:blip r:embed="rId2"/>
+          <a:stretch>
+            <a:fillRect/>
+          </a:stretch>
+        </p:blipFill>
+        <p:spPr>
+          <a:xfrm>
+            <a:off x="548640" y="1965960"/>
+            <a:ext cx="7071358" cy="3977639"/>
+          </a:xfrm>
+          <a:prstGeom prst="rect">
+            <a:avLst/>
+          </a:prstGeom>
+        </p:spPr>
+      </p:pic>
+      <p:sp>
+        <p:nvSpPr>
+          <p:cNvPr id="5" name="TextBox 4"/>
+          <p:cNvSpPr txBox="1"/>
+          <p:nvPr/>
+        </p:nvSpPr>
+        <p:spPr>
+          <a:xfrm>
+            <a:off x="548640" y="6355080"/>
+            <a:ext cx="11064240" cy="320040"/>
+          </a:xfrm>
+          <a:prstGeom prst="rect">
+            <a:avLst/>
+          </a:prstGeom>
+          <a:noFill/>
+        </p:spPr>
+        <p:txBody>
+          <a:bodyPr wrap="square">
+            <a:noAutofit/>
+          </a:bodyPr>
+          <a:lstStyle/>
+          <a:p>
+            <a:pPr algn="r">
+              <a:lnSpc>
+                <a:spcPts val="2200"/>
+              </a:lnSpc>
+              <a:defRPr sz="1000" b="0">
+                <a:solidFill>
+                  <a:srgbClr val="666666"/>
+                </a:solidFill>
+                <a:latin typeface="Calibri"/>
+              </a:defRPr>
+            </a:pPr>
+            <a:r>
+              <a:t>learn_verilog_systemverilog / Module 8</a:t>
+            </a:r>
+          </a:p>
+        </p:txBody>
+      </p:sp>
+    </p:spTree>
+  </p:cSld>
+  <p:clrMapOvr>
+    <a:masterClrMapping/>
+  </p:clrMapOvr>
+</p:sld>
+</file>
+
+<file path=ppt/slides/slide27.xml><?xml version="1.0" encoding="utf-8"?>
+<p:sld xmlns:a="http://schemas.openxmlformats.org/drawingml/2006/main" xmlns:p="http://schemas.openxmlformats.org/presentationml/2006/main" xmlns:r="http://schemas.openxmlformats.org/officeDocument/2006/relationships">
+  <p:cSld>
+    <p:spTree>
+      <p:nvGrpSpPr>
+        <p:cNvPr id="1" name=""/>
+        <p:cNvGrpSpPr/>
+        <p:nvPr/>
+      </p:nvGrpSpPr>
+      <p:grpSpPr/>
+      <p:sp>
+        <p:nvSpPr>
+          <p:cNvPr id="2" name="TextBox 1"/>
+          <p:cNvSpPr txBox="1"/>
+          <p:nvPr/>
+        </p:nvSpPr>
+        <p:spPr>
+          <a:xfrm>
+            <a:off x="548640" y="411480"/>
+            <a:ext cx="11064240" cy="777240"/>
+          </a:xfrm>
+          <a:prstGeom prst="rect">
+            <a:avLst/>
+          </a:prstGeom>
+          <a:noFill/>
+        </p:spPr>
+        <p:txBody>
+          <a:bodyPr wrap="square">
+            <a:noAutofit/>
+          </a:bodyPr>
+          <a:lstStyle/>
           <a:p>
             <a:pPr>
               <a:lnSpc>
                 <a:spcPts val="2200"/>
               </a:lnSpc>
+              <a:defRPr sz="2800" b="1">
+                <a:solidFill>
+                  <a:srgbClr val="1A1A2E"/>
+                </a:solidFill>
+                <a:latin typeface="Calibri"/>
+              </a:defRPr>
+            </a:pPr>
+            <a:r>
+              <a:t>Demo: Synthesizable Subset</a:t>
+            </a:r>
+          </a:p>
+        </p:txBody>
+      </p:sp>
+      <p:sp>
+        <p:nvSpPr>
+          <p:cNvPr id="3" name="TextBox 2"/>
+          <p:cNvSpPr txBox="1"/>
+          <p:nvPr/>
+        </p:nvSpPr>
+        <p:spPr>
+          <a:xfrm>
+            <a:off x="548640" y="1051560"/>
+            <a:ext cx="11064240" cy="914400"/>
+          </a:xfrm>
+          <a:prstGeom prst="rect">
+            <a:avLst/>
+          </a:prstGeom>
+          <a:solidFill>
+            <a:srgbClr val="F4F4F4"/>
+          </a:solidFill>
+        </p:spPr>
+        <p:txBody>
+          <a:bodyPr wrap="square">
+            <a:noAutofit/>
+          </a:bodyPr>
+          <a:lstStyle/>
+          <a:p>
+            <a:pPr>
+              <a:lnSpc>
+                <a:spcPts val="2200"/>
+              </a:lnSpc>
               <a:spcAft>
-                <a:spcPts val="1000"/>
+                <a:spcPts val="200"/>
               </a:spcAft>
               <a:defRPr sz="2000" b="0">
                 <a:solidFill>
                   <a:srgbClr val="333333"/>
                 </a:solidFill>
-                <a:latin typeface="Calibri"/>
-              </a:defRPr>
-            </a:pPr>
-            <a:r>
-              <a:t>• Next: Next module in course</a:t>
-            </a:r>
-          </a:p>
-        </p:txBody>
-      </p:sp>
-      <p:sp>
-        <p:nvSpPr>
-          <p:cNvPr id="4" name="TextBox 3"/>
+                <a:latin typeface="Consolas"/>
+              </a:defRPr>
+            </a:pPr>
+            <a:r>
+              <a:t>$ cd module8/examples/synthesizable_subset &amp;&amp; make clean &amp;&amp; make run</a:t>
+            </a:r>
+          </a:p>
+        </p:txBody>
+      </p:sp>
+      <p:pic>
+        <p:nvPicPr>
+          <p:cNvPr id="4" name="Picture 3" descr="ex07_synthesizable_subset.png"/>
+          <p:cNvPicPr>
+            <a:picLocks noChangeAspect="1"/>
+          </p:cNvPicPr>
+          <p:nvPr/>
+        </p:nvPicPr>
+        <p:blipFill>
+          <a:blip r:embed="rId2"/>
+          <a:stretch>
+            <a:fillRect/>
+          </a:stretch>
+        </p:blipFill>
+        <p:spPr>
+          <a:xfrm>
+            <a:off x="548640" y="1965960"/>
+            <a:ext cx="7071358" cy="3977639"/>
+          </a:xfrm>
+          <a:prstGeom prst="rect">
+            <a:avLst/>
+          </a:prstGeom>
+        </p:spPr>
+      </p:pic>
+      <p:sp>
+        <p:nvSpPr>
+          <p:cNvPr id="5" name="TextBox 4"/>
+          <p:cNvSpPr txBox="1"/>
+          <p:nvPr/>
+        </p:nvSpPr>
+        <p:spPr>
+          <a:xfrm>
+            <a:off x="548640" y="6355080"/>
+            <a:ext cx="11064240" cy="320040"/>
+          </a:xfrm>
+          <a:prstGeom prst="rect">
+            <a:avLst/>
+          </a:prstGeom>
+          <a:noFill/>
+        </p:spPr>
+        <p:txBody>
+          <a:bodyPr wrap="square">
+            <a:noAutofit/>
+          </a:bodyPr>
+          <a:lstStyle/>
+          <a:p>
+            <a:pPr algn="r">
+              <a:lnSpc>
+                <a:spcPts val="2200"/>
+              </a:lnSpc>
+              <a:defRPr sz="1000" b="0">
+                <a:solidFill>
+                  <a:srgbClr val="666666"/>
+                </a:solidFill>
+                <a:latin typeface="Calibri"/>
+              </a:defRPr>
+            </a:pPr>
+            <a:r>
+              <a:t>learn_verilog_systemverilog / Module 8</a:t>
+            </a:r>
+          </a:p>
+        </p:txBody>
+      </p:sp>
+    </p:spTree>
+  </p:cSld>
+  <p:clrMapOvr>
+    <a:masterClrMapping/>
+  </p:clrMapOvr>
+</p:sld>
+</file>
+
+<file path=ppt/slides/slide28.xml><?xml version="1.0" encoding="utf-8"?>
+<p:sld xmlns:a="http://schemas.openxmlformats.org/drawingml/2006/main" xmlns:p="http://schemas.openxmlformats.org/presentationml/2006/main" xmlns:r="http://schemas.openxmlformats.org/officeDocument/2006/relationships">
+  <p:cSld>
+    <p:spTree>
+      <p:nvGrpSpPr>
+        <p:cNvPr id="1" name=""/>
+        <p:cNvGrpSpPr/>
+        <p:nvPr/>
+      </p:nvGrpSpPr>
+      <p:grpSpPr/>
+      <p:sp>
+        <p:nvSpPr>
+          <p:cNvPr id="2" name="TextBox 1"/>
+          <p:cNvSpPr txBox="1"/>
+          <p:nvPr/>
+        </p:nvSpPr>
+        <p:spPr>
+          <a:xfrm>
+            <a:off x="548640" y="411480"/>
+            <a:ext cx="11064240" cy="777240"/>
+          </a:xfrm>
+          <a:prstGeom prst="rect">
+            <a:avLst/>
+          </a:prstGeom>
+          <a:noFill/>
+        </p:spPr>
+        <p:txBody>
+          <a:bodyPr wrap="square">
+            <a:noAutofit/>
+          </a:bodyPr>
+          <a:lstStyle/>
+          <a:p>
+            <a:pPr>
+              <a:lnSpc>
+                <a:spcPts val="2200"/>
+              </a:lnSpc>
+              <a:defRPr sz="2800" b="1">
+                <a:solidFill>
+                  <a:srgbClr val="1A1A2E"/>
+                </a:solidFill>
+                <a:latin typeface="Calibri"/>
+              </a:defRPr>
+            </a:pPr>
+            <a:r>
+              <a:t>Demo: Tool Support</a:t>
+            </a:r>
+          </a:p>
+        </p:txBody>
+      </p:sp>
+      <p:sp>
+        <p:nvSpPr>
+          <p:cNvPr id="3" name="TextBox 2"/>
+          <p:cNvSpPr txBox="1"/>
+          <p:nvPr/>
+        </p:nvSpPr>
+        <p:spPr>
+          <a:xfrm>
+            <a:off x="548640" y="1051560"/>
+            <a:ext cx="11064240" cy="914400"/>
+          </a:xfrm>
+          <a:prstGeom prst="rect">
+            <a:avLst/>
+          </a:prstGeom>
+          <a:solidFill>
+            <a:srgbClr val="F4F4F4"/>
+          </a:solidFill>
+        </p:spPr>
+        <p:txBody>
+          <a:bodyPr wrap="square">
+            <a:noAutofit/>
+          </a:bodyPr>
+          <a:lstStyle/>
+          <a:p>
+            <a:pPr>
+              <a:lnSpc>
+                <a:spcPts val="2200"/>
+              </a:lnSpc>
+              <a:spcAft>
+                <a:spcPts val="200"/>
+              </a:spcAft>
+              <a:defRPr sz="2000" b="0">
+                <a:solidFill>
+                  <a:srgbClr val="333333"/>
+                </a:solidFill>
+                <a:latin typeface="Consolas"/>
+              </a:defRPr>
+            </a:pPr>
+            <a:r>
+              <a:t>$ cd module8/examples/tool_support &amp;&amp; make clean &amp;&amp; make run</a:t>
+            </a:r>
+          </a:p>
+        </p:txBody>
+      </p:sp>
+      <p:pic>
+        <p:nvPicPr>
+          <p:cNvPr id="4" name="Picture 3" descr="ex08_tool_support.png"/>
+          <p:cNvPicPr>
+            <a:picLocks noChangeAspect="1"/>
+          </p:cNvPicPr>
+          <p:nvPr/>
+        </p:nvPicPr>
+        <p:blipFill>
+          <a:blip r:embed="rId2"/>
+          <a:stretch>
+            <a:fillRect/>
+          </a:stretch>
+        </p:blipFill>
+        <p:spPr>
+          <a:xfrm>
+            <a:off x="548640" y="1965960"/>
+            <a:ext cx="7071358" cy="3977639"/>
+          </a:xfrm>
+          <a:prstGeom prst="rect">
+            <a:avLst/>
+          </a:prstGeom>
+        </p:spPr>
+      </p:pic>
+      <p:sp>
+        <p:nvSpPr>
+          <p:cNvPr id="5" name="TextBox 4"/>
+          <p:cNvSpPr txBox="1"/>
+          <p:nvPr/>
+        </p:nvSpPr>
+        <p:spPr>
+          <a:xfrm>
+            <a:off x="548640" y="6355080"/>
+            <a:ext cx="11064240" cy="320040"/>
+          </a:xfrm>
+          <a:prstGeom prst="rect">
+            <a:avLst/>
+          </a:prstGeom>
+          <a:noFill/>
+        </p:spPr>
+        <p:txBody>
+          <a:bodyPr wrap="square">
+            <a:noAutofit/>
+          </a:bodyPr>
+          <a:lstStyle/>
+          <a:p>
+            <a:pPr algn="r">
+              <a:lnSpc>
+                <a:spcPts val="2200"/>
+              </a:lnSpc>
+              <a:defRPr sz="1000" b="0">
+                <a:solidFill>
+                  <a:srgbClr val="666666"/>
+                </a:solidFill>
+                <a:latin typeface="Calibri"/>
+              </a:defRPr>
+            </a:pPr>
+            <a:r>
+              <a:t>learn_verilog_systemverilog / Module 8</a:t>
+            </a:r>
+          </a:p>
+        </p:txBody>
+      </p:sp>
+    </p:spTree>
+  </p:cSld>
+  <p:clrMapOvr>
+    <a:masterClrMapping/>
+  </p:clrMapOvr>
+</p:sld>
+</file>
+
+<file path=ppt/slides/slide29.xml><?xml version="1.0" encoding="utf-8"?>
+<p:sld xmlns:a="http://schemas.openxmlformats.org/drawingml/2006/main" xmlns:p="http://schemas.openxmlformats.org/presentationml/2006/main" xmlns:r="http://schemas.openxmlformats.org/officeDocument/2006/relationships">
+  <p:cSld>
+    <p:spTree>
+      <p:nvGrpSpPr>
+        <p:cNvPr id="1" name=""/>
+        <p:cNvGrpSpPr/>
+        <p:nvPr/>
+      </p:nvGrpSpPr>
+      <p:grpSpPr/>
+      <p:sp>
+        <p:nvSpPr>
+          <p:cNvPr id="2" name="TextBox 1"/>
+          <p:cNvSpPr txBox="1"/>
+          <p:nvPr/>
+        </p:nvSpPr>
+        <p:spPr>
+          <a:xfrm>
+            <a:off x="548640" y="411480"/>
+            <a:ext cx="11064240" cy="777240"/>
+          </a:xfrm>
+          <a:prstGeom prst="rect">
+            <a:avLst/>
+          </a:prstGeom>
+          <a:noFill/>
+        </p:spPr>
+        <p:txBody>
+          <a:bodyPr wrap="square">
+            <a:noAutofit/>
+          </a:bodyPr>
+          <a:lstStyle/>
+          <a:p>
+            <a:pPr>
+              <a:lnSpc>
+                <a:spcPts val="2200"/>
+              </a:lnSpc>
+              <a:defRPr sz="2800" b="1">
+                <a:solidFill>
+                  <a:srgbClr val="1A1A2E"/>
+                </a:solidFill>
+                <a:latin typeface="Calibri"/>
+              </a:defRPr>
+            </a:pPr>
+            <a:r>
+              <a:t>Demo: Version Selection</a:t>
+            </a:r>
+          </a:p>
+        </p:txBody>
+      </p:sp>
+      <p:sp>
+        <p:nvSpPr>
+          <p:cNvPr id="3" name="TextBox 2"/>
+          <p:cNvSpPr txBox="1"/>
+          <p:nvPr/>
+        </p:nvSpPr>
+        <p:spPr>
+          <a:xfrm>
+            <a:off x="548640" y="1051560"/>
+            <a:ext cx="11064240" cy="914400"/>
+          </a:xfrm>
+          <a:prstGeom prst="rect">
+            <a:avLst/>
+          </a:prstGeom>
+          <a:solidFill>
+            <a:srgbClr val="F4F4F4"/>
+          </a:solidFill>
+        </p:spPr>
+        <p:txBody>
+          <a:bodyPr wrap="square">
+            <a:noAutofit/>
+          </a:bodyPr>
+          <a:lstStyle/>
+          <a:p>
+            <a:pPr>
+              <a:lnSpc>
+                <a:spcPts val="2200"/>
+              </a:lnSpc>
+              <a:spcAft>
+                <a:spcPts val="200"/>
+              </a:spcAft>
+              <a:defRPr sz="2000" b="0">
+                <a:solidFill>
+                  <a:srgbClr val="333333"/>
+                </a:solidFill>
+                <a:latin typeface="Consolas"/>
+              </a:defRPr>
+            </a:pPr>
+            <a:r>
+              <a:t>$ cd module8/examples/version_selection &amp;&amp; make clean &amp;&amp; make run</a:t>
+            </a:r>
+          </a:p>
+        </p:txBody>
+      </p:sp>
+      <p:pic>
+        <p:nvPicPr>
+          <p:cNvPr id="4" name="Picture 3" descr="ex09_version_selection.png"/>
+          <p:cNvPicPr>
+            <a:picLocks noChangeAspect="1"/>
+          </p:cNvPicPr>
+          <p:nvPr/>
+        </p:nvPicPr>
+        <p:blipFill>
+          <a:blip r:embed="rId2"/>
+          <a:stretch>
+            <a:fillRect/>
+          </a:stretch>
+        </p:blipFill>
+        <p:spPr>
+          <a:xfrm>
+            <a:off x="548640" y="1965960"/>
+            <a:ext cx="7071358" cy="3977639"/>
+          </a:xfrm>
+          <a:prstGeom prst="rect">
+            <a:avLst/>
+          </a:prstGeom>
+        </p:spPr>
+      </p:pic>
+      <p:sp>
+        <p:nvSpPr>
+          <p:cNvPr id="5" name="TextBox 4"/>
           <p:cNvSpPr txBox="1"/>
           <p:nvPr/>
         </p:nvSpPr>
@@ -7100,6 +8676,927 @@
 </p:sld>
 </file>
 
+<file path=ppt/slides/slide30.xml><?xml version="1.0" encoding="utf-8"?>
+<p:sld xmlns:a="http://schemas.openxmlformats.org/drawingml/2006/main" xmlns:p="http://schemas.openxmlformats.org/presentationml/2006/main" xmlns:r="http://schemas.openxmlformats.org/officeDocument/2006/relationships">
+  <p:cSld>
+    <p:spTree>
+      <p:nvGrpSpPr>
+        <p:cNvPr id="1" name=""/>
+        <p:cNvGrpSpPr/>
+        <p:nvPr/>
+      </p:nvGrpSpPr>
+      <p:grpSpPr/>
+      <p:sp>
+        <p:nvSpPr>
+          <p:cNvPr id="2" name="TextBox 1"/>
+          <p:cNvSpPr txBox="1"/>
+          <p:nvPr/>
+        </p:nvSpPr>
+        <p:spPr>
+          <a:xfrm>
+            <a:off x="548640" y="411480"/>
+            <a:ext cx="11064240" cy="777240"/>
+          </a:xfrm>
+          <a:prstGeom prst="rect">
+            <a:avLst/>
+          </a:prstGeom>
+          <a:noFill/>
+        </p:spPr>
+        <p:txBody>
+          <a:bodyPr wrap="square">
+            <a:noAutofit/>
+          </a:bodyPr>
+          <a:lstStyle/>
+          <a:p>
+            <a:pPr>
+              <a:lnSpc>
+                <a:spcPts val="2200"/>
+              </a:lnSpc>
+              <a:defRPr sz="2800" b="1">
+                <a:solidFill>
+                  <a:srgbClr val="1A1A2E"/>
+                </a:solidFill>
+                <a:latin typeface="Calibri"/>
+              </a:defRPr>
+            </a:pPr>
+            <a:r>
+              <a:t>Demo: Version Timeline</a:t>
+            </a:r>
+          </a:p>
+        </p:txBody>
+      </p:sp>
+      <p:sp>
+        <p:nvSpPr>
+          <p:cNvPr id="3" name="TextBox 2"/>
+          <p:cNvSpPr txBox="1"/>
+          <p:nvPr/>
+        </p:nvSpPr>
+        <p:spPr>
+          <a:xfrm>
+            <a:off x="548640" y="1051560"/>
+            <a:ext cx="11064240" cy="914400"/>
+          </a:xfrm>
+          <a:prstGeom prst="rect">
+            <a:avLst/>
+          </a:prstGeom>
+          <a:solidFill>
+            <a:srgbClr val="F4F4F4"/>
+          </a:solidFill>
+        </p:spPr>
+        <p:txBody>
+          <a:bodyPr wrap="square">
+            <a:noAutofit/>
+          </a:bodyPr>
+          <a:lstStyle/>
+          <a:p>
+            <a:pPr>
+              <a:lnSpc>
+                <a:spcPts val="2200"/>
+              </a:lnSpc>
+              <a:spcAft>
+                <a:spcPts val="200"/>
+              </a:spcAft>
+              <a:defRPr sz="2000" b="0">
+                <a:solidFill>
+                  <a:srgbClr val="333333"/>
+                </a:solidFill>
+                <a:latin typeface="Consolas"/>
+              </a:defRPr>
+            </a:pPr>
+            <a:r>
+              <a:t>$ cd module8/examples/version_timeline &amp;&amp; make clean &amp;&amp; make run</a:t>
+            </a:r>
+          </a:p>
+        </p:txBody>
+      </p:sp>
+      <p:pic>
+        <p:nvPicPr>
+          <p:cNvPr id="4" name="Picture 3" descr="ex10_version_timeline.png"/>
+          <p:cNvPicPr>
+            <a:picLocks noChangeAspect="1"/>
+          </p:cNvPicPr>
+          <p:nvPr/>
+        </p:nvPicPr>
+        <p:blipFill>
+          <a:blip r:embed="rId2"/>
+          <a:stretch>
+            <a:fillRect/>
+          </a:stretch>
+        </p:blipFill>
+        <p:spPr>
+          <a:xfrm>
+            <a:off x="548640" y="1965960"/>
+            <a:ext cx="7071358" cy="3977639"/>
+          </a:xfrm>
+          <a:prstGeom prst="rect">
+            <a:avLst/>
+          </a:prstGeom>
+        </p:spPr>
+      </p:pic>
+      <p:sp>
+        <p:nvSpPr>
+          <p:cNvPr id="5" name="TextBox 4"/>
+          <p:cNvSpPr txBox="1"/>
+          <p:nvPr/>
+        </p:nvSpPr>
+        <p:spPr>
+          <a:xfrm>
+            <a:off x="548640" y="6355080"/>
+            <a:ext cx="11064240" cy="320040"/>
+          </a:xfrm>
+          <a:prstGeom prst="rect">
+            <a:avLst/>
+          </a:prstGeom>
+          <a:noFill/>
+        </p:spPr>
+        <p:txBody>
+          <a:bodyPr wrap="square">
+            <a:noAutofit/>
+          </a:bodyPr>
+          <a:lstStyle/>
+          <a:p>
+            <a:pPr algn="r">
+              <a:lnSpc>
+                <a:spcPts val="2200"/>
+              </a:lnSpc>
+              <a:defRPr sz="1000" b="0">
+                <a:solidFill>
+                  <a:srgbClr val="666666"/>
+                </a:solidFill>
+                <a:latin typeface="Calibri"/>
+              </a:defRPr>
+            </a:pPr>
+            <a:r>
+              <a:t>learn_verilog_systemverilog / Module 8</a:t>
+            </a:r>
+          </a:p>
+        </p:txBody>
+      </p:sp>
+    </p:spTree>
+  </p:cSld>
+  <p:clrMapOvr>
+    <a:masterClrMapping/>
+  </p:clrMapOvr>
+</p:sld>
+</file>
+
+<file path=ppt/slides/slide31.xml><?xml version="1.0" encoding="utf-8"?>
+<p:sld xmlns:a="http://schemas.openxmlformats.org/drawingml/2006/main" xmlns:p="http://schemas.openxmlformats.org/presentationml/2006/main" xmlns:r="http://schemas.openxmlformats.org/officeDocument/2006/relationships">
+  <p:cSld>
+    <p:spTree>
+      <p:nvGrpSpPr>
+        <p:cNvPr id="1" name=""/>
+        <p:cNvGrpSpPr/>
+        <p:nvPr/>
+      </p:nvGrpSpPr>
+      <p:grpSpPr/>
+      <p:sp>
+        <p:nvSpPr>
+          <p:cNvPr id="2" name="TextBox 1"/>
+          <p:cNvSpPr txBox="1"/>
+          <p:nvPr/>
+        </p:nvSpPr>
+        <p:spPr>
+          <a:xfrm>
+            <a:off x="548640" y="2743200"/>
+            <a:ext cx="11064240" cy="1371600"/>
+          </a:xfrm>
+          <a:prstGeom prst="rect">
+            <a:avLst/>
+          </a:prstGeom>
+          <a:noFill/>
+        </p:spPr>
+        <p:txBody>
+          <a:bodyPr wrap="square">
+            <a:noAutofit/>
+          </a:bodyPr>
+          <a:lstStyle/>
+          <a:p>
+            <a:pPr algn="ctr">
+              <a:lnSpc>
+                <a:spcPts val="2200"/>
+              </a:lnSpc>
+              <a:defRPr sz="3600" b="1">
+                <a:solidFill>
+                  <a:srgbClr val="1A1A2E"/>
+                </a:solidFill>
+                <a:latin typeface="Calibri"/>
+              </a:defRPr>
+            </a:pPr>
+            <a:r>
+              <a:t>Practice &amp; assessment</a:t>
+            </a:r>
+          </a:p>
+        </p:txBody>
+      </p:sp>
+      <p:sp>
+        <p:nvSpPr>
+          <p:cNvPr id="3" name="TextBox 2"/>
+          <p:cNvSpPr txBox="1"/>
+          <p:nvPr/>
+        </p:nvSpPr>
+        <p:spPr>
+          <a:xfrm>
+            <a:off x="548640" y="6355080"/>
+            <a:ext cx="11064240" cy="320040"/>
+          </a:xfrm>
+          <a:prstGeom prst="rect">
+            <a:avLst/>
+          </a:prstGeom>
+          <a:noFill/>
+        </p:spPr>
+        <p:txBody>
+          <a:bodyPr wrap="square">
+            <a:noAutofit/>
+          </a:bodyPr>
+          <a:lstStyle/>
+          <a:p>
+            <a:pPr algn="r">
+              <a:lnSpc>
+                <a:spcPts val="2200"/>
+              </a:lnSpc>
+              <a:defRPr sz="1000" b="0">
+                <a:solidFill>
+                  <a:srgbClr val="666666"/>
+                </a:solidFill>
+                <a:latin typeface="Calibri"/>
+              </a:defRPr>
+            </a:pPr>
+            <a:r>
+              <a:t>learn_verilog_systemverilog / Module 8</a:t>
+            </a:r>
+          </a:p>
+        </p:txBody>
+      </p:sp>
+    </p:spTree>
+  </p:cSld>
+  <p:clrMapOvr>
+    <a:masterClrMapping/>
+  </p:clrMapOvr>
+</p:sld>
+</file>
+
+<file path=ppt/slides/slide32.xml><?xml version="1.0" encoding="utf-8"?>
+<p:sld xmlns:a="http://schemas.openxmlformats.org/drawingml/2006/main" xmlns:p="http://schemas.openxmlformats.org/presentationml/2006/main" xmlns:r="http://schemas.openxmlformats.org/officeDocument/2006/relationships">
+  <p:cSld>
+    <p:spTree>
+      <p:nvGrpSpPr>
+        <p:cNvPr id="1" name=""/>
+        <p:cNvGrpSpPr/>
+        <p:nvPr/>
+      </p:nvGrpSpPr>
+      <p:grpSpPr/>
+      <p:sp>
+        <p:nvSpPr>
+          <p:cNvPr id="2" name="TextBox 1"/>
+          <p:cNvSpPr txBox="1"/>
+          <p:nvPr/>
+        </p:nvSpPr>
+        <p:spPr>
+          <a:xfrm>
+            <a:off x="548640" y="411480"/>
+            <a:ext cx="11064240" cy="777240"/>
+          </a:xfrm>
+          <a:prstGeom prst="rect">
+            <a:avLst/>
+          </a:prstGeom>
+          <a:noFill/>
+        </p:spPr>
+        <p:txBody>
+          <a:bodyPr wrap="square">
+            <a:noAutofit/>
+          </a:bodyPr>
+          <a:lstStyle/>
+          <a:p>
+            <a:pPr>
+              <a:lnSpc>
+                <a:spcPts val="2200"/>
+              </a:lnSpc>
+              <a:defRPr sz="2800" b="1">
+                <a:solidFill>
+                  <a:srgbClr val="1A1A2E"/>
+                </a:solidFill>
+                <a:latin typeface="Calibri"/>
+              </a:defRPr>
+            </a:pPr>
+            <a:r>
+              <a:t>Exercises</a:t>
+            </a:r>
+          </a:p>
+        </p:txBody>
+      </p:sp>
+      <p:sp>
+        <p:nvSpPr>
+          <p:cNvPr id="3" name="TextBox 2"/>
+          <p:cNvSpPr txBox="1"/>
+          <p:nvPr/>
+        </p:nvSpPr>
+        <p:spPr>
+          <a:xfrm>
+            <a:off x="548640" y="1234440"/>
+            <a:ext cx="11064240" cy="4937760"/>
+          </a:xfrm>
+          <a:prstGeom prst="rect">
+            <a:avLst/>
+          </a:prstGeom>
+          <a:noFill/>
+        </p:spPr>
+        <p:txBody>
+          <a:bodyPr wrap="square">
+            <a:noAutofit/>
+          </a:bodyPr>
+          <a:lstStyle/>
+          <a:p>
+            <a:pPr>
+              <a:lnSpc>
+                <a:spcPts val="2200"/>
+              </a:lnSpc>
+              <a:spcAft>
+                <a:spcPts val="1000"/>
+              </a:spcAft>
+              <a:defRPr sz="2000" b="0">
+                <a:solidFill>
+                  <a:srgbClr val="333333"/>
+                </a:solidFill>
+                <a:latin typeface="Calibri"/>
+              </a:defRPr>
+            </a:pPr>
+            <a:r>
+              <a:t>• Lookup</a:t>
+            </a:r>
+          </a:p>
+          <a:p>
+            <a:pPr>
+              <a:lnSpc>
+                <a:spcPts val="2200"/>
+              </a:lnSpc>
+              <a:spcAft>
+                <a:spcPts val="1000"/>
+              </a:spcAft>
+              <a:defRPr sz="2000" b="0">
+                <a:solidFill>
+                  <a:srgbClr val="333333"/>
+                </a:solidFill>
+                <a:latin typeface="Calibri"/>
+              </a:defRPr>
+            </a:pPr>
+            <a:r>
+              <a:t>• Subset</a:t>
+            </a:r>
+          </a:p>
+          <a:p>
+            <a:pPr>
+              <a:lnSpc>
+                <a:spcPts val="2200"/>
+              </a:lnSpc>
+              <a:spcAft>
+                <a:spcPts val="1000"/>
+              </a:spcAft>
+              <a:defRPr sz="2000" b="0">
+                <a:solidFill>
+                  <a:srgbClr val="333333"/>
+                </a:solidFill>
+                <a:latin typeface="Calibri"/>
+              </a:defRPr>
+            </a:pPr>
+            <a:r>
+              <a:t>• Migration</a:t>
+            </a:r>
+          </a:p>
+          <a:p>
+            <a:pPr>
+              <a:lnSpc>
+                <a:spcPts val="2200"/>
+              </a:lnSpc>
+              <a:spcAft>
+                <a:spcPts val="1000"/>
+              </a:spcAft>
+              <a:defRPr sz="2000" b="0">
+                <a:solidFill>
+                  <a:srgbClr val="333333"/>
+                </a:solidFill>
+                <a:latin typeface="Calibri"/>
+              </a:defRPr>
+            </a:pPr>
+            <a:r>
+              <a:t>• Course map</a:t>
+            </a:r>
+          </a:p>
+          <a:p>
+            <a:pPr>
+              <a:lnSpc>
+                <a:spcPts val="2200"/>
+              </a:lnSpc>
+              <a:spcAft>
+                <a:spcPts val="1000"/>
+              </a:spcAft>
+              <a:defRPr sz="2000" b="0">
+                <a:solidFill>
+                  <a:srgbClr val="333333"/>
+                </a:solidFill>
+                <a:latin typeface="Calibri"/>
+              </a:defRPr>
+            </a:pPr>
+            <a:r>
+              <a:t>• Cheat sheet</a:t>
+            </a:r>
+          </a:p>
+        </p:txBody>
+      </p:sp>
+      <p:sp>
+        <p:nvSpPr>
+          <p:cNvPr id="4" name="TextBox 3"/>
+          <p:cNvSpPr txBox="1"/>
+          <p:nvPr/>
+        </p:nvSpPr>
+        <p:spPr>
+          <a:xfrm>
+            <a:off x="548640" y="6355080"/>
+            <a:ext cx="11064240" cy="320040"/>
+          </a:xfrm>
+          <a:prstGeom prst="rect">
+            <a:avLst/>
+          </a:prstGeom>
+          <a:noFill/>
+        </p:spPr>
+        <p:txBody>
+          <a:bodyPr wrap="square">
+            <a:noAutofit/>
+          </a:bodyPr>
+          <a:lstStyle/>
+          <a:p>
+            <a:pPr algn="r">
+              <a:lnSpc>
+                <a:spcPts val="2200"/>
+              </a:lnSpc>
+              <a:defRPr sz="1000" b="0">
+                <a:solidFill>
+                  <a:srgbClr val="666666"/>
+                </a:solidFill>
+                <a:latin typeface="Calibri"/>
+              </a:defRPr>
+            </a:pPr>
+            <a:r>
+              <a:t>learn_verilog_systemverilog / Module 8</a:t>
+            </a:r>
+          </a:p>
+        </p:txBody>
+      </p:sp>
+    </p:spTree>
+  </p:cSld>
+  <p:clrMapOvr>
+    <a:masterClrMapping/>
+  </p:clrMapOvr>
+</p:sld>
+</file>
+
+<file path=ppt/slides/slide33.xml><?xml version="1.0" encoding="utf-8"?>
+<p:sld xmlns:a="http://schemas.openxmlformats.org/drawingml/2006/main" xmlns:p="http://schemas.openxmlformats.org/presentationml/2006/main" xmlns:r="http://schemas.openxmlformats.org/officeDocument/2006/relationships">
+  <p:cSld>
+    <p:spTree>
+      <p:nvGrpSpPr>
+        <p:cNvPr id="1" name=""/>
+        <p:cNvGrpSpPr/>
+        <p:nvPr/>
+      </p:nvGrpSpPr>
+      <p:grpSpPr/>
+      <p:sp>
+        <p:nvSpPr>
+          <p:cNvPr id="2" name="TextBox 1"/>
+          <p:cNvSpPr txBox="1"/>
+          <p:nvPr/>
+        </p:nvSpPr>
+        <p:spPr>
+          <a:xfrm>
+            <a:off x="548640" y="411480"/>
+            <a:ext cx="11064240" cy="777240"/>
+          </a:xfrm>
+          <a:prstGeom prst="rect">
+            <a:avLst/>
+          </a:prstGeom>
+          <a:noFill/>
+        </p:spPr>
+        <p:txBody>
+          <a:bodyPr wrap="square">
+            <a:noAutofit/>
+          </a:bodyPr>
+          <a:lstStyle/>
+          <a:p>
+            <a:pPr>
+              <a:lnSpc>
+                <a:spcPts val="2200"/>
+              </a:lnSpc>
+              <a:defRPr sz="2800" b="1">
+                <a:solidFill>
+                  <a:srgbClr val="1A1A2E"/>
+                </a:solidFill>
+                <a:latin typeface="Calibri"/>
+              </a:defRPr>
+            </a:pPr>
+            <a:r>
+              <a:t>Exercises</a:t>
+            </a:r>
+          </a:p>
+        </p:txBody>
+      </p:sp>
+      <p:sp>
+        <p:nvSpPr>
+          <p:cNvPr id="3" name="TextBox 2"/>
+          <p:cNvSpPr txBox="1"/>
+          <p:nvPr/>
+        </p:nvSpPr>
+        <p:spPr>
+          <a:xfrm>
+            <a:off x="548640" y="1234440"/>
+            <a:ext cx="11064240" cy="4937760"/>
+          </a:xfrm>
+          <a:prstGeom prst="rect">
+            <a:avLst/>
+          </a:prstGeom>
+          <a:noFill/>
+        </p:spPr>
+        <p:txBody>
+          <a:bodyPr wrap="square">
+            <a:noAutofit/>
+          </a:bodyPr>
+          <a:lstStyle/>
+          <a:p>
+            <a:pPr>
+              <a:lnSpc>
+                <a:spcPts val="2200"/>
+              </a:lnSpc>
+              <a:spcAft>
+                <a:spcPts val="1000"/>
+              </a:spcAft>
+              <a:defRPr sz="2000" b="0">
+                <a:solidFill>
+                  <a:srgbClr val="333333"/>
+                </a:solidFill>
+                <a:latin typeface="Calibri"/>
+              </a:defRPr>
+            </a:pPr>
+            <a:r>
+              <a:t>• Assuming a construct is in an older standard</a:t>
+            </a:r>
+          </a:p>
+          <a:p>
+            <a:pPr>
+              <a:lnSpc>
+                <a:spcPts val="2200"/>
+              </a:lnSpc>
+              <a:spcAft>
+                <a:spcPts val="1000"/>
+              </a:spcAft>
+              <a:defRPr sz="2000" b="0">
+                <a:solidFill>
+                  <a:srgbClr val="333333"/>
+                </a:solidFill>
+                <a:latin typeface="Calibri"/>
+              </a:defRPr>
+            </a:pPr>
+            <a:r>
+              <a:t>• Mixing subsets without a rule</a:t>
+            </a:r>
+          </a:p>
+          <a:p>
+            <a:pPr>
+              <a:lnSpc>
+                <a:spcPts val="2200"/>
+              </a:lnSpc>
+              <a:spcAft>
+                <a:spcPts val="1000"/>
+              </a:spcAft>
+              <a:defRPr sz="2000" b="0">
+                <a:solidFill>
+                  <a:srgbClr val="333333"/>
+                </a:solidFill>
+                <a:latin typeface="Calibri"/>
+              </a:defRPr>
+            </a:pPr>
+            <a:r>
+              <a:t>• Skipping regression after migration</a:t>
+            </a:r>
+          </a:p>
+          <a:p>
+            <a:pPr>
+              <a:lnSpc>
+                <a:spcPts val="2200"/>
+              </a:lnSpc>
+              <a:spcAft>
+                <a:spcPts val="1000"/>
+              </a:spcAft>
+              <a:defRPr sz="2000" b="0">
+                <a:solidFill>
+                  <a:srgbClr val="333333"/>
+                </a:solidFill>
+                <a:latin typeface="Calibri"/>
+              </a:defRPr>
+            </a:pPr>
+            <a:r>
+              <a:t>• Forgetting tool support</a:t>
+            </a:r>
+          </a:p>
+          <a:p>
+            <a:pPr>
+              <a:lnSpc>
+                <a:spcPts val="2200"/>
+              </a:lnSpc>
+              <a:spcAft>
+                <a:spcPts val="1000"/>
+              </a:spcAft>
+              <a:defRPr sz="2000" b="0">
+                <a:solidFill>
+                  <a:srgbClr val="333333"/>
+                </a:solidFill>
+                <a:latin typeface="Calibri"/>
+              </a:defRPr>
+            </a:pPr>
+            <a:r>
+              <a:t>• Treating this module as a replacement for Modules</a:t>
+            </a:r>
+          </a:p>
+          <a:p>
+            <a:pPr>
+              <a:lnSpc>
+                <a:spcPts val="2200"/>
+              </a:lnSpc>
+              <a:spcAft>
+                <a:spcPts val="1000"/>
+              </a:spcAft>
+              <a:defRPr sz="2000" b="0">
+                <a:solidFill>
+                  <a:srgbClr val="333333"/>
+                </a:solidFill>
+                <a:latin typeface="Calibri"/>
+              </a:defRPr>
+            </a:pPr>
+            <a:r>
+              <a:t>      1–7</a:t>
+            </a:r>
+          </a:p>
+        </p:txBody>
+      </p:sp>
+      <p:sp>
+        <p:nvSpPr>
+          <p:cNvPr id="4" name="TextBox 3"/>
+          <p:cNvSpPr txBox="1"/>
+          <p:nvPr/>
+        </p:nvSpPr>
+        <p:spPr>
+          <a:xfrm>
+            <a:off x="548640" y="6355080"/>
+            <a:ext cx="11064240" cy="320040"/>
+          </a:xfrm>
+          <a:prstGeom prst="rect">
+            <a:avLst/>
+          </a:prstGeom>
+          <a:noFill/>
+        </p:spPr>
+        <p:txBody>
+          <a:bodyPr wrap="square">
+            <a:noAutofit/>
+          </a:bodyPr>
+          <a:lstStyle/>
+          <a:p>
+            <a:pPr algn="r">
+              <a:lnSpc>
+                <a:spcPts val="2200"/>
+              </a:lnSpc>
+              <a:defRPr sz="1000" b="0">
+                <a:solidFill>
+                  <a:srgbClr val="666666"/>
+                </a:solidFill>
+                <a:latin typeface="Calibri"/>
+              </a:defRPr>
+            </a:pPr>
+            <a:r>
+              <a:t>learn_verilog_systemverilog / Module 8</a:t>
+            </a:r>
+          </a:p>
+        </p:txBody>
+      </p:sp>
+    </p:spTree>
+  </p:cSld>
+  <p:clrMapOvr>
+    <a:masterClrMapping/>
+  </p:clrMapOvr>
+</p:sld>
+</file>
+
+<file path=ppt/slides/slide34.xml><?xml version="1.0" encoding="utf-8"?>
+<p:sld xmlns:a="http://schemas.openxmlformats.org/drawingml/2006/main" xmlns:p="http://schemas.openxmlformats.org/presentationml/2006/main" xmlns:r="http://schemas.openxmlformats.org/officeDocument/2006/relationships">
+  <p:cSld>
+    <p:spTree>
+      <p:nvGrpSpPr>
+        <p:cNvPr id="1" name=""/>
+        <p:cNvGrpSpPr/>
+        <p:nvPr/>
+      </p:nvGrpSpPr>
+      <p:grpSpPr/>
+      <p:sp>
+        <p:nvSpPr>
+          <p:cNvPr id="2" name="TextBox 1"/>
+          <p:cNvSpPr txBox="1"/>
+          <p:nvPr/>
+        </p:nvSpPr>
+        <p:spPr>
+          <a:xfrm>
+            <a:off x="548640" y="411480"/>
+            <a:ext cx="11064240" cy="777240"/>
+          </a:xfrm>
+          <a:prstGeom prst="rect">
+            <a:avLst/>
+          </a:prstGeom>
+          <a:noFill/>
+        </p:spPr>
+        <p:txBody>
+          <a:bodyPr wrap="square">
+            <a:noAutofit/>
+          </a:bodyPr>
+          <a:lstStyle/>
+          <a:p>
+            <a:pPr>
+              <a:lnSpc>
+                <a:spcPts val="2200"/>
+              </a:lnSpc>
+              <a:defRPr sz="2800" b="1">
+                <a:solidFill>
+                  <a:srgbClr val="1A1A2E"/>
+                </a:solidFill>
+                <a:latin typeface="Calibri"/>
+              </a:defRPr>
+            </a:pPr>
+            <a:r>
+              <a:t>Summary &amp; next steps</a:t>
+            </a:r>
+          </a:p>
+        </p:txBody>
+      </p:sp>
+      <p:sp>
+        <p:nvSpPr>
+          <p:cNvPr id="3" name="TextBox 2"/>
+          <p:cNvSpPr txBox="1"/>
+          <p:nvPr/>
+        </p:nvSpPr>
+        <p:spPr>
+          <a:xfrm>
+            <a:off x="548640" y="1234440"/>
+            <a:ext cx="11064240" cy="4937760"/>
+          </a:xfrm>
+          <a:prstGeom prst="rect">
+            <a:avLst/>
+          </a:prstGeom>
+          <a:noFill/>
+        </p:spPr>
+        <p:txBody>
+          <a:bodyPr wrap="square">
+            <a:noAutofit/>
+          </a:bodyPr>
+          <a:lstStyle/>
+          <a:p>
+            <a:pPr>
+              <a:lnSpc>
+                <a:spcPts val="2200"/>
+              </a:lnSpc>
+              <a:spcAft>
+                <a:spcPts val="1000"/>
+              </a:spcAft>
+              <a:defRPr sz="2000" b="0">
+                <a:solidFill>
+                  <a:srgbClr val="333333"/>
+                </a:solidFill>
+                <a:latin typeface="Calibri"/>
+              </a:defRPr>
+            </a:pPr>
+            <a:r>
+              <a:t>• Provide a single quick reference and course summary</a:t>
+            </a:r>
+          </a:p>
+          <a:p>
+            <a:pPr>
+              <a:lnSpc>
+                <a:spcPts val="2200"/>
+              </a:lnSpc>
+              <a:spcAft>
+                <a:spcPts val="1000"/>
+              </a:spcAft>
+              <a:defRPr sz="2000" b="0">
+                <a:solidFill>
+                  <a:srgbClr val="333333"/>
+                </a:solidFill>
+                <a:latin typeface="Calibri"/>
+              </a:defRPr>
+            </a:pPr>
+            <a:r>
+              <a:t>      for Verilog and SystemVerilog across IEEE versi…</a:t>
+            </a:r>
+          </a:p>
+          <a:p>
+            <a:pPr>
+              <a:lnSpc>
+                <a:spcPts val="2200"/>
+              </a:lnSpc>
+              <a:spcAft>
+                <a:spcPts val="1000"/>
+              </a:spcAft>
+              <a:defRPr sz="2000" b="0">
+                <a:solidFill>
+                  <a:srgbClr val="333333"/>
+                </a:solidFill>
+                <a:latin typeface="Calibri"/>
+              </a:defRPr>
+            </a:pPr>
+            <a:r>
+              <a:t>• Complete module8/CHECKLIST.md</a:t>
+            </a:r>
+          </a:p>
+          <a:p>
+            <a:pPr>
+              <a:lnSpc>
+                <a:spcPts val="2200"/>
+              </a:lnSpc>
+              <a:spcAft>
+                <a:spcPts val="1000"/>
+              </a:spcAft>
+              <a:defRPr sz="2000" b="0">
+                <a:solidFill>
+                  <a:srgbClr val="333333"/>
+                </a:solidFill>
+                <a:latin typeface="Calibri"/>
+              </a:defRPr>
+            </a:pPr>
+            <a:r>
+              <a:t>• Run ./scripts/module8.sh --check</a:t>
+            </a:r>
+          </a:p>
+          <a:p>
+            <a:pPr>
+              <a:lnSpc>
+                <a:spcPts val="2200"/>
+              </a:lnSpc>
+              <a:spcAft>
+                <a:spcPts val="1000"/>
+              </a:spcAft>
+              <a:defRPr sz="2000" b="0">
+                <a:solidFill>
+                  <a:srgbClr val="333333"/>
+                </a:solidFill>
+                <a:latin typeface="Calibri"/>
+              </a:defRPr>
+            </a:pPr>
+            <a:r>
+              <a:t>• Next: Next module in course</a:t>
+            </a:r>
+          </a:p>
+        </p:txBody>
+      </p:sp>
+      <p:sp>
+        <p:nvSpPr>
+          <p:cNvPr id="4" name="TextBox 3"/>
+          <p:cNvSpPr txBox="1"/>
+          <p:nvPr/>
+        </p:nvSpPr>
+        <p:spPr>
+          <a:xfrm>
+            <a:off x="548640" y="6355080"/>
+            <a:ext cx="11064240" cy="320040"/>
+          </a:xfrm>
+          <a:prstGeom prst="rect">
+            <a:avLst/>
+          </a:prstGeom>
+          <a:noFill/>
+        </p:spPr>
+        <p:txBody>
+          <a:bodyPr wrap="square">
+            <a:noAutofit/>
+          </a:bodyPr>
+          <a:lstStyle/>
+          <a:p>
+            <a:pPr algn="r">
+              <a:lnSpc>
+                <a:spcPts val="2200"/>
+              </a:lnSpc>
+              <a:defRPr sz="1000" b="0">
+                <a:solidFill>
+                  <a:srgbClr val="666666"/>
+                </a:solidFill>
+                <a:latin typeface="Calibri"/>
+              </a:defRPr>
+            </a:pPr>
+            <a:r>
+              <a:t>learn_verilog_systemverilog / Module 8</a:t>
+            </a:r>
+          </a:p>
+        </p:txBody>
+      </p:sp>
+    </p:spTree>
+  </p:cSld>
+  <p:clrMapOvr>
+    <a:masterClrMapping/>
+  </p:clrMapOvr>
+</p:sld>
+</file>
+
 <file path=ppt/slides/slide4.xml><?xml version="1.0" encoding="utf-8"?>
 <p:sld xmlns:a="http://schemas.openxmlformats.org/drawingml/2006/main" xmlns:p="http://schemas.openxmlformats.org/presentationml/2006/main" xmlns:r="http://schemas.openxmlformats.org/officeDocument/2006/relationships">
   <p:cSld>
@@ -7460,7 +9957,7 @@
               </a:defRPr>
             </a:pPr>
             <a:r>
-              <a:t>Syllabus topics</a:t>
+              <a:t>Design architecture</a:t>
             </a:r>
           </a:p>
         </p:txBody>
@@ -7556,21 +10053,45 @@
               </a:defRPr>
             </a:pPr>
             <a:r>
-              <a:t>1. Version Timeline (One Table)</a:t>
-            </a:r>
-          </a:p>
-        </p:txBody>
-      </p:sp>
-      <p:sp>
-        <p:nvSpPr>
-          <p:cNvPr id="3" name="TextBox 2"/>
+              <a:t>RTL / block architecture</a:t>
+            </a:r>
+          </a:p>
+        </p:txBody>
+      </p:sp>
+      <p:pic>
+        <p:nvPicPr>
+          <p:cNvPr id="3" name="Picture 2" descr="rtl_architecture.png"/>
+          <p:cNvPicPr>
+            <a:picLocks noChangeAspect="1"/>
+          </p:cNvPicPr>
+          <p:nvPr/>
+        </p:nvPicPr>
+        <p:blipFill>
+          <a:blip r:embed="rId2"/>
+          <a:stretch>
+            <a:fillRect/>
+          </a:stretch>
+        </p:blipFill>
+        <p:spPr>
+          <a:xfrm>
+            <a:off x="548640" y="1143000"/>
+            <a:ext cx="8128000" cy="4572000"/>
+          </a:xfrm>
+          <a:prstGeom prst="rect">
+            <a:avLst/>
+          </a:prstGeom>
+        </p:spPr>
+      </p:pic>
+      <p:sp>
+        <p:nvSpPr>
+          <p:cNvPr id="4" name="TextBox 3"/>
           <p:cNvSpPr txBox="1"/>
           <p:nvPr/>
         </p:nvSpPr>
         <p:spPr>
           <a:xfrm>
-            <a:off x="548640" y="1234440"/>
-            <a:ext cx="11064240" cy="4937760"/>
+            <a:off x="548640" y="5897880"/>
+            <a:ext cx="11064240" cy="411480"/>
           </a:xfrm>
           <a:prstGeom prst="rect">
             <a:avLst/>
@@ -7587,10 +10108,7 @@
               <a:lnSpc>
                 <a:spcPts val="2200"/>
               </a:lnSpc>
-              <a:spcAft>
-                <a:spcPts val="1000"/>
-              </a:spcAft>
-              <a:defRPr sz="2000" b="0">
+              <a:defRPr sz="1200" b="0">
                 <a:solidFill>
                   <a:srgbClr val="333333"/>
                 </a:solidFill>
@@ -7598,14 +10116,14 @@
               </a:defRPr>
             </a:pPr>
             <a:r>
-              <a:t>• See docs/MODULE8.md</a:t>
-            </a:r>
-          </a:p>
-        </p:txBody>
-      </p:sp>
-      <p:sp>
-        <p:nvSpPr>
-          <p:cNvPr id="4" name="TextBox 3"/>
+              <a:t>Module 8: DUT structure and key interfaces (see common_dut/rtl/).</a:t>
+            </a:r>
+          </a:p>
+        </p:txBody>
+      </p:sp>
+      <p:sp>
+        <p:nvSpPr>
+          <p:cNvPr id="5" name="TextBox 4"/>
           <p:cNvSpPr txBox="1"/>
           <p:nvPr/>
         </p:nvSpPr>
@@ -7668,8 +10186,8 @@
         </p:nvSpPr>
         <p:spPr>
           <a:xfrm>
-            <a:off x="548640" y="2743200"/>
-            <a:ext cx="11064240" cy="1371600"/>
+            <a:off x="548640" y="411480"/>
+            <a:ext cx="11064240" cy="777240"/>
           </a:xfrm>
           <a:prstGeom prst="rect">
             <a:avLst/>
@@ -7682,11 +10200,11 @@
           </a:bodyPr>
           <a:lstStyle/>
           <a:p>
-            <a:pPr algn="ctr">
-              <a:lnSpc>
-                <a:spcPts val="2200"/>
-              </a:lnSpc>
-              <a:defRPr sz="3600" b="1">
+            <a:pPr>
+              <a:lnSpc>
+                <a:spcPts val="2200"/>
+              </a:lnSpc>
+              <a:defRPr sz="2800" b="1">
                 <a:solidFill>
                   <a:srgbClr val="1A1A2E"/>
                 </a:solidFill>
@@ -7694,14 +10212,77 @@
               </a:defRPr>
             </a:pPr>
             <a:r>
-              <a:t>Hands-on examples</a:t>
-            </a:r>
-          </a:p>
-        </p:txBody>
-      </p:sp>
-      <p:sp>
-        <p:nvSpPr>
-          <p:cNvPr id="3" name="TextBox 2"/>
+              <a:t>Verification environment architecture</a:t>
+            </a:r>
+          </a:p>
+        </p:txBody>
+      </p:sp>
+      <p:pic>
+        <p:nvPicPr>
+          <p:cNvPr id="3" name="Picture 2" descr="verification_architecture.png"/>
+          <p:cNvPicPr>
+            <a:picLocks noChangeAspect="1"/>
+          </p:cNvPicPr>
+          <p:nvPr/>
+        </p:nvPicPr>
+        <p:blipFill>
+          <a:blip r:embed="rId2"/>
+          <a:stretch>
+            <a:fillRect/>
+          </a:stretch>
+        </p:blipFill>
+        <p:spPr>
+          <a:xfrm>
+            <a:off x="548640" y="1143000"/>
+            <a:ext cx="8128000" cy="4572000"/>
+          </a:xfrm>
+          <a:prstGeom prst="rect">
+            <a:avLst/>
+          </a:prstGeom>
+        </p:spPr>
+      </p:pic>
+      <p:sp>
+        <p:nvSpPr>
+          <p:cNvPr id="4" name="TextBox 3"/>
+          <p:cNvSpPr txBox="1"/>
+          <p:nvPr/>
+        </p:nvSpPr>
+        <p:spPr>
+          <a:xfrm>
+            <a:off x="548640" y="5897880"/>
+            <a:ext cx="11064240" cy="411480"/>
+          </a:xfrm>
+          <a:prstGeom prst="rect">
+            <a:avLst/>
+          </a:prstGeom>
+          <a:noFill/>
+        </p:spPr>
+        <p:txBody>
+          <a:bodyPr wrap="square">
+            <a:noAutofit/>
+          </a:bodyPr>
+          <a:lstStyle/>
+          <a:p>
+            <a:pPr>
+              <a:lnSpc>
+                <a:spcPts val="2200"/>
+              </a:lnSpc>
+              <a:defRPr sz="1200" b="0">
+                <a:solidFill>
+                  <a:srgbClr val="333333"/>
+                </a:solidFill>
+                <a:latin typeface="Calibri"/>
+              </a:defRPr>
+            </a:pPr>
+            <a:r>
+              <a:t>Module 8: UVM layers, agents, and checkers for this phase.</a:t>
+            </a:r>
+          </a:p>
+        </p:txBody>
+      </p:sp>
+      <p:sp>
+        <p:nvSpPr>
+          <p:cNvPr id="5" name="TextBox 4"/>
           <p:cNvSpPr txBox="1"/>
           <p:nvPr/>
         </p:nvSpPr>
@@ -7790,7 +10371,7 @@
               </a:defRPr>
             </a:pPr>
             <a:r>
-              <a:t>Module 8 toolchain check</a:t>
+              <a:t>1. Course knowledge architecture (not a new DUT)</a:t>
             </a:r>
           </a:p>
         </p:txBody>
@@ -7803,15 +10384,13 @@
         </p:nvSpPr>
         <p:spPr>
           <a:xfrm>
-            <a:off x="548640" y="1051560"/>
-            <a:ext cx="11064240" cy="914400"/>
-          </a:xfrm>
-          <a:prstGeom prst="rect">
-            <a:avLst/>
-          </a:prstGeom>
-          <a:solidFill>
-            <a:srgbClr val="F4F4F4"/>
-          </a:solidFill>
+            <a:off x="548640" y="1234440"/>
+            <a:ext cx="11064240" cy="4937760"/>
+          </a:xfrm>
+          <a:prstGeom prst="rect">
+            <a:avLst/>
+          </a:prstGeom>
+          <a:noFill/>
         </p:spPr>
         <p:txBody>
           <a:bodyPr wrap="square">
@@ -7824,17 +10403,17 @@
                 <a:spcPts val="2200"/>
               </a:lnSpc>
               <a:spcAft>
-                <a:spcPts val="200"/>
+                <a:spcPts val="1000"/>
               </a:spcAft>
               <a:defRPr sz="2000" b="0">
                 <a:solidFill>
                   <a:srgbClr val="333333"/>
                 </a:solidFill>
-                <a:latin typeface="Consolas"/>
-              </a:defRPr>
-            </a:pPr>
-            <a:r>
-              <a:t>$ command -v iverilog &gt;/dev/null &amp;&amp; echo "Toolchain ready: $(iverilog</a:t>
+                <a:latin typeface="Calibri"/>
+              </a:defRPr>
+            </a:pPr>
+            <a:r>
+              <a:t>• Module 8 is a meta-layer: maps Modules 1–7 to</a:t>
             </a:r>
           </a:p>
           <a:p>
@@ -7843,48 +10422,138 @@
                 <a:spcPts val="2200"/>
               </a:lnSpc>
               <a:spcAft>
-                <a:spcPts val="200"/>
+                <a:spcPts val="1000"/>
               </a:spcAft>
               <a:defRPr sz="2000" b="0">
                 <a:solidFill>
                   <a:srgbClr val="333333"/>
                 </a:solidFill>
-                <a:latin typeface="Consolas"/>
-              </a:defRPr>
-            </a:pPr>
-            <a:r>
-              <a:t>      -V 2&gt;&amp;1 | head -1)"</a:t>
-            </a:r>
-          </a:p>
-        </p:txBody>
-      </p:sp>
-      <p:pic>
-        <p:nvPicPr>
-          <p:cNvPr id="4" name="Picture 3" descr="module8_check.png"/>
-          <p:cNvPicPr>
-            <a:picLocks noChangeAspect="1"/>
-          </p:cNvPicPr>
-          <p:nvPr/>
-        </p:nvPicPr>
-        <p:blipFill>
-          <a:blip r:embed="rId2"/>
-          <a:stretch>
-            <a:fillRect/>
-          </a:stretch>
-        </p:blipFill>
-        <p:spPr>
-          <a:xfrm>
-            <a:off x="548640" y="1965960"/>
-            <a:ext cx="7071358" cy="3977639"/>
-          </a:xfrm>
-          <a:prstGeom prst="rect">
-            <a:avLst/>
-          </a:prstGeom>
-        </p:spPr>
-      </p:pic>
-      <p:sp>
-        <p:nvSpPr>
-          <p:cNvPr id="5" name="TextBox 4"/>
+                <a:latin typeface="Calibri"/>
+              </a:defRPr>
+            </a:pPr>
+            <a:r>
+              <a:t>      standards, constructs, and learning path</a:t>
+            </a:r>
+          </a:p>
+          <a:p>
+            <a:pPr>
+              <a:lnSpc>
+                <a:spcPts val="2200"/>
+              </a:lnSpc>
+              <a:spcAft>
+                <a:spcPts val="1000"/>
+              </a:spcAft>
+              <a:defRPr sz="2000" b="0">
+                <a:solidFill>
+                  <a:srgbClr val="333333"/>
+                </a:solidFill>
+                <a:latin typeface="Calibri"/>
+              </a:defRPr>
+            </a:pPr>
+            <a:r>
+              <a:t>• No new RTL — architecture here is how reference</a:t>
+            </a:r>
+          </a:p>
+          <a:p>
+            <a:pPr>
+              <a:lnSpc>
+                <a:spcPts val="2200"/>
+              </a:lnSpc>
+              <a:spcAft>
+                <a:spcPts val="1000"/>
+              </a:spcAft>
+              <a:defRPr sz="2000" b="0">
+                <a:solidFill>
+                  <a:srgbClr val="333333"/>
+                </a:solidFill>
+                <a:latin typeface="Calibri"/>
+              </a:defRPr>
+            </a:pPr>
+            <a:r>
+              <a:t>      material is organized, not a chip block</a:t>
+            </a:r>
+          </a:p>
+          <a:p>
+            <a:pPr>
+              <a:lnSpc>
+                <a:spcPts val="2200"/>
+              </a:lnSpc>
+              <a:spcAft>
+                <a:spcPts val="1000"/>
+              </a:spcAft>
+              <a:defRPr sz="2000" b="0">
+                <a:solidFill>
+                  <a:srgbClr val="333333"/>
+                </a:solidFill>
+                <a:latin typeface="Calibri"/>
+              </a:defRPr>
+            </a:pPr>
+            <a:r>
+              <a:t>• Sections: version timeline → construct-by-standard →</a:t>
+            </a:r>
+          </a:p>
+          <a:p>
+            <a:pPr>
+              <a:lnSpc>
+                <a:spcPts val="2200"/>
+              </a:lnSpc>
+              <a:spcAft>
+                <a:spcPts val="1000"/>
+              </a:spcAft>
+              <a:defRPr sz="2000" b="0">
+                <a:solidFill>
+                  <a:srgbClr val="333333"/>
+                </a:solidFill>
+                <a:latin typeface="Calibri"/>
+              </a:defRPr>
+            </a:pPr>
+            <a:r>
+              <a:t>      design subset → migration → tool support</a:t>
+            </a:r>
+          </a:p>
+          <a:p>
+            <a:pPr>
+              <a:lnSpc>
+                <a:spcPts val="2200"/>
+              </a:lnSpc>
+              <a:spcAft>
+                <a:spcPts val="1000"/>
+              </a:spcAft>
+              <a:defRPr sz="2000" b="0">
+                <a:solidFill>
+                  <a:srgbClr val="333333"/>
+                </a:solidFill>
+                <a:latin typeface="Calibri"/>
+              </a:defRPr>
+            </a:pPr>
+            <a:r>
+              <a:t>• Runnable examples (`module8/examples/`): each prints</a:t>
+            </a:r>
+          </a:p>
+          <a:p>
+            <a:pPr>
+              <a:lnSpc>
+                <a:spcPts val="2200"/>
+              </a:lnSpc>
+              <a:spcAft>
+                <a:spcPts val="1000"/>
+              </a:spcAft>
+              <a:defRPr sz="2000" b="0">
+                <a:solidFill>
+                  <a:srgbClr val="333333"/>
+                </a:solidFill>
+                <a:latin typeface="Calibri"/>
+              </a:defRPr>
+            </a:pPr>
+            <a:r>
+              <a:t>      one slice of the quick reference for terminal…</a:t>
+            </a:r>
+          </a:p>
+        </p:txBody>
+      </p:sp>
+      <p:sp>
+        <p:nvSpPr>
+          <p:cNvPr id="4" name="TextBox 3"/>
           <p:cNvSpPr txBox="1"/>
           <p:nvPr/>
         </p:nvSpPr>

--- a/media/module8/slides.pptx
+++ b/media/module8/slides.pptx
@@ -12,8 +12,8 @@
     <p:sldId id="260" r:id="rId11"/>
     <p:sldId id="261" r:id="rId12"/>
     <p:sldId id="262" r:id="rId13"/>
-    <p:sldId id="263" r:id="rId14"/>
-    <p:sldId id="264" r:id="rId15"/>
+    <p:sldId id="263" r:id="rId15"/>
+    <p:sldId id="264" r:id="rId16"/>
     <p:sldId id="265" r:id="rId17"/>
     <p:sldId id="266" r:id="rId18"/>
     <p:sldId id="267" r:id="rId19"/>
@@ -39,6 +39,13 @@
     <p:sldId id="287" r:id="rId39"/>
     <p:sldId id="288" r:id="rId40"/>
     <p:sldId id="289" r:id="rId41"/>
+    <p:sldId id="290" r:id="rId42"/>
+    <p:sldId id="291" r:id="rId43"/>
+    <p:sldId id="292" r:id="rId44"/>
+    <p:sldId id="293" r:id="rId45"/>
+    <p:sldId id="294" r:id="rId46"/>
+    <p:sldId id="295" r:id="rId47"/>
+    <p:sldId id="296" r:id="rId48"/>
   </p:sldIdLst>
   <p:sldSz cx="12191695" cy="6858000" type="screen4x3"/>
   <p:notesSz cx="6858000" cy="9144000"/>
@@ -535,7 +542,7 @@
           <a:lstStyle/>
           <a:p>
             <a:r>
-              <a:t>From MODULE8 Design Architecture.</a:t>
+              <a:t>From docs/MODULE8.md — read guides before running demos.</a:t>
             </a:r>
           </a:p>
         </p:txBody>
@@ -605,7 +612,7 @@
           <a:lstStyle/>
           <a:p>
             <a:r>
-              <a:t>Hands-on: module8/examples/course_map/</a:t>
+              <a:t>From MODULE8 Topics Covered.</a:t>
             </a:r>
           </a:p>
         </p:txBody>
@@ -675,7 +682,7 @@
           <a:lstStyle/>
           <a:p>
             <a:r>
-              <a:t>Hands-on: module8/examples/design_subset/</a:t>
+              <a:t>Requires iverilog on PATH (apt install iverilog).</a:t>
             </a:r>
           </a:p>
         </p:txBody>
@@ -745,7 +752,7 @@
           <a:lstStyle/>
           <a:p>
             <a:r>
-              <a:t>Hands-on: module8/examples/learning_path/</a:t>
+              <a:t>Hands-on: module8/examples/quick_ref/</a:t>
             </a:r>
           </a:p>
         </p:txBody>
@@ -815,7 +822,7 @@
           <a:lstStyle/>
           <a:p>
             <a:r>
-              <a:t>Hands-on: module8/examples/migration_steps/</a:t>
+              <a:t>Hands-on: module8/examples/version_timeline/</a:t>
             </a:r>
           </a:p>
         </p:txBody>
@@ -885,7 +892,7 @@
           <a:lstStyle/>
           <a:p>
             <a:r>
-              <a:t>Hands-on: module8/examples/pitfalls/</a:t>
+              <a:t>Hands-on: module8/examples/design_subset/</a:t>
             </a:r>
           </a:p>
         </p:txBody>
@@ -955,7 +962,7 @@
           <a:lstStyle/>
           <a:p>
             <a:r>
-              <a:t>Hands-on: module8/examples/synthesizable_subset/</a:t>
+              <a:t>Hands-on: module8/examples/tool_support/</a:t>
             </a:r>
           </a:p>
         </p:txBody>
@@ -1025,7 +1032,7 @@
           <a:lstStyle/>
           <a:p>
             <a:r>
-              <a:t>Hands-on: module8/examples/tool_support/</a:t>
+              <a:t>Hands-on: module8/examples/construct_lookup/</a:t>
             </a:r>
           </a:p>
         </p:txBody>
@@ -1095,7 +1102,7 @@
           <a:lstStyle/>
           <a:p>
             <a:r>
-              <a:t>Hands-on: module8/examples/version_selection/</a:t>
+              <a:t>Hands-on: module8/examples/course_map/</a:t>
             </a:r>
           </a:p>
         </p:txBody>
@@ -1165,7 +1172,77 @@
           <a:lstStyle/>
           <a:p>
             <a:r>
-              <a:t>Hands-on: module8/examples/version_timeline/</a:t>
+              <a:t>Hands-on: module8/examples/migration_steps/</a:t>
+            </a:r>
+          </a:p>
+        </p:txBody>
+      </p:sp>
+      <p:sp>
+        <p:nvSpPr>
+          <p:cNvPr id="4" name="Slide Number Placeholder 3"/>
+          <p:cNvSpPr>
+            <a:spLocks noGrp="1"/>
+          </p:cNvSpPr>
+          <p:nvPr>
+            <p:ph type="sldNum" idx="5" sz="quarter"/>
+          </p:nvPr>
+        </p:nvSpPr>
+        <p:spPr/>
+      </p:sp>
+    </p:spTree>
+  </p:cSld>
+  <p:clrMapOvr>
+    <a:masterClrMapping/>
+  </p:clrMapOvr>
+</p:notes>
+</file>
+
+<file path=ppt/notesSlides/notesSlide19.xml><?xml version="1.0" encoding="utf-8"?>
+<p:notes xmlns:a="http://schemas.openxmlformats.org/drawingml/2006/main" xmlns:p="http://schemas.openxmlformats.org/presentationml/2006/main" xmlns:r="http://schemas.openxmlformats.org/officeDocument/2006/relationships">
+  <p:cSld>
+    <p:spTree>
+      <p:nvGrpSpPr>
+        <p:cNvPr id="1" name=""/>
+        <p:cNvGrpSpPr/>
+        <p:nvPr/>
+      </p:nvGrpSpPr>
+      <p:grpSpPr>
+        <a:xfrm>
+          <a:off x="0" y="0"/>
+          <a:ext cx="0" cy="0"/>
+          <a:chOff x="0" y="0"/>
+          <a:chExt cx="0" cy="0"/>
+        </a:xfrm>
+      </p:grpSpPr>
+      <p:sp>
+        <p:nvSpPr>
+          <p:cNvPr id="2" name="Slide Image Placeholder 1"/>
+          <p:cNvSpPr>
+            <a:spLocks noGrp="1"/>
+          </p:cNvSpPr>
+          <p:nvPr>
+            <p:ph type="sldImg" idx="2"/>
+          </p:nvPr>
+        </p:nvSpPr>
+        <p:spPr/>
+      </p:sp>
+      <p:sp>
+        <p:nvSpPr>
+          <p:cNvPr id="3" name="Notes Placeholder 2"/>
+          <p:cNvSpPr>
+            <a:spLocks noGrp="1"/>
+          </p:cNvSpPr>
+          <p:nvPr>
+            <p:ph type="body" idx="3" sz="quarter"/>
+          </p:nvPr>
+        </p:nvSpPr>
+        <p:spPr/>
+        <p:txBody>
+          <a:bodyPr/>
+          <a:lstStyle/>
+          <a:p>
+            <a:r>
+              <a:t>Hands-on: module8/examples/synthesizable_subset/</a:t>
             </a:r>
           </a:p>
         </p:txBody>
@@ -1235,7 +1312,287 @@
           <a:lstStyle/>
           <a:p>
             <a:r>
-              <a:t>From MODULE8 Design Architecture.</a:t>
+              <a:t>From docs/MODULE8.md — read guides before running demos.</a:t>
+            </a:r>
+          </a:p>
+        </p:txBody>
+      </p:sp>
+      <p:sp>
+        <p:nvSpPr>
+          <p:cNvPr id="4" name="Slide Number Placeholder 3"/>
+          <p:cNvSpPr>
+            <a:spLocks noGrp="1"/>
+          </p:cNvSpPr>
+          <p:nvPr>
+            <p:ph type="sldNum" idx="5" sz="quarter"/>
+          </p:nvPr>
+        </p:nvSpPr>
+        <p:spPr/>
+      </p:sp>
+    </p:spTree>
+  </p:cSld>
+  <p:clrMapOvr>
+    <a:masterClrMapping/>
+  </p:clrMapOvr>
+</p:notes>
+</file>
+
+<file path=ppt/notesSlides/notesSlide20.xml><?xml version="1.0" encoding="utf-8"?>
+<p:notes xmlns:a="http://schemas.openxmlformats.org/drawingml/2006/main" xmlns:p="http://schemas.openxmlformats.org/presentationml/2006/main" xmlns:r="http://schemas.openxmlformats.org/officeDocument/2006/relationships">
+  <p:cSld>
+    <p:spTree>
+      <p:nvGrpSpPr>
+        <p:cNvPr id="1" name=""/>
+        <p:cNvGrpSpPr/>
+        <p:nvPr/>
+      </p:nvGrpSpPr>
+      <p:grpSpPr>
+        <a:xfrm>
+          <a:off x="0" y="0"/>
+          <a:ext cx="0" cy="0"/>
+          <a:chOff x="0" y="0"/>
+          <a:chExt cx="0" cy="0"/>
+        </a:xfrm>
+      </p:grpSpPr>
+      <p:sp>
+        <p:nvSpPr>
+          <p:cNvPr id="2" name="Slide Image Placeholder 1"/>
+          <p:cNvSpPr>
+            <a:spLocks noGrp="1"/>
+          </p:cNvSpPr>
+          <p:nvPr>
+            <p:ph type="sldImg" idx="2"/>
+          </p:nvPr>
+        </p:nvSpPr>
+        <p:spPr/>
+      </p:sp>
+      <p:sp>
+        <p:nvSpPr>
+          <p:cNvPr id="3" name="Notes Placeholder 2"/>
+          <p:cNvSpPr>
+            <a:spLocks noGrp="1"/>
+          </p:cNvSpPr>
+          <p:nvPr>
+            <p:ph type="body" idx="3" sz="quarter"/>
+          </p:nvPr>
+        </p:nvSpPr>
+        <p:spPr/>
+        <p:txBody>
+          <a:bodyPr/>
+          <a:lstStyle/>
+          <a:p>
+            <a:r>
+              <a:t>Hands-on: module8/examples/version_selection/</a:t>
+            </a:r>
+          </a:p>
+        </p:txBody>
+      </p:sp>
+      <p:sp>
+        <p:nvSpPr>
+          <p:cNvPr id="4" name="Slide Number Placeholder 3"/>
+          <p:cNvSpPr>
+            <a:spLocks noGrp="1"/>
+          </p:cNvSpPr>
+          <p:nvPr>
+            <p:ph type="sldNum" idx="5" sz="quarter"/>
+          </p:nvPr>
+        </p:nvSpPr>
+        <p:spPr/>
+      </p:sp>
+    </p:spTree>
+  </p:cSld>
+  <p:clrMapOvr>
+    <a:masterClrMapping/>
+  </p:clrMapOvr>
+</p:notes>
+</file>
+
+<file path=ppt/notesSlides/notesSlide21.xml><?xml version="1.0" encoding="utf-8"?>
+<p:notes xmlns:a="http://schemas.openxmlformats.org/drawingml/2006/main" xmlns:p="http://schemas.openxmlformats.org/presentationml/2006/main" xmlns:r="http://schemas.openxmlformats.org/officeDocument/2006/relationships">
+  <p:cSld>
+    <p:spTree>
+      <p:nvGrpSpPr>
+        <p:cNvPr id="1" name=""/>
+        <p:cNvGrpSpPr/>
+        <p:nvPr/>
+      </p:nvGrpSpPr>
+      <p:grpSpPr>
+        <a:xfrm>
+          <a:off x="0" y="0"/>
+          <a:ext cx="0" cy="0"/>
+          <a:chOff x="0" y="0"/>
+          <a:chExt cx="0" cy="0"/>
+        </a:xfrm>
+      </p:grpSpPr>
+      <p:sp>
+        <p:nvSpPr>
+          <p:cNvPr id="2" name="Slide Image Placeholder 1"/>
+          <p:cNvSpPr>
+            <a:spLocks noGrp="1"/>
+          </p:cNvSpPr>
+          <p:nvPr>
+            <p:ph type="sldImg" idx="2"/>
+          </p:nvPr>
+        </p:nvSpPr>
+        <p:spPr/>
+      </p:sp>
+      <p:sp>
+        <p:nvSpPr>
+          <p:cNvPr id="3" name="Notes Placeholder 2"/>
+          <p:cNvSpPr>
+            <a:spLocks noGrp="1"/>
+          </p:cNvSpPr>
+          <p:nvPr>
+            <p:ph type="body" idx="3" sz="quarter"/>
+          </p:nvPr>
+        </p:nvSpPr>
+        <p:spPr/>
+        <p:txBody>
+          <a:bodyPr/>
+          <a:lstStyle/>
+          <a:p>
+            <a:r>
+              <a:t>Hands-on: module8/examples/learning_path/</a:t>
+            </a:r>
+          </a:p>
+        </p:txBody>
+      </p:sp>
+      <p:sp>
+        <p:nvSpPr>
+          <p:cNvPr id="4" name="Slide Number Placeholder 3"/>
+          <p:cNvSpPr>
+            <a:spLocks noGrp="1"/>
+          </p:cNvSpPr>
+          <p:nvPr>
+            <p:ph type="sldNum" idx="5" sz="quarter"/>
+          </p:nvPr>
+        </p:nvSpPr>
+        <p:spPr/>
+      </p:sp>
+    </p:spTree>
+  </p:cSld>
+  <p:clrMapOvr>
+    <a:masterClrMapping/>
+  </p:clrMapOvr>
+</p:notes>
+</file>
+
+<file path=ppt/notesSlides/notesSlide22.xml><?xml version="1.0" encoding="utf-8"?>
+<p:notes xmlns:a="http://schemas.openxmlformats.org/drawingml/2006/main" xmlns:p="http://schemas.openxmlformats.org/presentationml/2006/main" xmlns:r="http://schemas.openxmlformats.org/officeDocument/2006/relationships">
+  <p:cSld>
+    <p:spTree>
+      <p:nvGrpSpPr>
+        <p:cNvPr id="1" name=""/>
+        <p:cNvGrpSpPr/>
+        <p:nvPr/>
+      </p:nvGrpSpPr>
+      <p:grpSpPr>
+        <a:xfrm>
+          <a:off x="0" y="0"/>
+          <a:ext cx="0" cy="0"/>
+          <a:chOff x="0" y="0"/>
+          <a:chExt cx="0" cy="0"/>
+        </a:xfrm>
+      </p:grpSpPr>
+      <p:sp>
+        <p:nvSpPr>
+          <p:cNvPr id="2" name="Slide Image Placeholder 1"/>
+          <p:cNvSpPr>
+            <a:spLocks noGrp="1"/>
+          </p:cNvSpPr>
+          <p:nvPr>
+            <p:ph type="sldImg" idx="2"/>
+          </p:nvPr>
+        </p:nvSpPr>
+        <p:spPr/>
+      </p:sp>
+      <p:sp>
+        <p:nvSpPr>
+          <p:cNvPr id="3" name="Notes Placeholder 2"/>
+          <p:cNvSpPr>
+            <a:spLocks noGrp="1"/>
+          </p:cNvSpPr>
+          <p:nvPr>
+            <p:ph type="body" idx="3" sz="quarter"/>
+          </p:nvPr>
+        </p:nvSpPr>
+        <p:spPr/>
+        <p:txBody>
+          <a:bodyPr/>
+          <a:lstStyle/>
+          <a:p>
+            <a:r>
+              <a:t>Hands-on: module8/examples/pitfalls/</a:t>
+            </a:r>
+          </a:p>
+        </p:txBody>
+      </p:sp>
+      <p:sp>
+        <p:nvSpPr>
+          <p:cNvPr id="4" name="Slide Number Placeholder 3"/>
+          <p:cNvSpPr>
+            <a:spLocks noGrp="1"/>
+          </p:cNvSpPr>
+          <p:nvPr>
+            <p:ph type="sldNum" idx="5" sz="quarter"/>
+          </p:nvPr>
+        </p:nvSpPr>
+        <p:spPr/>
+      </p:sp>
+    </p:spTree>
+  </p:cSld>
+  <p:clrMapOvr>
+    <a:masterClrMapping/>
+  </p:clrMapOvr>
+</p:notes>
+</file>
+
+<file path=ppt/notesSlides/notesSlide23.xml><?xml version="1.0" encoding="utf-8"?>
+<p:notes xmlns:a="http://schemas.openxmlformats.org/drawingml/2006/main" xmlns:p="http://schemas.openxmlformats.org/presentationml/2006/main" xmlns:r="http://schemas.openxmlformats.org/officeDocument/2006/relationships">
+  <p:cSld>
+    <p:spTree>
+      <p:nvGrpSpPr>
+        <p:cNvPr id="1" name=""/>
+        <p:cNvGrpSpPr/>
+        <p:nvPr/>
+      </p:nvGrpSpPr>
+      <p:grpSpPr>
+        <a:xfrm>
+          <a:off x="0" y="0"/>
+          <a:ext cx="0" cy="0"/>
+          <a:chOff x="0" y="0"/>
+          <a:chExt cx="0" cy="0"/>
+        </a:xfrm>
+      </p:grpSpPr>
+      <p:sp>
+        <p:nvSpPr>
+          <p:cNvPr id="2" name="Slide Image Placeholder 1"/>
+          <p:cNvSpPr>
+            <a:spLocks noGrp="1"/>
+          </p:cNvSpPr>
+          <p:nvPr>
+            <p:ph type="sldImg" idx="2"/>
+          </p:nvPr>
+        </p:nvSpPr>
+        <p:spPr/>
+      </p:sp>
+      <p:sp>
+        <p:nvSpPr>
+          <p:cNvPr id="3" name="Notes Placeholder 2"/>
+          <p:cNvSpPr>
+            <a:spLocks noGrp="1"/>
+          </p:cNvSpPr>
+          <p:nvPr>
+            <p:ph type="body" idx="3" sz="quarter"/>
+          </p:nvPr>
+        </p:nvSpPr>
+        <p:spPr/>
+        <p:txBody>
+          <a:bodyPr/>
+          <a:lstStyle/>
+          <a:p>
+            <a:r>
+              <a:t>From MODULE8 Learning Outcomes.</a:t>
             </a:r>
           </a:p>
         </p:txBody>
@@ -1375,7 +1732,7 @@
           <a:lstStyle/>
           <a:p>
             <a:r>
-              <a:t>From MODULE8 Verification &amp; Testing Methods.</a:t>
+              <a:t>From MODULE8 Design Architecture.</a:t>
             </a:r>
           </a:p>
         </p:txBody>
@@ -1445,7 +1802,7 @@
           <a:lstStyle/>
           <a:p>
             <a:r>
-              <a:t>From MODULE8 Verification &amp; Testing Methods.</a:t>
+              <a:t>From MODULE8 Design Architecture.</a:t>
             </a:r>
           </a:p>
         </p:txBody>
@@ -1515,7 +1872,7 @@
           <a:lstStyle/>
           <a:p>
             <a:r>
-              <a:t>From MODULE8 Verification &amp; Testing Methods.</a:t>
+              <a:t>From MODULE8 — execution and artifact layout.</a:t>
             </a:r>
           </a:p>
         </p:txBody>
@@ -1585,7 +1942,7 @@
           <a:lstStyle/>
           <a:p>
             <a:r>
-              <a:t>From MODULE8 Topics Covered.</a:t>
+              <a:t>Trace while running module8/EXAMPLES.md labs.</a:t>
             </a:r>
           </a:p>
         </p:txBody>
@@ -1655,7 +2012,7 @@
           <a:lstStyle/>
           <a:p>
             <a:r>
-              <a:t>Run from course repository root.</a:t>
+              <a:t>From MODULE8 Verification &amp; Testing Methods.</a:t>
             </a:r>
           </a:p>
         </p:txBody>
@@ -1725,7 +2082,7 @@
           <a:lstStyle/>
           <a:p>
             <a:r>
-              <a:t>Hands-on: module8/examples/construct_lookup/</a:t>
+              <a:t>From MODULE8 Verification &amp; Testing Methods.</a:t>
             </a:r>
           </a:p>
         </p:txBody>
@@ -4883,7 +5240,7 @@
               </a:defRPr>
             </a:pPr>
             <a:r>
-              <a:t>2. How design subsets relate across the course</a:t>
+              <a:t>1. Reference module layout (module8/)</a:t>
             </a:r>
           </a:p>
         </p:txBody>
@@ -4897,7 +5254,7 @@
         <p:spPr>
           <a:xfrm>
             <a:off x="548640" y="1234440"/>
-            <a:ext cx="11064240" cy="4937760"/>
+            <a:ext cx="5303520" cy="4754880"/>
           </a:xfrm>
           <a:prstGeom prst="rect">
             <a:avLst/>
@@ -4925,7 +5282,7 @@
               </a:defRPr>
             </a:pPr>
             <a:r>
-              <a:t>• Verilog-only path: Modules 1–3 (1364-1995 → 2001 →</a:t>
+              <a:t>• No new language — consolidates</a:t>
             </a:r>
           </a:p>
           <a:p>
@@ -4944,7 +5301,7 @@
               </a:defRPr>
             </a:pPr>
             <a:r>
-              <a:t>      2005) — `wire`/`reg`, `always @*`</a:t>
+              <a:t>      Modules 1–7 into quick-reference</a:t>
             </a:r>
           </a:p>
           <a:p>
@@ -4963,7 +5320,7 @@
               </a:defRPr>
             </a:pPr>
             <a:r>
-              <a:t>• SystemVerilog design path: Modules 4–6 — `logic`,</a:t>
+              <a:t>      tables</a:t>
             </a:r>
           </a:p>
           <a:p>
@@ -4982,7 +5339,7 @@
               </a:defRPr>
             </a:pPr>
             <a:r>
-              <a:t>      `always_comb`/`always_ff`, interfaces, packages</a:t>
+              <a:t>• examples/ print version</a:t>
             </a:r>
           </a:p>
           <a:p>
@@ -5001,7 +5358,7 @@
               </a:defRPr>
             </a:pPr>
             <a:r>
-              <a:t>• Integration path: Module 7 side-by-side pairs;</a:t>
+              <a:t>      timelines, migration reminders,</a:t>
             </a:r>
           </a:p>
           <a:p>
@@ -5020,7 +5377,7 @@
               </a:defRPr>
             </a:pPr>
             <a:r>
-              <a:t>      Module 8 tables tie constructs to modules</a:t>
+              <a:t>      tool notes</a:t>
             </a:r>
           </a:p>
           <a:p>
@@ -5039,7 +5396,7 @@
               </a:defRPr>
             </a:pPr>
             <a:r>
-              <a:t>• Choosing a subset: project README should state</a:t>
+              <a:t>• Use after completing the course</a:t>
             </a:r>
           </a:p>
           <a:p>
@@ -5058,7 +5415,7 @@
               </a:defRPr>
             </a:pPr>
             <a:r>
-              <a:t>      revision + allowed construct list from Module 8</a:t>
+              <a:t>      or as a lookup during real</a:t>
             </a:r>
           </a:p>
           <a:p>
@@ -5077,14 +5434,95 @@
               </a:defRPr>
             </a:pPr>
             <a:r>
-              <a:t>      tabl…</a:t>
-            </a:r>
-          </a:p>
-        </p:txBody>
-      </p:sp>
-      <p:sp>
-        <p:nvSpPr>
-          <p:cNvPr id="4" name="TextBox 3"/>
+              <a:t>      projects</a:t>
+            </a:r>
+          </a:p>
+          <a:p>
+            <a:pPr>
+              <a:lnSpc>
+                <a:spcPts val="2200"/>
+              </a:lnSpc>
+              <a:spcAft>
+                <a:spcPts val="1000"/>
+              </a:spcAft>
+              <a:defRPr sz="2000" b="0">
+                <a:solidFill>
+                  <a:srgbClr val="333333"/>
+                </a:solidFill>
+                <a:latin typeface="Calibri"/>
+              </a:defRPr>
+            </a:pPr>
+            <a:r>
+              <a:t>• scripts/module8.sh — runs</a:t>
+            </a:r>
+          </a:p>
+          <a:p>
+            <a:pPr>
+              <a:lnSpc>
+                <a:spcPts val="2200"/>
+              </a:lnSpc>
+              <a:spcAft>
+                <a:spcPts val="1000"/>
+              </a:spcAft>
+              <a:defRPr sz="2000" b="0">
+                <a:solidFill>
+                  <a:srgbClr val="333333"/>
+                </a:solidFill>
+                <a:latin typeface="Calibri"/>
+              </a:defRPr>
+            </a:pPr>
+            <a:r>
+              <a:t>      reference printouts, not new RTL</a:t>
+            </a:r>
+          </a:p>
+          <a:p>
+            <a:pPr>
+              <a:lnSpc>
+                <a:spcPts val="2200"/>
+              </a:lnSpc>
+              <a:spcAft>
+                <a:spcPts val="1000"/>
+              </a:spcAft>
+              <a:defRPr sz="2000" b="0">
+                <a:solidFill>
+                  <a:srgbClr val="333333"/>
+                </a:solidFill>
+                <a:latin typeface="Calibri"/>
+              </a:defRPr>
+            </a:pPr>
+            <a:r>
+              <a:t>      lessons</a:t>
+            </a:r>
+          </a:p>
+        </p:txBody>
+      </p:sp>
+      <p:pic>
+        <p:nvPicPr>
+          <p:cNvPr id="4" name="Picture 3" descr="rtl_architecture.png"/>
+          <p:cNvPicPr>
+            <a:picLocks noChangeAspect="1"/>
+          </p:cNvPicPr>
+          <p:nvPr/>
+        </p:nvPicPr>
+        <p:blipFill>
+          <a:blip r:embed="rId2"/>
+          <a:stretch>
+            <a:fillRect/>
+          </a:stretch>
+        </p:blipFill>
+        <p:spPr>
+          <a:xfrm>
+            <a:off x="6172200" y="2094547"/>
+            <a:ext cx="5394960" cy="3034665"/>
+          </a:xfrm>
+          <a:prstGeom prst="rect">
+            <a:avLst/>
+          </a:prstGeom>
+        </p:spPr>
+      </p:pic>
+      <p:sp>
+        <p:nvSpPr>
+          <p:cNvPr id="5" name="TextBox 4"/>
           <p:cNvSpPr txBox="1"/>
           <p:nvPr/>
         </p:nvSpPr>
@@ -5173,7 +5611,7 @@
               </a:defRPr>
             </a:pPr>
             <a:r>
-              <a:t>3. Reference-to-RTL traceability</a:t>
+              <a:t>2. Course map architecture</a:t>
             </a:r>
           </a:p>
         </p:txBody>
@@ -5187,7 +5625,7 @@
         <p:spPr>
           <a:xfrm>
             <a:off x="548640" y="1234440"/>
-            <a:ext cx="11064240" cy="4937760"/>
+            <a:ext cx="5303520" cy="4754880"/>
           </a:xfrm>
           <a:prstGeom prst="rect">
             <a:avLst/>
@@ -5215,7 +5653,7 @@
               </a:defRPr>
             </a:pPr>
             <a:r>
-              <a:t>• construct_lookup example: answers “which module</a:t>
+              <a:t>• Module 1–3 — Verilog-only path</a:t>
             </a:r>
           </a:p>
           <a:p>
@@ -5234,7 +5672,7 @@
               </a:defRPr>
             </a:pPr>
             <a:r>
-              <a:t>      introduced X?” — links study back to Modules 1–6 DU…</a:t>
+              <a:t>      (1995, 2001, 2005)</a:t>
             </a:r>
           </a:p>
           <a:p>
@@ -5253,7 +5691,7 @@
               </a:defRPr>
             </a:pPr>
             <a:r>
-              <a:t>• course_map example: module titles map to</a:t>
+              <a:t>• Module 4–6 — SystemVerilog</a:t>
             </a:r>
           </a:p>
           <a:p>
@@ -5272,7 +5710,7 @@
               </a:defRPr>
             </a:pPr>
             <a:r>
-              <a:t>      `docs/MODULEn.md` and `moduleN/dut/` where</a:t>
+              <a:t>      design path (2005, 2009/12,</a:t>
             </a:r>
           </a:p>
           <a:p>
@@ -5291,7 +5729,7 @@
               </a:defRPr>
             </a:pPr>
             <a:r>
-              <a:t>      applicable</a:t>
+              <a:t>      2017)</a:t>
             </a:r>
           </a:p>
           <a:p>
@@ -5310,7 +5748,7 @@
               </a:defRPr>
             </a:pPr>
             <a:r>
-              <a:t>• synthesizable_subset example: do/avoid rules apply</a:t>
+              <a:t>• Module 7 — comparison and</a:t>
             </a:r>
           </a:p>
           <a:p>
@@ -5329,14 +5767,76 @@
               </a:defRPr>
             </a:pPr>
             <a:r>
-              <a:t>      to all prior DUT architectures</a:t>
-            </a:r>
-          </a:p>
-        </p:txBody>
-      </p:sp>
-      <p:sp>
-        <p:nvSpPr>
-          <p:cNvPr id="4" name="TextBox 3"/>
+              <a:t>      migration between standards</a:t>
+            </a:r>
+          </a:p>
+          <a:p>
+            <a:pPr>
+              <a:lnSpc>
+                <a:spcPts val="2200"/>
+              </a:lnSpc>
+              <a:spcAft>
+                <a:spcPts val="1000"/>
+              </a:spcAft>
+              <a:defRPr sz="2000" b="0">
+                <a:solidFill>
+                  <a:srgbClr val="333333"/>
+                </a:solidFill>
+                <a:latin typeface="Calibri"/>
+              </a:defRPr>
+            </a:pPr>
+            <a:r>
+              <a:t>• Module 8 — this reference layer</a:t>
+            </a:r>
+          </a:p>
+          <a:p>
+            <a:pPr>
+              <a:lnSpc>
+                <a:spcPts val="2200"/>
+              </a:lnSpc>
+              <a:spcAft>
+                <a:spcPts val="1000"/>
+              </a:spcAft>
+              <a:defRPr sz="2000" b="0">
+                <a:solidFill>
+                  <a:srgbClr val="333333"/>
+                </a:solidFill>
+                <a:latin typeface="Calibri"/>
+              </a:defRPr>
+            </a:pPr>
+            <a:r>
+              <a:t>      on top of the version stack</a:t>
+            </a:r>
+          </a:p>
+        </p:txBody>
+      </p:sp>
+      <p:pic>
+        <p:nvPicPr>
+          <p:cNvPr id="4" name="Picture 3" descr="verification_architecture.png"/>
+          <p:cNvPicPr>
+            <a:picLocks noChangeAspect="1"/>
+          </p:cNvPicPr>
+          <p:nvPr/>
+        </p:nvPicPr>
+        <p:blipFill>
+          <a:blip r:embed="rId2"/>
+          <a:stretch>
+            <a:fillRect/>
+          </a:stretch>
+        </p:blipFill>
+        <p:spPr>
+          <a:xfrm>
+            <a:off x="6172200" y="2094547"/>
+            <a:ext cx="5394960" cy="3034665"/>
+          </a:xfrm>
+          <a:prstGeom prst="rect">
+            <a:avLst/>
+          </a:prstGeom>
+        </p:spPr>
+      </p:pic>
+      <p:sp>
+        <p:nvSpPr>
+          <p:cNvPr id="5" name="TextBox 4"/>
           <p:cNvSpPr txBox="1"/>
           <p:nvPr/>
         </p:nvSpPr>
@@ -5399,8 +5899,8 @@
         </p:nvSpPr>
         <p:spPr>
           <a:xfrm>
-            <a:off x="548640" y="2743200"/>
-            <a:ext cx="11064240" cy="1371600"/>
+            <a:off x="548640" y="411480"/>
+            <a:ext cx="11064240" cy="777240"/>
           </a:xfrm>
           <a:prstGeom prst="rect">
             <a:avLst/>
@@ -5413,11 +5913,11 @@
           </a:bodyPr>
           <a:lstStyle/>
           <a:p>
-            <a:pPr algn="ctr">
-              <a:lnSpc>
-                <a:spcPts val="2200"/>
-              </a:lnSpc>
-              <a:defRPr sz="3600" b="1">
+            <a:pPr>
+              <a:lnSpc>
+                <a:spcPts val="2200"/>
+              </a:lnSpc>
+              <a:defRPr sz="2800" b="1">
                 <a:solidFill>
                   <a:srgbClr val="1A1A2E"/>
                 </a:solidFill>
@@ -5425,7 +5925,7 @@
               </a:defRPr>
             </a:pPr>
             <a:r>
-              <a:t>Verification &amp; testing methods</a:t>
+              <a:t>3. How reference examples execute</a:t>
             </a:r>
           </a:p>
         </p:txBody>
@@ -5433,6 +5933,167 @@
       <p:sp>
         <p:nvSpPr>
           <p:cNvPr id="3" name="TextBox 2"/>
+          <p:cNvSpPr txBox="1"/>
+          <p:nvPr/>
+        </p:nvSpPr>
+        <p:spPr>
+          <a:xfrm>
+            <a:off x="548640" y="1234440"/>
+            <a:ext cx="5303520" cy="4754880"/>
+          </a:xfrm>
+          <a:prstGeom prst="rect">
+            <a:avLst/>
+          </a:prstGeom>
+          <a:noFill/>
+        </p:spPr>
+        <p:txBody>
+          <a:bodyPr wrap="square">
+            <a:noAutofit/>
+          </a:bodyPr>
+          <a:lstStyle/>
+          <a:p>
+            <a:pPr>
+              <a:lnSpc>
+                <a:spcPts val="2200"/>
+              </a:lnSpc>
+              <a:spcAft>
+                <a:spcPts val="1000"/>
+              </a:spcAft>
+              <a:defRPr sz="2000" b="0">
+                <a:solidFill>
+                  <a:srgbClr val="333333"/>
+                </a:solidFill>
+                <a:latin typeface="Calibri"/>
+              </a:defRPr>
+            </a:pPr>
+            <a:r>
+              <a:t>• Most labs $display tables or</a:t>
+            </a:r>
+          </a:p>
+          <a:p>
+            <a:pPr>
+              <a:lnSpc>
+                <a:spcPts val="2200"/>
+              </a:lnSpc>
+              <a:spcAft>
+                <a:spcPts val="1000"/>
+              </a:spcAft>
+              <a:defRPr sz="2000" b="0">
+                <a:solidFill>
+                  <a:srgbClr val="333333"/>
+                </a:solidFill>
+                <a:latin typeface="Calibri"/>
+              </a:defRPr>
+            </a:pPr>
+            <a:r>
+              <a:t>      cheat-sheet rows to stdout</a:t>
+            </a:r>
+          </a:p>
+          <a:p>
+            <a:pPr>
+              <a:lnSpc>
+                <a:spcPts val="2200"/>
+              </a:lnSpc>
+              <a:spcAft>
+                <a:spcPts val="1000"/>
+              </a:spcAft>
+              <a:defRPr sz="2000" b="0">
+                <a:solidFill>
+                  <a:srgbClr val="333333"/>
+                </a:solidFill>
+                <a:latin typeface="Calibri"/>
+              </a:defRPr>
+            </a:pPr>
+            <a:r>
+              <a:t>• No new DUT hierarchy — output is</a:t>
+            </a:r>
+          </a:p>
+          <a:p>
+            <a:pPr>
+              <a:lnSpc>
+                <a:spcPts val="2200"/>
+              </a:lnSpc>
+              <a:spcAft>
+                <a:spcPts val="1000"/>
+              </a:spcAft>
+              <a:defRPr sz="2000" b="0">
+                <a:solidFill>
+                  <a:srgbClr val="333333"/>
+                </a:solidFill>
+                <a:latin typeface="Calibri"/>
+              </a:defRPr>
+            </a:pPr>
+            <a:r>
+              <a:t>      documentation you can grep</a:t>
+            </a:r>
+          </a:p>
+          <a:p>
+            <a:pPr>
+              <a:lnSpc>
+                <a:spcPts val="2200"/>
+              </a:lnSpc>
+              <a:spcAft>
+                <a:spcPts val="1000"/>
+              </a:spcAft>
+              <a:defRPr sz="2000" b="0">
+                <a:solidFill>
+                  <a:srgbClr val="333333"/>
+                </a:solidFill>
+                <a:latin typeface="Calibri"/>
+              </a:defRPr>
+            </a:pPr>
+            <a:r>
+              <a:t>• Pair with docs/MODULE8.md for</a:t>
+            </a:r>
+          </a:p>
+          <a:p>
+            <a:pPr>
+              <a:lnSpc>
+                <a:spcPts val="2200"/>
+              </a:lnSpc>
+              <a:spcAft>
+                <a:spcPts val="1000"/>
+              </a:spcAft>
+              <a:defRPr sz="2000" b="0">
+                <a:solidFill>
+                  <a:srgbClr val="333333"/>
+                </a:solidFill>
+                <a:latin typeface="Calibri"/>
+              </a:defRPr>
+            </a:pPr>
+            <a:r>
+              <a:t>      full tables</a:t>
+            </a:r>
+          </a:p>
+        </p:txBody>
+      </p:sp>
+      <p:pic>
+        <p:nvPicPr>
+          <p:cNvPr id="4" name="Picture 3" descr="testing_methods.png"/>
+          <p:cNvPicPr>
+            <a:picLocks noChangeAspect="1"/>
+          </p:cNvPicPr>
+          <p:nvPr/>
+        </p:nvPicPr>
+        <p:blipFill>
+          <a:blip r:embed="rId2"/>
+          <a:stretch>
+            <a:fillRect/>
+          </a:stretch>
+        </p:blipFill>
+        <p:spPr>
+          <a:xfrm>
+            <a:off x="6172200" y="2094547"/>
+            <a:ext cx="5394960" cy="3034665"/>
+          </a:xfrm>
+          <a:prstGeom prst="rect">
+            <a:avLst/>
+          </a:prstGeom>
+        </p:spPr>
+      </p:pic>
+      <p:sp>
+        <p:nvSpPr>
+          <p:cNvPr id="5" name="TextBox 4"/>
           <p:cNvSpPr txBox="1"/>
           <p:nvPr/>
         </p:nvSpPr>
@@ -5521,50 +6182,28 @@
               </a:defRPr>
             </a:pPr>
             <a:r>
-              <a:t>Testing and closure flow</a:t>
-            </a:r>
-          </a:p>
-        </p:txBody>
-      </p:sp>
-      <p:pic>
-        <p:nvPicPr>
-          <p:cNvPr id="3" name="Picture 2" descr="testing_methods.png"/>
-          <p:cNvPicPr>
-            <a:picLocks noChangeAspect="1"/>
-          </p:cNvPicPr>
-          <p:nvPr/>
-        </p:nvPicPr>
-        <p:blipFill>
-          <a:blip r:embed="rId2"/>
-          <a:stretch>
-            <a:fillRect/>
-          </a:stretch>
-        </p:blipFill>
-        <p:spPr>
-          <a:xfrm>
-            <a:off x="548640" y="1143000"/>
-            <a:ext cx="8128000" cy="4572000"/>
-          </a:xfrm>
-          <a:prstGeom prst="rect">
-            <a:avLst/>
-          </a:prstGeom>
-        </p:spPr>
-      </p:pic>
-      <p:sp>
-        <p:nvSpPr>
-          <p:cNvPr id="4" name="TextBox 3"/>
+              <a:t>One-page course map</a:t>
+            </a:r>
+          </a:p>
+        </p:txBody>
+      </p:sp>
+      <p:sp>
+        <p:nvSpPr>
+          <p:cNvPr id="3" name="TextBox 2"/>
           <p:cNvSpPr txBox="1"/>
           <p:nvPr/>
         </p:nvSpPr>
         <p:spPr>
           <a:xfrm>
-            <a:off x="548640" y="5897880"/>
-            <a:ext cx="11064240" cy="411480"/>
-          </a:xfrm>
-          <a:prstGeom prst="rect">
-            <a:avLst/>
-          </a:prstGeom>
-          <a:noFill/>
+            <a:off x="548640" y="1143000"/>
+            <a:ext cx="11064240" cy="5029200"/>
+          </a:xfrm>
+          <a:prstGeom prst="rect">
+            <a:avLst/>
+          </a:prstGeom>
+          <a:solidFill>
+            <a:srgbClr val="F4F4F4"/>
+          </a:solidFill>
         </p:spPr>
         <p:txBody>
           <a:bodyPr wrap="square">
@@ -5576,22 +6215,345 @@
               <a:lnSpc>
                 <a:spcPts val="2200"/>
               </a:lnSpc>
-              <a:defRPr sz="1200" b="0">
-                <a:solidFill>
-                  <a:srgbClr val="333333"/>
-                </a:solidFill>
-                <a:latin typeface="Calibri"/>
-              </a:defRPr>
-            </a:pPr>
-            <a:r>
-              <a:t>Module 8: how tests, checks, and metrics close verification goals.</a:t>
-            </a:r>
-          </a:p>
-        </p:txBody>
-      </p:sp>
-      <p:sp>
-        <p:nvSpPr>
-          <p:cNvPr id="5" name="TextBox 4"/>
+              <a:spcAft>
+                <a:spcPts val="400"/>
+              </a:spcAft>
+              <a:defRPr sz="2000" b="0">
+                <a:solidFill>
+                  <a:srgbClr val="333333"/>
+                </a:solidFill>
+                <a:latin typeface="Consolas"/>
+              </a:defRPr>
+            </a:pPr>
+            <a:r>
+              <a:t>/*</a:t>
+            </a:r>
+          </a:p>
+          <a:p>
+            <a:pPr>
+              <a:lnSpc>
+                <a:spcPts val="2200"/>
+              </a:lnSpc>
+              <a:spcAft>
+                <a:spcPts val="400"/>
+              </a:spcAft>
+              <a:defRPr sz="2000" b="0">
+                <a:solidFill>
+                  <a:srgbClr val="333333"/>
+                </a:solidFill>
+                <a:latin typeface="Consolas"/>
+              </a:defRPr>
+            </a:pPr>
+            <a:r>
+              <a:t> * Module 8: Course map - module number, title, content summary</a:t>
+            </a:r>
+          </a:p>
+          <a:p>
+            <a:pPr>
+              <a:lnSpc>
+                <a:spcPts val="2200"/>
+              </a:lnSpc>
+              <a:spcAft>
+                <a:spcPts val="400"/>
+              </a:spcAft>
+              <a:defRPr sz="2000" b="0">
+                <a:solidFill>
+                  <a:srgbClr val="333333"/>
+                </a:solidFill>
+                <a:latin typeface="Consolas"/>
+              </a:defRPr>
+            </a:pPr>
+            <a:r>
+              <a:t> * Reference only; see module8/docs/course_map.md for links.</a:t>
+            </a:r>
+          </a:p>
+          <a:p>
+            <a:pPr>
+              <a:lnSpc>
+                <a:spcPts val="2200"/>
+              </a:lnSpc>
+              <a:spcAft>
+                <a:spcPts val="400"/>
+              </a:spcAft>
+              <a:defRPr sz="2000" b="0">
+                <a:solidFill>
+                  <a:srgbClr val="333333"/>
+                </a:solidFill>
+                <a:latin typeface="Consolas"/>
+              </a:defRPr>
+            </a:pPr>
+            <a:r>
+              <a:t> */</a:t>
+            </a:r>
+          </a:p>
+          <a:p>
+            <a:pPr>
+              <a:lnSpc>
+                <a:spcPts val="2200"/>
+              </a:lnSpc>
+              <a:spcAft>
+                <a:spcPts val="400"/>
+              </a:spcAft>
+              <a:defRPr sz="2000" b="0">
+                <a:solidFill>
+                  <a:srgbClr val="333333"/>
+                </a:solidFill>
+                <a:latin typeface="Consolas"/>
+              </a:defRPr>
+            </a:pPr>
+          </a:p>
+          <a:p>
+            <a:pPr>
+              <a:lnSpc>
+                <a:spcPts val="2200"/>
+              </a:lnSpc>
+              <a:spcAft>
+                <a:spcPts val="400"/>
+              </a:spcAft>
+              <a:defRPr sz="2000" b="0">
+                <a:solidFill>
+                  <a:srgbClr val="333333"/>
+                </a:solidFill>
+                <a:latin typeface="Consolas"/>
+              </a:defRPr>
+            </a:pPr>
+            <a:r>
+              <a:t>module top;</a:t>
+            </a:r>
+          </a:p>
+          <a:p>
+            <a:pPr>
+              <a:lnSpc>
+                <a:spcPts val="2200"/>
+              </a:lnSpc>
+              <a:spcAft>
+                <a:spcPts val="400"/>
+              </a:spcAft>
+              <a:defRPr sz="2000" b="0">
+                <a:solidFill>
+                  <a:srgbClr val="333333"/>
+                </a:solidFill>
+                <a:latin typeface="Consolas"/>
+              </a:defRPr>
+            </a:pPr>
+            <a:r>
+              <a:t>    initial begin</a:t>
+            </a:r>
+          </a:p>
+          <a:p>
+            <a:pPr>
+              <a:lnSpc>
+                <a:spcPts val="2200"/>
+              </a:lnSpc>
+              <a:spcAft>
+                <a:spcPts val="400"/>
+              </a:spcAft>
+              <a:defRPr sz="2000" b="0">
+                <a:solidFill>
+                  <a:srgbClr val="333333"/>
+                </a:solidFill>
+                <a:latin typeface="Consolas"/>
+              </a:defRPr>
+            </a:pPr>
+            <a:r>
+              <a:t>        $display("=== Module 8: Course map (Modules 1-8) ===");</a:t>
+            </a:r>
+          </a:p>
+          <a:p>
+            <a:pPr>
+              <a:lnSpc>
+                <a:spcPts val="2200"/>
+              </a:lnSpc>
+              <a:spcAft>
+                <a:spcPts val="400"/>
+              </a:spcAft>
+              <a:defRPr sz="2000" b="0">
+                <a:solidFill>
+                  <a:srgbClr val="333333"/>
+                </a:solidFill>
+                <a:latin typeface="Consolas"/>
+              </a:defRPr>
+            </a:pPr>
+            <a:r>
+              <a:t>        $display("  1 | IEEE 1364-1995    | Verilog-95: wire/reg,</a:t>
+            </a:r>
+          </a:p>
+          <a:p>
+            <a:pPr>
+              <a:lnSpc>
+                <a:spcPts val="2200"/>
+              </a:lnSpc>
+              <a:spcAft>
+                <a:spcPts val="400"/>
+              </a:spcAft>
+              <a:defRPr sz="2000" b="0">
+                <a:solidFill>
+                  <a:srgbClr val="333333"/>
+                </a:solidFill>
+                <a:latin typeface="Consolas"/>
+              </a:defRPr>
+            </a:pPr>
+            <a:r>
+              <a:t>assign, always/initial, explicit sensitivity");</a:t>
+            </a:r>
+          </a:p>
+          <a:p>
+            <a:pPr>
+              <a:lnSpc>
+                <a:spcPts val="2200"/>
+              </a:lnSpc>
+              <a:spcAft>
+                <a:spcPts val="400"/>
+              </a:spcAft>
+              <a:defRPr sz="2000" b="0">
+                <a:solidFill>
+                  <a:srgbClr val="333333"/>
+                </a:solidFill>
+                <a:latin typeface="Consolas"/>
+              </a:defRPr>
+            </a:pPr>
+            <a:r>
+              <a:t>        $display("  2 | IEEE 1364-2001    | ANSI ports, always @*,</a:t>
+            </a:r>
+          </a:p>
+          <a:p>
+            <a:pPr>
+              <a:lnSpc>
+                <a:spcPts val="2200"/>
+              </a:lnSpc>
+              <a:spcAft>
+                <a:spcPts val="400"/>
+              </a:spcAft>
+              <a:defRPr sz="2000" b="0">
+                <a:solidFill>
+                  <a:srgbClr val="333333"/>
+                </a:solidFill>
+                <a:latin typeface="Consolas"/>
+              </a:defRPr>
+            </a:pPr>
+            <a:r>
+              <a:t>generate, signed, arrays, localparam");</a:t>
+            </a:r>
+          </a:p>
+          <a:p>
+            <a:pPr>
+              <a:lnSpc>
+                <a:spcPts val="2200"/>
+              </a:lnSpc>
+              <a:spcAft>
+                <a:spcPts val="400"/>
+              </a:spcAft>
+              <a:defRPr sz="2000" b="0">
+                <a:solidFill>
+                  <a:srgbClr val="333333"/>
+                </a:solidFill>
+                <a:latin typeface="Consolas"/>
+              </a:defRPr>
+            </a:pPr>
+            <a:r>
+              <a:t>        $display("  3 | IEEE 1364-2005    | Clarifications,</a:t>
+            </a:r>
+          </a:p>
+          <a:p>
+            <a:pPr>
+              <a:lnSpc>
+                <a:spcPts val="2200"/>
+              </a:lnSpc>
+              <a:spcAft>
+                <a:spcPts val="400"/>
+              </a:spcAft>
+              <a:defRPr sz="2000" b="0">
+                <a:solidFill>
+                  <a:srgbClr val="333333"/>
+                </a:solidFill>
+                <a:latin typeface="Consolas"/>
+              </a:defRPr>
+            </a:pPr>
+            <a:r>
+              <a:t>synthesizable subset, defparam deprecated");</a:t>
+            </a:r>
+          </a:p>
+          <a:p>
+            <a:pPr>
+              <a:lnSpc>
+                <a:spcPts val="2200"/>
+              </a:lnSpc>
+              <a:spcAft>
+                <a:spcPts val="400"/>
+              </a:spcAft>
+              <a:defRPr sz="2000" b="0">
+                <a:solidFill>
+                  <a:srgbClr val="333333"/>
+                </a:solidFill>
+                <a:latin typeface="Consolas"/>
+              </a:defRPr>
+            </a:pPr>
+            <a:r>
+              <a:t>        $display("  4 | IEEE 1800-2005    | logic,</a:t>
+            </a:r>
+          </a:p>
+          <a:p>
+            <a:pPr>
+              <a:lnSpc>
+                <a:spcPts val="2200"/>
+              </a:lnSpc>
+              <a:spcAft>
+                <a:spcPts val="400"/>
+              </a:spcAft>
+              <a:defRPr sz="2000" b="0">
+                <a:solidFill>
+                  <a:srgbClr val="333333"/>
+                </a:solidFill>
+                <a:latin typeface="Consolas"/>
+              </a:defRPr>
+            </a:pPr>
+            <a:r>
+              <a:t>always_comb/always_ff, interfaces, packages, unique/priority case");</a:t>
+            </a:r>
+          </a:p>
+          <a:p>
+            <a:pPr>
+              <a:lnSpc>
+                <a:spcPts val="2200"/>
+              </a:lnSpc>
+              <a:spcAft>
+                <a:spcPts val="400"/>
+              </a:spcAft>
+              <a:defRPr sz="2000" b="0">
+                <a:solidFill>
+                  <a:srgbClr val="333333"/>
+                </a:solidFill>
+                <a:latin typeface="Consolas"/>
+              </a:defRPr>
+            </a:pPr>
+            <a:r>
+              <a:t>        $display("  5 | IEEE 1800-2009/12 | Interface refinements,</a:t>
+            </a:r>
+          </a:p>
+          <a:p>
+            <a:pPr>
+              <a:lnSpc>
+                <a:spcPts val="2200"/>
+              </a:lnSpc>
+              <a:spcAft>
+                <a:spcPts val="400"/>
+              </a:spcAft>
+              <a:defRPr sz="2000" b="0">
+                <a:solidFill>
+                  <a:srgbClr val="333333"/>
+                </a:solidFill>
+                <a:latin typeface="Consolas"/>
+              </a:defRPr>
+            </a:pPr>
+            <a:r>
+              <a:t>checkers, array/string methods, assertions");</a:t>
+            </a:r>
+          </a:p>
+        </p:txBody>
+      </p:sp>
+      <p:sp>
+        <p:nvSpPr>
+          <p:cNvPr id="4" name="TextBox 3"/>
           <p:cNvSpPr txBox="1"/>
           <p:nvPr/>
         </p:nvSpPr>
@@ -5654,8 +6616,8 @@
         </p:nvSpPr>
         <p:spPr>
           <a:xfrm>
-            <a:off x="548640" y="411480"/>
-            <a:ext cx="11064240" cy="777240"/>
+            <a:off x="548640" y="2743200"/>
+            <a:ext cx="11064240" cy="1371600"/>
           </a:xfrm>
           <a:prstGeom prst="rect">
             <a:avLst/>
@@ -5668,11 +6630,11 @@
           </a:bodyPr>
           <a:lstStyle/>
           <a:p>
-            <a:pPr>
-              <a:lnSpc>
-                <a:spcPts val="2200"/>
-              </a:lnSpc>
-              <a:defRPr sz="2800" b="1">
+            <a:pPr algn="ctr">
+              <a:lnSpc>
+                <a:spcPts val="2200"/>
+              </a:lnSpc>
+              <a:defRPr sz="3600" b="1">
                 <a:solidFill>
                   <a:srgbClr val="1A1A2E"/>
                 </a:solidFill>
@@ -5680,7 +6642,7 @@
               </a:defRPr>
             </a:pPr>
             <a:r>
-              <a:t>1. Verification strategy without new testbenches</a:t>
+              <a:t>Installation &amp; execution</a:t>
             </a:r>
           </a:p>
         </p:txBody>
@@ -5688,200 +6650,6 @@
       <p:sp>
         <p:nvSpPr>
           <p:cNvPr id="3" name="TextBox 2"/>
-          <p:cNvSpPr txBox="1"/>
-          <p:nvPr/>
-        </p:nvSpPr>
-        <p:spPr>
-          <a:xfrm>
-            <a:off x="548640" y="1234440"/>
-            <a:ext cx="11064240" cy="4937760"/>
-          </a:xfrm>
-          <a:prstGeom prst="rect">
-            <a:avLst/>
-          </a:prstGeom>
-          <a:noFill/>
-        </p:spPr>
-        <p:txBody>
-          <a:bodyPr wrap="square">
-            <a:noAutofit/>
-          </a:bodyPr>
-          <a:lstStyle/>
-          <a:p>
-            <a:pPr>
-              <a:lnSpc>
-                <a:spcPts val="2200"/>
-              </a:lnSpc>
-              <a:spcAft>
-                <a:spcPts val="1000"/>
-              </a:spcAft>
-              <a:defRPr sz="2000" b="0">
-                <a:solidFill>
-                  <a:srgbClr val="333333"/>
-                </a:solidFill>
-                <a:latin typeface="Calibri"/>
-              </a:defRPr>
-            </a:pPr>
-            <a:r>
-              <a:t>• Module 8 does not add tests — it documents how to</a:t>
-            </a:r>
-          </a:p>
-          <a:p>
-            <a:pPr>
-              <a:lnSpc>
-                <a:spcPts val="2200"/>
-              </a:lnSpc>
-              <a:spcAft>
-                <a:spcPts val="1000"/>
-              </a:spcAft>
-              <a:defRPr sz="2000" b="0">
-                <a:solidFill>
-                  <a:srgbClr val="333333"/>
-                </a:solidFill>
-                <a:latin typeface="Calibri"/>
-              </a:defRPr>
-            </a:pPr>
-            <a:r>
-              <a:t>      test when applying course knowledge</a:t>
-            </a:r>
-          </a:p>
-          <a:p>
-            <a:pPr>
-              <a:lnSpc>
-                <a:spcPts val="2200"/>
-              </a:lnSpc>
-              <a:spcAft>
-                <a:spcPts val="1000"/>
-              </a:spcAft>
-              <a:defRPr sz="2000" b="0">
-                <a:solidFill>
-                  <a:srgbClr val="333333"/>
-                </a:solidFill>
-                <a:latin typeface="Calibri"/>
-              </a:defRPr>
-            </a:pPr>
-            <a:r>
-              <a:t>• Regression rule: after picking a standard from</a:t>
-            </a:r>
-          </a:p>
-          <a:p>
-            <a:pPr>
-              <a:lnSpc>
-                <a:spcPts val="2200"/>
-              </a:lnSpc>
-              <a:spcAft>
-                <a:spcPts val="1000"/>
-              </a:spcAft>
-              <a:defRPr sz="2000" b="0">
-                <a:solidFill>
-                  <a:srgbClr val="333333"/>
-                </a:solidFill>
-                <a:latin typeface="Calibri"/>
-              </a:defRPr>
-            </a:pPr>
-            <a:r>
-              <a:t>      Module 8 tables, run the owning module's</a:t>
-            </a:r>
-          </a:p>
-          <a:p>
-            <a:pPr>
-              <a:lnSpc>
-                <a:spcPts val="2200"/>
-              </a:lnSpc>
-              <a:spcAft>
-                <a:spcPts val="1000"/>
-              </a:spcAft>
-              <a:defRPr sz="2000" b="0">
-                <a:solidFill>
-                  <a:srgbClr val="333333"/>
-                </a:solidFill>
-                <a:latin typeface="Calibri"/>
-              </a:defRPr>
-            </a:pPr>
-            <a:r>
-              <a:t>      `./scripts/…</a:t>
-            </a:r>
-          </a:p>
-          <a:p>
-            <a:pPr>
-              <a:lnSpc>
-                <a:spcPts val="2200"/>
-              </a:lnSpc>
-              <a:spcAft>
-                <a:spcPts val="1000"/>
-              </a:spcAft>
-              <a:defRPr sz="2000" b="0">
-                <a:solidFill>
-                  <a:srgbClr val="333333"/>
-                </a:solidFill>
-                <a:latin typeface="Calibri"/>
-              </a:defRPr>
-            </a:pPr>
-            <a:r>
-              <a:t>• Migration rule: use Module 7 equivalence tests</a:t>
-            </a:r>
-          </a:p>
-          <a:p>
-            <a:pPr>
-              <a:lnSpc>
-                <a:spcPts val="2200"/>
-              </a:lnSpc>
-              <a:spcAft>
-                <a:spcPts val="1000"/>
-              </a:spcAft>
-              <a:defRPr sz="2000" b="0">
-                <a:solidFill>
-                  <a:srgbClr val="333333"/>
-                </a:solidFill>
-                <a:latin typeface="Calibri"/>
-              </a:defRPr>
-            </a:pPr>
-            <a:r>
-              <a:t>      whenever syntax changes under stable behavior</a:t>
-            </a:r>
-          </a:p>
-          <a:p>
-            <a:pPr>
-              <a:lnSpc>
-                <a:spcPts val="2200"/>
-              </a:lnSpc>
-              <a:spcAft>
-                <a:spcPts val="1000"/>
-              </a:spcAft>
-              <a:defRPr sz="2000" b="0">
-                <a:solidFill>
-                  <a:srgbClr val="333333"/>
-                </a:solidFill>
-                <a:latin typeface="Calibri"/>
-              </a:defRPr>
-            </a:pPr>
-            <a:r>
-              <a:t>• Subset rule: CI/lint flags should match the</a:t>
-            </a:r>
-          </a:p>
-          <a:p>
-            <a:pPr>
-              <a:lnSpc>
-                <a:spcPts val="2200"/>
-              </a:lnSpc>
-              <a:spcAft>
-                <a:spcPts val="1000"/>
-              </a:spcAft>
-              <a:defRPr sz="2000" b="0">
-                <a:solidFill>
-                  <a:srgbClr val="333333"/>
-                </a:solidFill>
-                <a:latin typeface="Calibri"/>
-              </a:defRPr>
-            </a:pPr>
-            <a:r>
-              <a:t>      documented Verilog-only vs SV-design subset</a:t>
-            </a:r>
-          </a:p>
-        </p:txBody>
-      </p:sp>
-      <p:sp>
-        <p:nvSpPr>
-          <p:cNvPr id="4" name="TextBox 3"/>
           <p:cNvSpPr txBox="1"/>
           <p:nvPr/>
         </p:nvSpPr>
@@ -5970,7 +6738,7 @@
               </a:defRPr>
             </a:pPr>
             <a:r>
-              <a:t>2. Lookup-driven test planning</a:t>
+              <a:t>How to run this module</a:t>
             </a:r>
           </a:p>
         </p:txBody>
@@ -6012,7 +6780,7 @@
               </a:defRPr>
             </a:pPr>
             <a:r>
-              <a:t>• Before using a construct, run construct_lookup /</a:t>
+              <a:t>• From repo root: ./scripts/module8.sh --check —</a:t>
             </a:r>
           </a:p>
           <a:p>
@@ -6031,7 +6799,7 @@
               </a:defRPr>
             </a:pPr>
             <a:r>
-              <a:t>      Section 2 table — note minimum module and revision</a:t>
+              <a:t>      validate environment</a:t>
             </a:r>
           </a:p>
           <a:p>
@@ -6050,7 +6818,7 @@
               </a:defRPr>
             </a:pPr>
             <a:r>
-              <a:t>• pitfalls example: common mistakes (wrong standard,</a:t>
+              <a:t>• ./scripts/module8.sh --demo — print demo commands to</a:t>
             </a:r>
           </a:p>
           <a:p>
@@ -6069,7 +6837,7 @@
               </a:defRPr>
             </a:pPr>
             <a:r>
-              <a:t>      mixed subsets) become test-plan checklist items</a:t>
+              <a:t>      run locally</a:t>
             </a:r>
           </a:p>
           <a:p>
@@ -6088,7 +6856,7 @@
               </a:defRPr>
             </a:pPr>
             <a:r>
-              <a:t>• version_selection example: document</a:t>
+              <a:t>• ./scripts/module8.sh --scaffold — create</a:t>
             </a:r>
           </a:p>
           <a:p>
@@ -6107,7 +6875,7 @@
               </a:defRPr>
             </a:pPr>
             <a:r>
-              <a:t>      simulator/synthesis flags next to chosen revision in</a:t>
+              <a:t>      ~/unix_practice/ exercise files</a:t>
             </a:r>
           </a:p>
           <a:p>
@@ -6126,7 +6894,64 @@
               </a:defRPr>
             </a:pPr>
             <a:r>
-              <a:t>      project RE…</a:t>
+              <a:t>• Open module8/EXAMPLES.md — run each numbered lab in</a:t>
+            </a:r>
+          </a:p>
+          <a:p>
+            <a:pPr>
+              <a:lnSpc>
+                <a:spcPts val="2200"/>
+              </a:lnSpc>
+              <a:spcAft>
+                <a:spcPts val="1000"/>
+              </a:spcAft>
+              <a:defRPr sz="2000" b="0">
+                <a:solidFill>
+                  <a:srgbClr val="333333"/>
+                </a:solidFill>
+                <a:latin typeface="Calibri"/>
+              </a:defRPr>
+            </a:pPr>
+            <a:r>
+              <a:t>      your terminal</a:t>
+            </a:r>
+          </a:p>
+          <a:p>
+            <a:pPr>
+              <a:lnSpc>
+                <a:spcPts val="2200"/>
+              </a:lnSpc>
+              <a:spcAft>
+                <a:spcPts val="1000"/>
+              </a:spcAft>
+              <a:defRPr sz="2000" b="0">
+                <a:solidFill>
+                  <a:srgbClr val="333333"/>
+                </a:solidFill>
+                <a:latin typeface="Calibri"/>
+              </a:defRPr>
+            </a:pPr>
+            <a:r>
+              <a:t>• Track progress with module8/CHECKLIST.md before</a:t>
+            </a:r>
+          </a:p>
+          <a:p>
+            <a:pPr>
+              <a:lnSpc>
+                <a:spcPts val="2200"/>
+              </a:lnSpc>
+              <a:spcAft>
+                <a:spcPts val="1000"/>
+              </a:spcAft>
+              <a:defRPr sz="2000" b="0">
+                <a:solidFill>
+                  <a:srgbClr val="333333"/>
+                </a:solidFill>
+                <a:latin typeface="Calibri"/>
+              </a:defRPr>
+            </a:pPr>
+            <a:r>
+              <a:t>      moving on</a:t>
             </a:r>
           </a:p>
         </p:txBody>
@@ -6196,8 +7021,8 @@
         </p:nvSpPr>
         <p:spPr>
           <a:xfrm>
-            <a:off x="548640" y="411480"/>
-            <a:ext cx="11064240" cy="777240"/>
+            <a:off x="548640" y="2743200"/>
+            <a:ext cx="11064240" cy="1371600"/>
           </a:xfrm>
           <a:prstGeom prst="rect">
             <a:avLst/>
@@ -6210,11 +7035,11 @@
           </a:bodyPr>
           <a:lstStyle/>
           <a:p>
-            <a:pPr>
-              <a:lnSpc>
-                <a:spcPts val="2200"/>
-              </a:lnSpc>
-              <a:defRPr sz="2800" b="1">
+            <a:pPr algn="ctr">
+              <a:lnSpc>
+                <a:spcPts val="2200"/>
+              </a:lnSpc>
+              <a:defRPr sz="3600" b="1">
                 <a:solidFill>
                   <a:srgbClr val="1A1A2E"/>
                 </a:solidFill>
@@ -6222,7 +7047,7 @@
               </a:defRPr>
             </a:pPr>
             <a:r>
-              <a:t>3. Closure and ongoing maintenance</a:t>
+              <a:t>Key files to study</a:t>
             </a:r>
           </a:p>
         </p:txBody>
@@ -6230,143 +7055,6 @@
       <p:sp>
         <p:nvSpPr>
           <p:cNvPr id="3" name="TextBox 2"/>
-          <p:cNvSpPr txBox="1"/>
-          <p:nvPr/>
-        </p:nvSpPr>
-        <p:spPr>
-          <a:xfrm>
-            <a:off x="548640" y="1234440"/>
-            <a:ext cx="11064240" cy="4937760"/>
-          </a:xfrm>
-          <a:prstGeom prst="rect">
-            <a:avLst/>
-          </a:prstGeom>
-          <a:noFill/>
-        </p:spPr>
-        <p:txBody>
-          <a:bodyPr wrap="square">
-            <a:noAutofit/>
-          </a:bodyPr>
-          <a:lstStyle/>
-          <a:p>
-            <a:pPr>
-              <a:lnSpc>
-                <a:spcPts val="2200"/>
-              </a:lnSpc>
-              <a:spcAft>
-                <a:spcPts val="1000"/>
-              </a:spcAft>
-              <a:defRPr sz="2000" b="0">
-                <a:solidFill>
-                  <a:srgbClr val="333333"/>
-                </a:solidFill>
-                <a:latin typeface="Calibri"/>
-              </a:defRPr>
-            </a:pPr>
-            <a:r>
-              <a:t>• learning_path example: ordered study 1→6, then 7;</a:t>
-            </a:r>
-          </a:p>
-          <a:p>
-            <a:pPr>
-              <a:lnSpc>
-                <a:spcPts val="2200"/>
-              </a:lnSpc>
-              <a:spcAft>
-                <a:spcPts val="1000"/>
-              </a:spcAft>
-              <a:defRPr sz="2000" b="0">
-                <a:solidFill>
-                  <a:srgbClr val="333333"/>
-                </a:solidFill>
-                <a:latin typeface="Calibri"/>
-              </a:defRPr>
-            </a:pPr>
-            <a:r>
-              <a:t>      use 8 during real projects as guardrails</a:t>
-            </a:r>
-          </a:p>
-          <a:p>
-            <a:pPr>
-              <a:lnSpc>
-                <a:spcPts val="2200"/>
-              </a:lnSpc>
-              <a:spcAft>
-                <a:spcPts val="1000"/>
-              </a:spcAft>
-              <a:defRPr sz="2000" b="0">
-                <a:solidFill>
-                  <a:srgbClr val="333333"/>
-                </a:solidFill>
-                <a:latin typeface="Calibri"/>
-              </a:defRPr>
-            </a:pPr>
-            <a:r>
-              <a:t>• When a new IEEE revision ships: add Module N, update</a:t>
-            </a:r>
-          </a:p>
-          <a:p>
-            <a:pPr>
-              <a:lnSpc>
-                <a:spcPts val="2200"/>
-              </a:lnSpc>
-              <a:spcAft>
-                <a:spcPts val="1000"/>
-              </a:spcAft>
-              <a:defRPr sz="2000" b="0">
-                <a:solidFill>
-                  <a:srgbClr val="333333"/>
-                </a:solidFill>
-                <a:latin typeface="Calibri"/>
-              </a:defRPr>
-            </a:pPr>
-            <a:r>
-              <a:t>      Module 7 pairs and Module 8 tables — re-run al…</a:t>
-            </a:r>
-          </a:p>
-          <a:p>
-            <a:pPr>
-              <a:lnSpc>
-                <a:spcPts val="2200"/>
-              </a:lnSpc>
-              <a:spcAft>
-                <a:spcPts val="1000"/>
-              </a:spcAft>
-              <a:defRPr sz="2000" b="0">
-                <a:solidFill>
-                  <a:srgbClr val="333333"/>
-                </a:solidFill>
-                <a:latin typeface="Calibri"/>
-              </a:defRPr>
-            </a:pPr>
-            <a:r>
-              <a:t>• Golden rule: Module 8 guides *what* to run; Modules</a:t>
-            </a:r>
-          </a:p>
-          <a:p>
-            <a:pPr>
-              <a:lnSpc>
-                <a:spcPts val="2200"/>
-              </a:lnSpc>
-              <a:spcAft>
-                <a:spcPts val="1000"/>
-              </a:spcAft>
-              <a:defRPr sz="2000" b="0">
-                <a:solidFill>
-                  <a:srgbClr val="333333"/>
-                </a:solidFill>
-                <a:latin typeface="Calibri"/>
-              </a:defRPr>
-            </a:pPr>
-            <a:r>
-              <a:t>      1–7 provide the actual tests and DUTs</a:t>
-            </a:r>
-          </a:p>
-        </p:txBody>
-      </p:sp>
-      <p:sp>
-        <p:nvSpPr>
-          <p:cNvPr id="4" name="TextBox 3"/>
           <p:cNvSpPr txBox="1"/>
           <p:nvPr/>
         </p:nvSpPr>
@@ -6429,8 +7117,8 @@
         </p:nvSpPr>
         <p:spPr>
           <a:xfrm>
-            <a:off x="548640" y="2743200"/>
-            <a:ext cx="11064240" cy="1371600"/>
+            <a:off x="548640" y="411480"/>
+            <a:ext cx="11064240" cy="777240"/>
           </a:xfrm>
           <a:prstGeom prst="rect">
             <a:avLst/>
@@ -6443,11 +7131,11 @@
           </a:bodyPr>
           <a:lstStyle/>
           <a:p>
-            <a:pPr algn="ctr">
-              <a:lnSpc>
-                <a:spcPts val="2200"/>
-              </a:lnSpc>
-              <a:defRPr sz="3600" b="1">
+            <a:pPr>
+              <a:lnSpc>
+                <a:spcPts val="2200"/>
+              </a:lnSpc>
+              <a:defRPr sz="2800" b="1">
                 <a:solidFill>
                   <a:srgbClr val="1A1A2E"/>
                 </a:solidFill>
@@ -6455,7 +7143,7 @@
               </a:defRPr>
             </a:pPr>
             <a:r>
-              <a:t>Syllabus topics</a:t>
+              <a:t>Open these in the repo</a:t>
             </a:r>
           </a:p>
         </p:txBody>
@@ -6463,6 +7151,124 @@
       <p:sp>
         <p:nvSpPr>
           <p:cNvPr id="3" name="TextBox 2"/>
+          <p:cNvSpPr txBox="1"/>
+          <p:nvPr/>
+        </p:nvSpPr>
+        <p:spPr>
+          <a:xfrm>
+            <a:off x="548640" y="1234440"/>
+            <a:ext cx="11064240" cy="4937760"/>
+          </a:xfrm>
+          <a:prstGeom prst="rect">
+            <a:avLst/>
+          </a:prstGeom>
+          <a:noFill/>
+        </p:spPr>
+        <p:txBody>
+          <a:bodyPr wrap="square">
+            <a:noAutofit/>
+          </a:bodyPr>
+          <a:lstStyle/>
+          <a:p>
+            <a:pPr>
+              <a:lnSpc>
+                <a:spcPts val="2200"/>
+              </a:lnSpc>
+              <a:spcAft>
+                <a:spcPts val="1000"/>
+              </a:spcAft>
+              <a:defRPr sz="2000" b="0">
+                <a:solidFill>
+                  <a:srgbClr val="333333"/>
+                </a:solidFill>
+                <a:latin typeface="Calibri"/>
+              </a:defRPr>
+            </a:pPr>
+            <a:r>
+              <a:t>• docs/MODULE8.md — master reference tables</a:t>
+            </a:r>
+          </a:p>
+          <a:p>
+            <a:pPr>
+              <a:lnSpc>
+                <a:spcPts val="2200"/>
+              </a:lnSpc>
+              <a:spcAft>
+                <a:spcPts val="1000"/>
+              </a:spcAft>
+              <a:defRPr sz="2000" b="0">
+                <a:solidFill>
+                  <a:srgbClr val="333333"/>
+                </a:solidFill>
+                <a:latin typeface="Calibri"/>
+              </a:defRPr>
+            </a:pPr>
+            <a:r>
+              <a:t>• module8/examples/version_timeline/</a:t>
+            </a:r>
+          </a:p>
+          <a:p>
+            <a:pPr>
+              <a:lnSpc>
+                <a:spcPts val="2200"/>
+              </a:lnSpc>
+              <a:spcAft>
+                <a:spcPts val="1000"/>
+              </a:spcAft>
+              <a:defRPr sz="2000" b="0">
+                <a:solidFill>
+                  <a:srgbClr val="333333"/>
+                </a:solidFill>
+                <a:latin typeface="Calibri"/>
+              </a:defRPr>
+            </a:pPr>
+            <a:r>
+              <a:t>• module8/examples/migration_steps/</a:t>
+            </a:r>
+          </a:p>
+          <a:p>
+            <a:pPr>
+              <a:lnSpc>
+                <a:spcPts val="2200"/>
+              </a:lnSpc>
+              <a:spcAft>
+                <a:spcPts val="1000"/>
+              </a:spcAft>
+              <a:defRPr sz="2000" b="0">
+                <a:solidFill>
+                  <a:srgbClr val="333333"/>
+                </a:solidFill>
+                <a:latin typeface="Calibri"/>
+              </a:defRPr>
+            </a:pPr>
+            <a:r>
+              <a:t>• module8/examples/course_map/</a:t>
+            </a:r>
+          </a:p>
+          <a:p>
+            <a:pPr>
+              <a:lnSpc>
+                <a:spcPts val="2200"/>
+              </a:lnSpc>
+              <a:spcAft>
+                <a:spcPts val="1000"/>
+              </a:spcAft>
+              <a:defRPr sz="2000" b="0">
+                <a:solidFill>
+                  <a:srgbClr val="333333"/>
+                </a:solidFill>
+                <a:latin typeface="Calibri"/>
+              </a:defRPr>
+            </a:pPr>
+            <a:r>
+              <a:t>• scripts/module8.sh</a:t>
+            </a:r>
+          </a:p>
+        </p:txBody>
+      </p:sp>
+      <p:sp>
+        <p:nvSpPr>
+          <p:cNvPr id="4" name="TextBox 3"/>
           <p:cNvSpPr txBox="1"/>
           <p:nvPr/>
         </p:nvSpPr>
@@ -6525,8 +7331,8 @@
         </p:nvSpPr>
         <p:spPr>
           <a:xfrm>
-            <a:off x="548640" y="411480"/>
-            <a:ext cx="11064240" cy="777240"/>
+            <a:off x="548640" y="2743200"/>
+            <a:ext cx="11064240" cy="1371600"/>
           </a:xfrm>
           <a:prstGeom prst="rect">
             <a:avLst/>
@@ -6539,11 +7345,11 @@
           </a:bodyPr>
           <a:lstStyle/>
           <a:p>
-            <a:pPr>
-              <a:lnSpc>
-                <a:spcPts val="2200"/>
-              </a:lnSpc>
-              <a:defRPr sz="2800" b="1">
+            <a:pPr algn="ctr">
+              <a:lnSpc>
+                <a:spcPts val="2200"/>
+              </a:lnSpc>
+              <a:defRPr sz="3600" b="1">
                 <a:solidFill>
                   <a:srgbClr val="1A1A2E"/>
                 </a:solidFill>
@@ -6551,7 +7357,7 @@
               </a:defRPr>
             </a:pPr>
             <a:r>
-              <a:t>1. Version Timeline (One Table)</a:t>
+              <a:t>Verification &amp; testing methods</a:t>
             </a:r>
           </a:p>
         </p:txBody>
@@ -6559,48 +7365,6 @@
       <p:sp>
         <p:nvSpPr>
           <p:cNvPr id="3" name="TextBox 2"/>
-          <p:cNvSpPr txBox="1"/>
-          <p:nvPr/>
-        </p:nvSpPr>
-        <p:spPr>
-          <a:xfrm>
-            <a:off x="548640" y="1234440"/>
-            <a:ext cx="11064240" cy="4937760"/>
-          </a:xfrm>
-          <a:prstGeom prst="rect">
-            <a:avLst/>
-          </a:prstGeom>
-          <a:noFill/>
-        </p:spPr>
-        <p:txBody>
-          <a:bodyPr wrap="square">
-            <a:noAutofit/>
-          </a:bodyPr>
-          <a:lstStyle/>
-          <a:p>
-            <a:pPr>
-              <a:lnSpc>
-                <a:spcPts val="2200"/>
-              </a:lnSpc>
-              <a:spcAft>
-                <a:spcPts val="1000"/>
-              </a:spcAft>
-              <a:defRPr sz="2000" b="0">
-                <a:solidFill>
-                  <a:srgbClr val="333333"/>
-                </a:solidFill>
-                <a:latin typeface="Calibri"/>
-              </a:defRPr>
-            </a:pPr>
-            <a:r>
-              <a:t>• See docs/MODULE8.md</a:t>
-            </a:r>
-          </a:p>
-        </p:txBody>
-      </p:sp>
-      <p:sp>
-        <p:nvSpPr>
-          <p:cNvPr id="4" name="TextBox 3"/>
           <p:cNvSpPr txBox="1"/>
           <p:nvPr/>
         </p:nvSpPr>
@@ -6663,8 +7427,8 @@
         </p:nvSpPr>
         <p:spPr>
           <a:xfrm>
-            <a:off x="548640" y="2743200"/>
-            <a:ext cx="11064240" cy="1371600"/>
+            <a:off x="548640" y="411480"/>
+            <a:ext cx="11064240" cy="777240"/>
           </a:xfrm>
           <a:prstGeom prst="rect">
             <a:avLst/>
@@ -6677,11 +7441,11 @@
           </a:bodyPr>
           <a:lstStyle/>
           <a:p>
-            <a:pPr algn="ctr">
-              <a:lnSpc>
-                <a:spcPts val="2200"/>
-              </a:lnSpc>
-              <a:defRPr sz="3600" b="1">
+            <a:pPr>
+              <a:lnSpc>
+                <a:spcPts val="2200"/>
+              </a:lnSpc>
+              <a:defRPr sz="2800" b="1">
                 <a:solidFill>
                   <a:srgbClr val="1A1A2E"/>
                 </a:solidFill>
@@ -6689,7 +7453,7 @@
               </a:defRPr>
             </a:pPr>
             <a:r>
-              <a:t>Hands-on examples</a:t>
+              <a:t>1. Using Module 8 as closure</a:t>
             </a:r>
           </a:p>
         </p:txBody>
@@ -6697,6 +7461,167 @@
       <p:sp>
         <p:nvSpPr>
           <p:cNvPr id="3" name="TextBox 2"/>
+          <p:cNvSpPr txBox="1"/>
+          <p:nvPr/>
+        </p:nvSpPr>
+        <p:spPr>
+          <a:xfrm>
+            <a:off x="548640" y="1234440"/>
+            <a:ext cx="5303520" cy="4754880"/>
+          </a:xfrm>
+          <a:prstGeom prst="rect">
+            <a:avLst/>
+          </a:prstGeom>
+          <a:noFill/>
+        </p:spPr>
+        <p:txBody>
+          <a:bodyPr wrap="square">
+            <a:noAutofit/>
+          </a:bodyPr>
+          <a:lstStyle/>
+          <a:p>
+            <a:pPr>
+              <a:lnSpc>
+                <a:spcPts val="2200"/>
+              </a:lnSpc>
+              <a:spcAft>
+                <a:spcPts val="1000"/>
+              </a:spcAft>
+              <a:defRPr sz="2000" b="0">
+                <a:solidFill>
+                  <a:srgbClr val="333333"/>
+                </a:solidFill>
+                <a:latin typeface="Calibri"/>
+              </a:defRPr>
+            </a:pPr>
+            <a:r>
+              <a:t>• Run ./scripts/module8.sh once to</a:t>
+            </a:r>
+          </a:p>
+          <a:p>
+            <a:pPr>
+              <a:lnSpc>
+                <a:spcPts val="2200"/>
+              </a:lnSpc>
+              <a:spcAft>
+                <a:spcPts val="1000"/>
+              </a:spcAft>
+              <a:defRPr sz="2000" b="0">
+                <a:solidFill>
+                  <a:srgbClr val="333333"/>
+                </a:solidFill>
+                <a:latin typeface="Calibri"/>
+              </a:defRPr>
+            </a:pPr>
+            <a:r>
+              <a:t>      print all reference slices</a:t>
+            </a:r>
+          </a:p>
+          <a:p>
+            <a:pPr>
+              <a:lnSpc>
+                <a:spcPts val="2200"/>
+              </a:lnSpc>
+              <a:spcAft>
+                <a:spcPts val="1000"/>
+              </a:spcAft>
+              <a:defRPr sz="2000" b="0">
+                <a:solidFill>
+                  <a:srgbClr val="333333"/>
+                </a:solidFill>
+                <a:latin typeface="Calibri"/>
+              </a:defRPr>
+            </a:pPr>
+            <a:r>
+              <a:t>• Cross-check “which standard has</a:t>
+            </a:r>
+          </a:p>
+          <a:p>
+            <a:pPr>
+              <a:lnSpc>
+                <a:spcPts val="2200"/>
+              </a:lnSpc>
+              <a:spcAft>
+                <a:spcPts val="1000"/>
+              </a:spcAft>
+              <a:defRPr sz="2000" b="0">
+                <a:solidFill>
+                  <a:srgbClr val="333333"/>
+                </a:solidFill>
+                <a:latin typeface="Calibri"/>
+              </a:defRPr>
+            </a:pPr>
+            <a:r>
+              <a:t>      X?” against printed tables</a:t>
+            </a:r>
+          </a:p>
+          <a:p>
+            <a:pPr>
+              <a:lnSpc>
+                <a:spcPts val="2200"/>
+              </a:lnSpc>
+              <a:spcAft>
+                <a:spcPts val="1000"/>
+              </a:spcAft>
+              <a:defRPr sz="2000" b="0">
+                <a:solidFill>
+                  <a:srgbClr val="333333"/>
+                </a:solidFill>
+                <a:latin typeface="Calibri"/>
+              </a:defRPr>
+            </a:pPr>
+            <a:r>
+              <a:t>• Bookmark slides.pdf and</a:t>
+            </a:r>
+          </a:p>
+          <a:p>
+            <a:pPr>
+              <a:lnSpc>
+                <a:spcPts val="2200"/>
+              </a:lnSpc>
+              <a:spcAft>
+                <a:spcPts val="1000"/>
+              </a:spcAft>
+              <a:defRPr sz="2000" b="0">
+                <a:solidFill>
+                  <a:srgbClr val="333333"/>
+                </a:solidFill>
+                <a:latin typeface="Calibri"/>
+              </a:defRPr>
+            </a:pPr>
+            <a:r>
+              <a:t>      MODULE8.md for day-to-day lookup</a:t>
+            </a:r>
+          </a:p>
+        </p:txBody>
+      </p:sp>
+      <p:pic>
+        <p:nvPicPr>
+          <p:cNvPr id="4" name="Picture 3" descr="testing_methods.png"/>
+          <p:cNvPicPr>
+            <a:picLocks noChangeAspect="1"/>
+          </p:cNvPicPr>
+          <p:nvPr/>
+        </p:nvPicPr>
+        <p:blipFill>
+          <a:blip r:embed="rId2"/>
+          <a:stretch>
+            <a:fillRect/>
+          </a:stretch>
+        </p:blipFill>
+        <p:spPr>
+          <a:xfrm>
+            <a:off x="6172200" y="2094547"/>
+            <a:ext cx="5394960" cy="3034665"/>
+          </a:xfrm>
+          <a:prstGeom prst="rect">
+            <a:avLst/>
+          </a:prstGeom>
+        </p:spPr>
+      </p:pic>
+      <p:sp>
+        <p:nvSpPr>
+          <p:cNvPr id="5" name="TextBox 4"/>
           <p:cNvSpPr txBox="1"/>
           <p:nvPr/>
         </p:nvSpPr>
@@ -6942,7 +7867,7 @@
               </a:defRPr>
             </a:pPr>
             <a:r>
-              <a:t>Module 8 self-check</a:t>
+              <a:t>2. When to re-run labs</a:t>
             </a:r>
           </a:p>
         </p:txBody>
@@ -6955,15 +7880,13 @@
         </p:nvSpPr>
         <p:spPr>
           <a:xfrm>
-            <a:off x="548640" y="1051560"/>
-            <a:ext cx="11064240" cy="914400"/>
-          </a:xfrm>
-          <a:prstGeom prst="rect">
-            <a:avLst/>
-          </a:prstGeom>
-          <a:solidFill>
-            <a:srgbClr val="F4F4F4"/>
-          </a:solidFill>
+            <a:off x="548640" y="1234440"/>
+            <a:ext cx="5303520" cy="4754880"/>
+          </a:xfrm>
+          <a:prstGeom prst="rect">
+            <a:avLst/>
+          </a:prstGeom>
+          <a:noFill/>
         </p:spPr>
         <p:txBody>
           <a:bodyPr wrap="square">
@@ -6976,24 +7899,119 @@
                 <a:spcPts val="2200"/>
               </a:lnSpc>
               <a:spcAft>
-                <a:spcPts val="200"/>
-              </a:spcAft>
-              <a:defRPr sz="2000" b="0">
-                <a:solidFill>
-                  <a:srgbClr val="333333"/>
-                </a:solidFill>
-                <a:latin typeface="Consolas"/>
-              </a:defRPr>
-            </a:pPr>
-            <a:r>
-              <a:t>$ ./scripts/module8.sh --check</a:t>
+                <a:spcPts val="1000"/>
+              </a:spcAft>
+              <a:defRPr sz="2000" b="0">
+                <a:solidFill>
+                  <a:srgbClr val="333333"/>
+                </a:solidFill>
+                <a:latin typeface="Calibri"/>
+              </a:defRPr>
+            </a:pPr>
+            <a:r>
+              <a:t>• Re-run a specific Module 1–7</a:t>
+            </a:r>
+          </a:p>
+          <a:p>
+            <a:pPr>
+              <a:lnSpc>
+                <a:spcPts val="2200"/>
+              </a:lnSpc>
+              <a:spcAft>
+                <a:spcPts val="1000"/>
+              </a:spcAft>
+              <a:defRPr sz="2000" b="0">
+                <a:solidFill>
+                  <a:srgbClr val="333333"/>
+                </a:solidFill>
+                <a:latin typeface="Calibri"/>
+              </a:defRPr>
+            </a:pPr>
+            <a:r>
+              <a:t>      example when you need hands-on</a:t>
+            </a:r>
+          </a:p>
+          <a:p>
+            <a:pPr>
+              <a:lnSpc>
+                <a:spcPts val="2200"/>
+              </a:lnSpc>
+              <a:spcAft>
+                <a:spcPts val="1000"/>
+              </a:spcAft>
+              <a:defRPr sz="2000" b="0">
+                <a:solidFill>
+                  <a:srgbClr val="333333"/>
+                </a:solidFill>
+                <a:latin typeface="Calibri"/>
+              </a:defRPr>
+            </a:pPr>
+            <a:r>
+              <a:t>      refresh</a:t>
+            </a:r>
+          </a:p>
+          <a:p>
+            <a:pPr>
+              <a:lnSpc>
+                <a:spcPts val="2200"/>
+              </a:lnSpc>
+              <a:spcAft>
+                <a:spcPts val="1000"/>
+              </a:spcAft>
+              <a:defRPr sz="2000" b="0">
+                <a:solidFill>
+                  <a:srgbClr val="333333"/>
+                </a:solidFill>
+                <a:latin typeface="Calibri"/>
+              </a:defRPr>
+            </a:pPr>
+            <a:r>
+              <a:t>• Module 8 examples confirm you</a:t>
+            </a:r>
+          </a:p>
+          <a:p>
+            <a:pPr>
+              <a:lnSpc>
+                <a:spcPts val="2200"/>
+              </a:lnSpc>
+              <a:spcAft>
+                <a:spcPts val="1000"/>
+              </a:spcAft>
+              <a:defRPr sz="2000" b="0">
+                <a:solidFill>
+                  <a:srgbClr val="333333"/>
+                </a:solidFill>
+                <a:latin typeface="Calibri"/>
+              </a:defRPr>
+            </a:pPr>
+            <a:r>
+              <a:t>      know where to find detail, not</a:t>
+            </a:r>
+          </a:p>
+          <a:p>
+            <a:pPr>
+              <a:lnSpc>
+                <a:spcPts val="2200"/>
+              </a:lnSpc>
+              <a:spcAft>
+                <a:spcPts val="1000"/>
+              </a:spcAft>
+              <a:defRPr sz="2000" b="0">
+                <a:solidFill>
+                  <a:srgbClr val="333333"/>
+                </a:solidFill>
+                <a:latin typeface="Calibri"/>
+              </a:defRPr>
+            </a:pPr>
+            <a:r>
+              <a:t>      replace it</a:t>
             </a:r>
           </a:p>
         </p:txBody>
       </p:sp>
       <p:pic>
         <p:nvPicPr>
-          <p:cNvPr id="4" name="Picture 3" descr="module8_check.png"/>
+          <p:cNvPr id="4" name="Picture 3" descr="testing_methods.png"/>
           <p:cNvPicPr>
             <a:picLocks noChangeAspect="1"/>
           </p:cNvPicPr>
@@ -7007,8 +8025,8 @@
         </p:blipFill>
         <p:spPr>
           <a:xfrm>
-            <a:off x="548640" y="1965960"/>
-            <a:ext cx="7071358" cy="3977639"/>
+            <a:off x="6172200" y="2094547"/>
+            <a:ext cx="5394960" cy="3034665"/>
           </a:xfrm>
           <a:prstGeom prst="rect">
             <a:avLst/>
@@ -7106,7 +8124,7 @@
               </a:defRPr>
             </a:pPr>
             <a:r>
-              <a:t>Demo: Construct Lookup</a:t>
+              <a:t>Version timeline printer</a:t>
             </a:r>
           </a:p>
         </p:txBody>
@@ -7119,8 +8137,8 @@
         </p:nvSpPr>
         <p:spPr>
           <a:xfrm>
-            <a:off x="548640" y="1051560"/>
-            <a:ext cx="11064240" cy="914400"/>
+            <a:off x="548640" y="1143000"/>
+            <a:ext cx="11064240" cy="5029200"/>
           </a:xfrm>
           <a:prstGeom prst="rect">
             <a:avLst/>
@@ -7140,7 +8158,7 @@
                 <a:spcPts val="2200"/>
               </a:lnSpc>
               <a:spcAft>
-                <a:spcPts val="200"/>
+                <a:spcPts val="400"/>
               </a:spcAft>
               <a:defRPr sz="2000" b="0">
                 <a:solidFill>
@@ -7150,38 +8168,334 @@
               </a:defRPr>
             </a:pPr>
             <a:r>
-              <a:t>$ cd module8/examples/construct_lookup &amp;&amp; make clean &amp;&amp; make run</a:t>
-            </a:r>
-          </a:p>
-        </p:txBody>
-      </p:sp>
-      <p:pic>
-        <p:nvPicPr>
-          <p:cNvPr id="4" name="Picture 3" descr="ex01_construct_lookup.png"/>
-          <p:cNvPicPr>
-            <a:picLocks noChangeAspect="1"/>
-          </p:cNvPicPr>
-          <p:nvPr/>
-        </p:nvPicPr>
-        <p:blipFill>
-          <a:blip r:embed="rId2"/>
-          <a:stretch>
-            <a:fillRect/>
-          </a:stretch>
-        </p:blipFill>
-        <p:spPr>
-          <a:xfrm>
-            <a:off x="548640" y="1965960"/>
-            <a:ext cx="7071358" cy="3977639"/>
-          </a:xfrm>
-          <a:prstGeom prst="rect">
-            <a:avLst/>
-          </a:prstGeom>
-        </p:spPr>
-      </p:pic>
-      <p:sp>
-        <p:nvSpPr>
-          <p:cNvPr id="5" name="TextBox 4"/>
+              <a:t>/*</a:t>
+            </a:r>
+          </a:p>
+          <a:p>
+            <a:pPr>
+              <a:lnSpc>
+                <a:spcPts val="2200"/>
+              </a:lnSpc>
+              <a:spcAft>
+                <a:spcPts val="400"/>
+              </a:spcAft>
+              <a:defRPr sz="2000" b="0">
+                <a:solidFill>
+                  <a:srgbClr val="333333"/>
+                </a:solidFill>
+                <a:latin typeface="Consolas"/>
+              </a:defRPr>
+            </a:pPr>
+            <a:r>
+              <a:t> * Module 8: Version timeline - prints standard, year, role, module</a:t>
+            </a:r>
+          </a:p>
+          <a:p>
+            <a:pPr>
+              <a:lnSpc>
+                <a:spcPts val="2200"/>
+              </a:lnSpc>
+              <a:spcAft>
+                <a:spcPts val="400"/>
+              </a:spcAft>
+              <a:defRPr sz="2000" b="0">
+                <a:solidFill>
+                  <a:srgbClr val="333333"/>
+                </a:solidFill>
+                <a:latin typeface="Consolas"/>
+              </a:defRPr>
+            </a:pPr>
+            <a:r>
+              <a:t> * Reference only; see docs/MODULE8.md and module8/docs/</a:t>
+            </a:r>
+          </a:p>
+          <a:p>
+            <a:pPr>
+              <a:lnSpc>
+                <a:spcPts val="2200"/>
+              </a:lnSpc>
+              <a:spcAft>
+                <a:spcPts val="400"/>
+              </a:spcAft>
+              <a:defRPr sz="2000" b="0">
+                <a:solidFill>
+                  <a:srgbClr val="333333"/>
+                </a:solidFill>
+                <a:latin typeface="Consolas"/>
+              </a:defRPr>
+            </a:pPr>
+            <a:r>
+              <a:t> */</a:t>
+            </a:r>
+          </a:p>
+          <a:p>
+            <a:pPr>
+              <a:lnSpc>
+                <a:spcPts val="2200"/>
+              </a:lnSpc>
+              <a:spcAft>
+                <a:spcPts val="400"/>
+              </a:spcAft>
+              <a:defRPr sz="2000" b="0">
+                <a:solidFill>
+                  <a:srgbClr val="333333"/>
+                </a:solidFill>
+                <a:latin typeface="Consolas"/>
+              </a:defRPr>
+            </a:pPr>
+          </a:p>
+          <a:p>
+            <a:pPr>
+              <a:lnSpc>
+                <a:spcPts val="2200"/>
+              </a:lnSpc>
+              <a:spcAft>
+                <a:spcPts val="400"/>
+              </a:spcAft>
+              <a:defRPr sz="2000" b="0">
+                <a:solidFill>
+                  <a:srgbClr val="333333"/>
+                </a:solidFill>
+                <a:latin typeface="Consolas"/>
+              </a:defRPr>
+            </a:pPr>
+            <a:r>
+              <a:t>module top;</a:t>
+            </a:r>
+          </a:p>
+          <a:p>
+            <a:pPr>
+              <a:lnSpc>
+                <a:spcPts val="2200"/>
+              </a:lnSpc>
+              <a:spcAft>
+                <a:spcPts val="400"/>
+              </a:spcAft>
+              <a:defRPr sz="2000" b="0">
+                <a:solidFill>
+                  <a:srgbClr val="333333"/>
+                </a:solidFill>
+                <a:latin typeface="Consolas"/>
+              </a:defRPr>
+            </a:pPr>
+            <a:r>
+              <a:t>    initial begin</a:t>
+            </a:r>
+          </a:p>
+          <a:p>
+            <a:pPr>
+              <a:lnSpc>
+                <a:spcPts val="2200"/>
+              </a:lnSpc>
+              <a:spcAft>
+                <a:spcPts val="400"/>
+              </a:spcAft>
+              <a:defRPr sz="2000" b="0">
+                <a:solidFill>
+                  <a:srgbClr val="333333"/>
+                </a:solidFill>
+                <a:latin typeface="Consolas"/>
+              </a:defRPr>
+            </a:pPr>
+            <a:r>
+              <a:t>        $display("=== Module 8: Version timeline ===");</a:t>
+            </a:r>
+          </a:p>
+          <a:p>
+            <a:pPr>
+              <a:lnSpc>
+                <a:spcPts val="2200"/>
+              </a:lnSpc>
+              <a:spcAft>
+                <a:spcPts val="400"/>
+              </a:spcAft>
+              <a:defRPr sz="2000" b="0">
+                <a:solidFill>
+                  <a:srgbClr val="333333"/>
+                </a:solidFill>
+                <a:latin typeface="Consolas"/>
+              </a:defRPr>
+            </a:pPr>
+            <a:r>
+              <a:t>        $display("  1364-1995 | 1995 | First Verilog; base language</a:t>
+            </a:r>
+          </a:p>
+          <a:p>
+            <a:pPr>
+              <a:lnSpc>
+                <a:spcPts val="2200"/>
+              </a:lnSpc>
+              <a:spcAft>
+                <a:spcPts val="400"/>
+              </a:spcAft>
+              <a:defRPr sz="2000" b="0">
+                <a:solidFill>
+                  <a:srgbClr val="333333"/>
+                </a:solidFill>
+                <a:latin typeface="Consolas"/>
+              </a:defRPr>
+            </a:pPr>
+            <a:r>
+              <a:t>| Module 1");</a:t>
+            </a:r>
+          </a:p>
+          <a:p>
+            <a:pPr>
+              <a:lnSpc>
+                <a:spcPts val="2200"/>
+              </a:lnSpc>
+              <a:spcAft>
+                <a:spcPts val="400"/>
+              </a:spcAft>
+              <a:defRPr sz="2000" b="0">
+                <a:solidFill>
+                  <a:srgbClr val="333333"/>
+                </a:solidFill>
+                <a:latin typeface="Consolas"/>
+              </a:defRPr>
+            </a:pPr>
+            <a:r>
+              <a:t>        $display("  1364-2001 | 2001 | ANSI, @*, generate, signed</a:t>
+            </a:r>
+          </a:p>
+          <a:p>
+            <a:pPr>
+              <a:lnSpc>
+                <a:spcPts val="2200"/>
+              </a:lnSpc>
+              <a:spcAft>
+                <a:spcPts val="400"/>
+              </a:spcAft>
+              <a:defRPr sz="2000" b="0">
+                <a:solidFill>
+                  <a:srgbClr val="333333"/>
+                </a:solidFill>
+                <a:latin typeface="Consolas"/>
+              </a:defRPr>
+            </a:pPr>
+            <a:r>
+              <a:t>| Module 2");</a:t>
+            </a:r>
+          </a:p>
+          <a:p>
+            <a:pPr>
+              <a:lnSpc>
+                <a:spcPts val="2200"/>
+              </a:lnSpc>
+              <a:spcAft>
+                <a:spcPts val="400"/>
+              </a:spcAft>
+              <a:defRPr sz="2000" b="0">
+                <a:solidFill>
+                  <a:srgbClr val="333333"/>
+                </a:solidFill>
+                <a:latin typeface="Consolas"/>
+              </a:defRPr>
+            </a:pPr>
+            <a:r>
+              <a:t>        $display("  1364-2005 | 2005 | Last Verilog-only; defparam</a:t>
+            </a:r>
+          </a:p>
+          <a:p>
+            <a:pPr>
+              <a:lnSpc>
+                <a:spcPts val="2200"/>
+              </a:lnSpc>
+              <a:spcAft>
+                <a:spcPts val="400"/>
+              </a:spcAft>
+              <a:defRPr sz="2000" b="0">
+                <a:solidFill>
+                  <a:srgbClr val="333333"/>
+                </a:solidFill>
+                <a:latin typeface="Consolas"/>
+              </a:defRPr>
+            </a:pPr>
+            <a:r>
+              <a:t>deprecated  | Module 3");</a:t>
+            </a:r>
+          </a:p>
+          <a:p>
+            <a:pPr>
+              <a:lnSpc>
+                <a:spcPts val="2200"/>
+              </a:lnSpc>
+              <a:spcAft>
+                <a:spcPts val="400"/>
+              </a:spcAft>
+              <a:defRPr sz="2000" b="0">
+                <a:solidFill>
+                  <a:srgbClr val="333333"/>
+                </a:solidFill>
+                <a:latin typeface="Consolas"/>
+              </a:defRPr>
+            </a:pPr>
+            <a:r>
+              <a:t>        $display("  1800-2005 | 2005 | First SystemVerilog; logic,</a:t>
+            </a:r>
+          </a:p>
+          <a:p>
+            <a:pPr>
+              <a:lnSpc>
+                <a:spcPts val="2200"/>
+              </a:lnSpc>
+              <a:spcAft>
+                <a:spcPts val="400"/>
+              </a:spcAft>
+              <a:defRPr sz="2000" b="0">
+                <a:solidFill>
+                  <a:srgbClr val="333333"/>
+                </a:solidFill>
+                <a:latin typeface="Consolas"/>
+              </a:defRPr>
+            </a:pPr>
+            <a:r>
+              <a:t>always_comb/ff | Module 4");</a:t>
+            </a:r>
+          </a:p>
+          <a:p>
+            <a:pPr>
+              <a:lnSpc>
+                <a:spcPts val="2200"/>
+              </a:lnSpc>
+              <a:spcAft>
+                <a:spcPts val="400"/>
+              </a:spcAft>
+              <a:defRPr sz="2000" b="0">
+                <a:solidFill>
+                  <a:srgbClr val="333333"/>
+                </a:solidFill>
+                <a:latin typeface="Consolas"/>
+              </a:defRPr>
+            </a:pPr>
+            <a:r>
+              <a:t>        $display("  1800-2009 | 2009 | Interface refinements;</a:t>
+            </a:r>
+          </a:p>
+          <a:p>
+            <a:pPr>
+              <a:lnSpc>
+                <a:spcPts val="2200"/>
+              </a:lnSpc>
+              <a:spcAft>
+                <a:spcPts val="400"/>
+              </a:spcAft>
+              <a:defRPr sz="2000" b="0">
+                <a:solidFill>
+                  <a:srgbClr val="333333"/>
+                </a:solidFill>
+                <a:latin typeface="Consolas"/>
+              </a:defRPr>
+            </a:pPr>
+            <a:r>
+              <a:t>clarifications   | Module 5");</a:t>
+            </a:r>
+          </a:p>
+        </p:txBody>
+      </p:sp>
+      <p:sp>
+        <p:nvSpPr>
+          <p:cNvPr id="4" name="TextBox 3"/>
           <p:cNvSpPr txBox="1"/>
           <p:nvPr/>
         </p:nvSpPr>
@@ -7244,8 +8558,8 @@
         </p:nvSpPr>
         <p:spPr>
           <a:xfrm>
-            <a:off x="548640" y="411480"/>
-            <a:ext cx="11064240" cy="777240"/>
+            <a:off x="548640" y="2743200"/>
+            <a:ext cx="11064240" cy="1371600"/>
           </a:xfrm>
           <a:prstGeom prst="rect">
             <a:avLst/>
@@ -7258,11 +8572,11 @@
           </a:bodyPr>
           <a:lstStyle/>
           <a:p>
-            <a:pPr>
-              <a:lnSpc>
-                <a:spcPts val="2200"/>
-              </a:lnSpc>
-              <a:defRPr sz="2800" b="1">
+            <a:pPr algn="ctr">
+              <a:lnSpc>
+                <a:spcPts val="2200"/>
+              </a:lnSpc>
+              <a:defRPr sz="3600" b="1">
                 <a:solidFill>
                   <a:srgbClr val="1A1A2E"/>
                 </a:solidFill>
@@ -7270,7 +8584,7 @@
               </a:defRPr>
             </a:pPr>
             <a:r>
-              <a:t>Demo: Course Map</a:t>
+              <a:t>Syllabus topics</a:t>
             </a:r>
           </a:p>
         </p:txBody>
@@ -7278,74 +8592,6 @@
       <p:sp>
         <p:nvSpPr>
           <p:cNvPr id="3" name="TextBox 2"/>
-          <p:cNvSpPr txBox="1"/>
-          <p:nvPr/>
-        </p:nvSpPr>
-        <p:spPr>
-          <a:xfrm>
-            <a:off x="548640" y="1051560"/>
-            <a:ext cx="11064240" cy="914400"/>
-          </a:xfrm>
-          <a:prstGeom prst="rect">
-            <a:avLst/>
-          </a:prstGeom>
-          <a:solidFill>
-            <a:srgbClr val="F4F4F4"/>
-          </a:solidFill>
-        </p:spPr>
-        <p:txBody>
-          <a:bodyPr wrap="square">
-            <a:noAutofit/>
-          </a:bodyPr>
-          <a:lstStyle/>
-          <a:p>
-            <a:pPr>
-              <a:lnSpc>
-                <a:spcPts val="2200"/>
-              </a:lnSpc>
-              <a:spcAft>
-                <a:spcPts val="200"/>
-              </a:spcAft>
-              <a:defRPr sz="2000" b="0">
-                <a:solidFill>
-                  <a:srgbClr val="333333"/>
-                </a:solidFill>
-                <a:latin typeface="Consolas"/>
-              </a:defRPr>
-            </a:pPr>
-            <a:r>
-              <a:t>$ cd module8/examples/course_map &amp;&amp; make clean &amp;&amp; make run</a:t>
-            </a:r>
-          </a:p>
-        </p:txBody>
-      </p:sp>
-      <p:pic>
-        <p:nvPicPr>
-          <p:cNvPr id="4" name="Picture 3" descr="ex02_course_map.png"/>
-          <p:cNvPicPr>
-            <a:picLocks noChangeAspect="1"/>
-          </p:cNvPicPr>
-          <p:nvPr/>
-        </p:nvPicPr>
-        <p:blipFill>
-          <a:blip r:embed="rId2"/>
-          <a:stretch>
-            <a:fillRect/>
-          </a:stretch>
-        </p:blipFill>
-        <p:spPr>
-          <a:xfrm>
-            <a:off x="548640" y="1965960"/>
-            <a:ext cx="7071358" cy="3977639"/>
-          </a:xfrm>
-          <a:prstGeom prst="rect">
-            <a:avLst/>
-          </a:prstGeom>
-        </p:spPr>
-      </p:pic>
-      <p:sp>
-        <p:nvSpPr>
-          <p:cNvPr id="5" name="TextBox 4"/>
           <p:cNvSpPr txBox="1"/>
           <p:nvPr/>
         </p:nvSpPr>
@@ -7434,7 +8680,7 @@
               </a:defRPr>
             </a:pPr>
             <a:r>
-              <a:t>Demo: Design Subset</a:t>
+              <a:t>1. Version Timeline (One Table)</a:t>
             </a:r>
           </a:p>
         </p:txBody>
@@ -7447,15 +8693,13 @@
         </p:nvSpPr>
         <p:spPr>
           <a:xfrm>
-            <a:off x="548640" y="1051560"/>
-            <a:ext cx="11064240" cy="914400"/>
-          </a:xfrm>
-          <a:prstGeom prst="rect">
-            <a:avLst/>
-          </a:prstGeom>
-          <a:solidFill>
-            <a:srgbClr val="F4F4F4"/>
-          </a:solidFill>
+            <a:off x="548640" y="1234440"/>
+            <a:ext cx="11064240" cy="4937760"/>
+          </a:xfrm>
+          <a:prstGeom prst="rect">
+            <a:avLst/>
+          </a:prstGeom>
+          <a:noFill/>
         </p:spPr>
         <p:txBody>
           <a:bodyPr wrap="square">
@@ -7468,48 +8712,24 @@
                 <a:spcPts val="2200"/>
               </a:lnSpc>
               <a:spcAft>
-                <a:spcPts val="200"/>
-              </a:spcAft>
-              <a:defRPr sz="2000" b="0">
-                <a:solidFill>
-                  <a:srgbClr val="333333"/>
-                </a:solidFill>
-                <a:latin typeface="Consolas"/>
-              </a:defRPr>
-            </a:pPr>
-            <a:r>
-              <a:t>$ cd module8/examples/design_subset &amp;&amp; make clean &amp;&amp; make run</a:t>
-            </a:r>
-          </a:p>
-        </p:txBody>
-      </p:sp>
-      <p:pic>
-        <p:nvPicPr>
-          <p:cNvPr id="4" name="Picture 3" descr="ex03_design_subset.png"/>
-          <p:cNvPicPr>
-            <a:picLocks noChangeAspect="1"/>
-          </p:cNvPicPr>
-          <p:nvPr/>
-        </p:nvPicPr>
-        <p:blipFill>
-          <a:blip r:embed="rId2"/>
-          <a:stretch>
-            <a:fillRect/>
-          </a:stretch>
-        </p:blipFill>
-        <p:spPr>
-          <a:xfrm>
-            <a:off x="548640" y="1965960"/>
-            <a:ext cx="7071358" cy="3977639"/>
-          </a:xfrm>
-          <a:prstGeom prst="rect">
-            <a:avLst/>
-          </a:prstGeom>
-        </p:spPr>
-      </p:pic>
-      <p:sp>
-        <p:nvSpPr>
-          <p:cNvPr id="5" name="TextBox 4"/>
+                <a:spcPts val="1000"/>
+              </a:spcAft>
+              <a:defRPr sz="2000" b="0">
+                <a:solidFill>
+                  <a:srgbClr val="333333"/>
+                </a:solidFill>
+                <a:latin typeface="Calibri"/>
+              </a:defRPr>
+            </a:pPr>
+            <a:r>
+              <a:t>• See docs/MODULE8.md</a:t>
+            </a:r>
+          </a:p>
+        </p:txBody>
+      </p:sp>
+      <p:sp>
+        <p:nvSpPr>
+          <p:cNvPr id="4" name="TextBox 3"/>
           <p:cNvSpPr txBox="1"/>
           <p:nvPr/>
         </p:nvSpPr>
@@ -7572,8 +8792,8 @@
         </p:nvSpPr>
         <p:spPr>
           <a:xfrm>
-            <a:off x="548640" y="411480"/>
-            <a:ext cx="11064240" cy="777240"/>
+            <a:off x="548640" y="2743200"/>
+            <a:ext cx="11064240" cy="1371600"/>
           </a:xfrm>
           <a:prstGeom prst="rect">
             <a:avLst/>
@@ -7586,11 +8806,11 @@
           </a:bodyPr>
           <a:lstStyle/>
           <a:p>
-            <a:pPr>
-              <a:lnSpc>
-                <a:spcPts val="2200"/>
-              </a:lnSpc>
-              <a:defRPr sz="2800" b="1">
+            <a:pPr algn="ctr">
+              <a:lnSpc>
+                <a:spcPts val="2200"/>
+              </a:lnSpc>
+              <a:defRPr sz="3600" b="1">
                 <a:solidFill>
                   <a:srgbClr val="1A1A2E"/>
                 </a:solidFill>
@@ -7598,7 +8818,7 @@
               </a:defRPr>
             </a:pPr>
             <a:r>
-              <a:t>Demo: Learning Path</a:t>
+              <a:t>Hands-on examples</a:t>
             </a:r>
           </a:p>
         </p:txBody>
@@ -7606,74 +8826,6 @@
       <p:sp>
         <p:nvSpPr>
           <p:cNvPr id="3" name="TextBox 2"/>
-          <p:cNvSpPr txBox="1"/>
-          <p:nvPr/>
-        </p:nvSpPr>
-        <p:spPr>
-          <a:xfrm>
-            <a:off x="548640" y="1051560"/>
-            <a:ext cx="11064240" cy="914400"/>
-          </a:xfrm>
-          <a:prstGeom prst="rect">
-            <a:avLst/>
-          </a:prstGeom>
-          <a:solidFill>
-            <a:srgbClr val="F4F4F4"/>
-          </a:solidFill>
-        </p:spPr>
-        <p:txBody>
-          <a:bodyPr wrap="square">
-            <a:noAutofit/>
-          </a:bodyPr>
-          <a:lstStyle/>
-          <a:p>
-            <a:pPr>
-              <a:lnSpc>
-                <a:spcPts val="2200"/>
-              </a:lnSpc>
-              <a:spcAft>
-                <a:spcPts val="200"/>
-              </a:spcAft>
-              <a:defRPr sz="2000" b="0">
-                <a:solidFill>
-                  <a:srgbClr val="333333"/>
-                </a:solidFill>
-                <a:latin typeface="Consolas"/>
-              </a:defRPr>
-            </a:pPr>
-            <a:r>
-              <a:t>$ cd module8/examples/learning_path &amp;&amp; make clean &amp;&amp; make run</a:t>
-            </a:r>
-          </a:p>
-        </p:txBody>
-      </p:sp>
-      <p:pic>
-        <p:nvPicPr>
-          <p:cNvPr id="4" name="Picture 3" descr="ex04_learning_path.png"/>
-          <p:cNvPicPr>
-            <a:picLocks noChangeAspect="1"/>
-          </p:cNvPicPr>
-          <p:nvPr/>
-        </p:nvPicPr>
-        <p:blipFill>
-          <a:blip r:embed="rId2"/>
-          <a:stretch>
-            <a:fillRect/>
-          </a:stretch>
-        </p:blipFill>
-        <p:spPr>
-          <a:xfrm>
-            <a:off x="548640" y="1965960"/>
-            <a:ext cx="7071358" cy="3977639"/>
-          </a:xfrm>
-          <a:prstGeom prst="rect">
-            <a:avLst/>
-          </a:prstGeom>
-        </p:spPr>
-      </p:pic>
-      <p:sp>
-        <p:nvSpPr>
-          <p:cNvPr id="5" name="TextBox 4"/>
           <p:cNvSpPr txBox="1"/>
           <p:nvPr/>
         </p:nvSpPr>
@@ -7762,7 +8914,7 @@
               </a:defRPr>
             </a:pPr>
             <a:r>
-              <a:t>Demo: Migration Steps</a:t>
+              <a:t>Module 8 toolchain check</a:t>
             </a:r>
           </a:p>
         </p:txBody>
@@ -7806,14 +8958,33 @@
               </a:defRPr>
             </a:pPr>
             <a:r>
-              <a:t>$ cd module8/examples/migration_steps &amp;&amp; make clean &amp;&amp; make run</a:t>
+              <a:t>$ command -v iverilog &gt;/dev/null &amp;&amp; echo "Toolchain ready: $(iverilog</a:t>
+            </a:r>
+          </a:p>
+          <a:p>
+            <a:pPr>
+              <a:lnSpc>
+                <a:spcPts val="2200"/>
+              </a:lnSpc>
+              <a:spcAft>
+                <a:spcPts val="200"/>
+              </a:spcAft>
+              <a:defRPr sz="2000" b="0">
+                <a:solidFill>
+                  <a:srgbClr val="333333"/>
+                </a:solidFill>
+                <a:latin typeface="Consolas"/>
+              </a:defRPr>
+            </a:pPr>
+            <a:r>
+              <a:t>      -V 2&gt;&amp;1 | head -1)"</a:t>
             </a:r>
           </a:p>
         </p:txBody>
       </p:sp>
       <p:pic>
         <p:nvPicPr>
-          <p:cNvPr id="4" name="Picture 3" descr="ex05_migration_steps.png"/>
+          <p:cNvPr id="4" name="Picture 3" descr="module8_check.png"/>
           <p:cNvPicPr>
             <a:picLocks noChangeAspect="1"/>
           </p:cNvPicPr>
@@ -7926,7 +9097,7 @@
               </a:defRPr>
             </a:pPr>
             <a:r>
-              <a:t>Demo: Pitfalls</a:t>
+              <a:t>Demo: One-page cheat sheet (version timeline, subsets, migration, ver…</a:t>
             </a:r>
           </a:p>
         </p:txBody>
@@ -7970,14 +9141,14 @@
               </a:defRPr>
             </a:pPr>
             <a:r>
-              <a:t>$ cd module8/examples/pitfalls &amp;&amp; make clean &amp;&amp; make run</a:t>
+              <a:t>$ cd module8/examples &amp;&amp; make clean &amp;&amp; make run</a:t>
             </a:r>
           </a:p>
         </p:txBody>
       </p:sp>
       <p:pic>
         <p:nvPicPr>
-          <p:cNvPr id="4" name="Picture 3" descr="ex06_pitfalls.png"/>
+          <p:cNvPr id="4" name="Picture 3" descr="ex01_quick_ref.png"/>
           <p:cNvPicPr>
             <a:picLocks noChangeAspect="1"/>
           </p:cNvPicPr>
@@ -8090,7 +9261,7 @@
               </a:defRPr>
             </a:pPr>
             <a:r>
-              <a:t>Demo: Synthesizable Subset</a:t>
+              <a:t>Demo: Version timeline (standard, year, role, module)</a:t>
             </a:r>
           </a:p>
         </p:txBody>
@@ -8134,14 +9305,14 @@
               </a:defRPr>
             </a:pPr>
             <a:r>
-              <a:t>$ cd module8/examples/synthesizable_subset &amp;&amp; make clean &amp;&amp; make run</a:t>
+              <a:t>$ cd module8/examples/version_timeline &amp;&amp; make clean &amp;&amp; make run</a:t>
             </a:r>
           </a:p>
         </p:txBody>
       </p:sp>
       <p:pic>
         <p:nvPicPr>
-          <p:cNvPr id="4" name="Picture 3" descr="ex07_synthesizable_subset.png"/>
+          <p:cNvPr id="4" name="Picture 3" descr="ex02_version_timeline.png"/>
           <p:cNvPicPr>
             <a:picLocks noChangeAspect="1"/>
           </p:cNvPicPr>
@@ -8254,7 +9425,7 @@
               </a:defRPr>
             </a:pPr>
             <a:r>
-              <a:t>Demo: Tool Support</a:t>
+              <a:t>Demo: Verilog-only vs SystemVerilog design subset (ports, types, comb…</a:t>
             </a:r>
           </a:p>
         </p:txBody>
@@ -8298,14 +9469,14 @@
               </a:defRPr>
             </a:pPr>
             <a:r>
-              <a:t>$ cd module8/examples/tool_support &amp;&amp; make clean &amp;&amp; make run</a:t>
+              <a:t>$ cd module8/examples/design_subset &amp;&amp; make clean &amp;&amp; make run</a:t>
             </a:r>
           </a:p>
         </p:txBody>
       </p:sp>
       <p:pic>
         <p:nvPicPr>
-          <p:cNvPr id="4" name="Picture 3" descr="ex08_tool_support.png"/>
+          <p:cNvPr id="4" name="Picture 3" descr="ex03_design_subset.png"/>
           <p:cNvPicPr>
             <a:picLocks noChangeAspect="1"/>
           </p:cNvPicPr>
@@ -8418,7 +9589,7 @@
               </a:defRPr>
             </a:pPr>
             <a:r>
-              <a:t>Demo: Version Selection</a:t>
+              <a:t>Demo: Tool support summary (simulators, synthesis, lint, formal; Icar…</a:t>
             </a:r>
           </a:p>
         </p:txBody>
@@ -8462,14 +9633,14 @@
               </a:defRPr>
             </a:pPr>
             <a:r>
-              <a:t>$ cd module8/examples/version_selection &amp;&amp; make clean &amp;&amp; make run</a:t>
+              <a:t>$ cd module8/examples/tool_support &amp;&amp; make clean &amp;&amp; make run</a:t>
             </a:r>
           </a:p>
         </p:txBody>
       </p:sp>
       <p:pic>
         <p:nvPicPr>
-          <p:cNvPr id="4" name="Picture 3" descr="ex09_version_selection.png"/>
+          <p:cNvPr id="4" name="Picture 3" descr="ex04_tool_support.png"/>
           <p:cNvPicPr>
             <a:picLocks noChangeAspect="1"/>
           </p:cNvPicPr>
@@ -8720,7 +9891,7 @@
               </a:defRPr>
             </a:pPr>
             <a:r>
-              <a:t>Demo: Version Timeline</a:t>
+              <a:t>Demo: "Which standard has X?" for key constructs (logic, always_comb,…</a:t>
             </a:r>
           </a:p>
         </p:txBody>
@@ -8764,14 +9935,14 @@
               </a:defRPr>
             </a:pPr>
             <a:r>
-              <a:t>$ cd module8/examples/version_timeline &amp;&amp; make clean &amp;&amp; make run</a:t>
+              <a:t>$ cd module8/examples/construct_lookup &amp;&amp; make clean &amp;&amp; make run</a:t>
             </a:r>
           </a:p>
         </p:txBody>
       </p:sp>
       <p:pic>
         <p:nvPicPr>
-          <p:cNvPr id="4" name="Picture 3" descr="ex10_version_timeline.png"/>
+          <p:cNvPr id="4" name="Picture 3" descr="ex05_construct_lookup.png"/>
           <p:cNvPicPr>
             <a:picLocks noChangeAspect="1"/>
           </p:cNvPicPr>
@@ -8858,8 +10029,8 @@
         </p:nvSpPr>
         <p:spPr>
           <a:xfrm>
-            <a:off x="548640" y="2743200"/>
-            <a:ext cx="11064240" cy="1371600"/>
+            <a:off x="548640" y="411480"/>
+            <a:ext cx="11064240" cy="777240"/>
           </a:xfrm>
           <a:prstGeom prst="rect">
             <a:avLst/>
@@ -8872,11 +10043,11 @@
           </a:bodyPr>
           <a:lstStyle/>
           <a:p>
-            <a:pPr algn="ctr">
-              <a:lnSpc>
-                <a:spcPts val="2200"/>
-              </a:lnSpc>
-              <a:defRPr sz="3600" b="1">
+            <a:pPr>
+              <a:lnSpc>
+                <a:spcPts val="2200"/>
+              </a:lnSpc>
+              <a:defRPr sz="2800" b="1">
                 <a:solidFill>
                   <a:srgbClr val="1A1A2E"/>
                 </a:solidFill>
@@ -8884,7 +10055,7 @@
               </a:defRPr>
             </a:pPr>
             <a:r>
-              <a:t>Practice &amp; assessment</a:t>
+              <a:t>Demo: Course map (Modules 1–8 with title and content summary)</a:t>
             </a:r>
           </a:p>
         </p:txBody>
@@ -8892,6 +10063,74 @@
       <p:sp>
         <p:nvSpPr>
           <p:cNvPr id="3" name="TextBox 2"/>
+          <p:cNvSpPr txBox="1"/>
+          <p:nvPr/>
+        </p:nvSpPr>
+        <p:spPr>
+          <a:xfrm>
+            <a:off x="548640" y="1051560"/>
+            <a:ext cx="11064240" cy="914400"/>
+          </a:xfrm>
+          <a:prstGeom prst="rect">
+            <a:avLst/>
+          </a:prstGeom>
+          <a:solidFill>
+            <a:srgbClr val="F4F4F4"/>
+          </a:solidFill>
+        </p:spPr>
+        <p:txBody>
+          <a:bodyPr wrap="square">
+            <a:noAutofit/>
+          </a:bodyPr>
+          <a:lstStyle/>
+          <a:p>
+            <a:pPr>
+              <a:lnSpc>
+                <a:spcPts val="2200"/>
+              </a:lnSpc>
+              <a:spcAft>
+                <a:spcPts val="200"/>
+              </a:spcAft>
+              <a:defRPr sz="2000" b="0">
+                <a:solidFill>
+                  <a:srgbClr val="333333"/>
+                </a:solidFill>
+                <a:latin typeface="Consolas"/>
+              </a:defRPr>
+            </a:pPr>
+            <a:r>
+              <a:t>$ cd module8/examples/course_map &amp;&amp; make clean &amp;&amp; make run</a:t>
+            </a:r>
+          </a:p>
+        </p:txBody>
+      </p:sp>
+      <p:pic>
+        <p:nvPicPr>
+          <p:cNvPr id="4" name="Picture 3" descr="ex06_course_map.png"/>
+          <p:cNvPicPr>
+            <a:picLocks noChangeAspect="1"/>
+          </p:cNvPicPr>
+          <p:nvPr/>
+        </p:nvPicPr>
+        <p:blipFill>
+          <a:blip r:embed="rId2"/>
+          <a:stretch>
+            <a:fillRect/>
+          </a:stretch>
+        </p:blipFill>
+        <p:spPr>
+          <a:xfrm>
+            <a:off x="548640" y="1965960"/>
+            <a:ext cx="7071358" cy="3977639"/>
+          </a:xfrm>
+          <a:prstGeom prst="rect">
+            <a:avLst/>
+          </a:prstGeom>
+        </p:spPr>
+      </p:pic>
+      <p:sp>
+        <p:nvSpPr>
+          <p:cNvPr id="5" name="TextBox 4"/>
           <p:cNvSpPr txBox="1"/>
           <p:nvPr/>
         </p:nvSpPr>
@@ -8980,7 +10219,7 @@
               </a:defRPr>
             </a:pPr>
             <a:r>
-              <a:t>Exercises</a:t>
+              <a:t>Demo: Migration steps (1995→2001, 1364→1800, 1800→1800) and rules of…</a:t>
             </a:r>
           </a:p>
         </p:txBody>
@@ -8993,13 +10232,15 @@
         </p:nvSpPr>
         <p:spPr>
           <a:xfrm>
-            <a:off x="548640" y="1234440"/>
-            <a:ext cx="11064240" cy="4937760"/>
-          </a:xfrm>
-          <a:prstGeom prst="rect">
-            <a:avLst/>
-          </a:prstGeom>
-          <a:noFill/>
+            <a:off x="548640" y="1051560"/>
+            <a:ext cx="11064240" cy="914400"/>
+          </a:xfrm>
+          <a:prstGeom prst="rect">
+            <a:avLst/>
+          </a:prstGeom>
+          <a:solidFill>
+            <a:srgbClr val="F4F4F4"/>
+          </a:solidFill>
         </p:spPr>
         <p:txBody>
           <a:bodyPr wrap="square">
@@ -9012,100 +10253,48 @@
                 <a:spcPts val="2200"/>
               </a:lnSpc>
               <a:spcAft>
-                <a:spcPts val="1000"/>
-              </a:spcAft>
-              <a:defRPr sz="2000" b="0">
-                <a:solidFill>
-                  <a:srgbClr val="333333"/>
-                </a:solidFill>
-                <a:latin typeface="Calibri"/>
-              </a:defRPr>
-            </a:pPr>
-            <a:r>
-              <a:t>• Lookup</a:t>
-            </a:r>
-          </a:p>
-          <a:p>
-            <a:pPr>
-              <a:lnSpc>
-                <a:spcPts val="2200"/>
-              </a:lnSpc>
-              <a:spcAft>
-                <a:spcPts val="1000"/>
-              </a:spcAft>
-              <a:defRPr sz="2000" b="0">
-                <a:solidFill>
-                  <a:srgbClr val="333333"/>
-                </a:solidFill>
-                <a:latin typeface="Calibri"/>
-              </a:defRPr>
-            </a:pPr>
-            <a:r>
-              <a:t>• Subset</a:t>
-            </a:r>
-          </a:p>
-          <a:p>
-            <a:pPr>
-              <a:lnSpc>
-                <a:spcPts val="2200"/>
-              </a:lnSpc>
-              <a:spcAft>
-                <a:spcPts val="1000"/>
-              </a:spcAft>
-              <a:defRPr sz="2000" b="0">
-                <a:solidFill>
-                  <a:srgbClr val="333333"/>
-                </a:solidFill>
-                <a:latin typeface="Calibri"/>
-              </a:defRPr>
-            </a:pPr>
-            <a:r>
-              <a:t>• Migration</a:t>
-            </a:r>
-          </a:p>
-          <a:p>
-            <a:pPr>
-              <a:lnSpc>
-                <a:spcPts val="2200"/>
-              </a:lnSpc>
-              <a:spcAft>
-                <a:spcPts val="1000"/>
-              </a:spcAft>
-              <a:defRPr sz="2000" b="0">
-                <a:solidFill>
-                  <a:srgbClr val="333333"/>
-                </a:solidFill>
-                <a:latin typeface="Calibri"/>
-              </a:defRPr>
-            </a:pPr>
-            <a:r>
-              <a:t>• Course map</a:t>
-            </a:r>
-          </a:p>
-          <a:p>
-            <a:pPr>
-              <a:lnSpc>
-                <a:spcPts val="2200"/>
-              </a:lnSpc>
-              <a:spcAft>
-                <a:spcPts val="1000"/>
-              </a:spcAft>
-              <a:defRPr sz="2000" b="0">
-                <a:solidFill>
-                  <a:srgbClr val="333333"/>
-                </a:solidFill>
-                <a:latin typeface="Calibri"/>
-              </a:defRPr>
-            </a:pPr>
-            <a:r>
-              <a:t>• Cheat sheet</a:t>
-            </a:r>
-          </a:p>
-        </p:txBody>
-      </p:sp>
-      <p:sp>
-        <p:nvSpPr>
-          <p:cNvPr id="4" name="TextBox 3"/>
+                <a:spcPts val="200"/>
+              </a:spcAft>
+              <a:defRPr sz="2000" b="0">
+                <a:solidFill>
+                  <a:srgbClr val="333333"/>
+                </a:solidFill>
+                <a:latin typeface="Consolas"/>
+              </a:defRPr>
+            </a:pPr>
+            <a:r>
+              <a:t>$ cd module8/examples/migration_steps &amp;&amp; make clean &amp;&amp; make run</a:t>
+            </a:r>
+          </a:p>
+        </p:txBody>
+      </p:sp>
+      <p:pic>
+        <p:nvPicPr>
+          <p:cNvPr id="4" name="Picture 3" descr="ex07_migration_steps.png"/>
+          <p:cNvPicPr>
+            <a:picLocks noChangeAspect="1"/>
+          </p:cNvPicPr>
+          <p:nvPr/>
+        </p:nvPicPr>
+        <p:blipFill>
+          <a:blip r:embed="rId2"/>
+          <a:stretch>
+            <a:fillRect/>
+          </a:stretch>
+        </p:blipFill>
+        <p:spPr>
+          <a:xfrm>
+            <a:off x="548640" y="1965960"/>
+            <a:ext cx="7071358" cy="3977639"/>
+          </a:xfrm>
+          <a:prstGeom prst="rect">
+            <a:avLst/>
+          </a:prstGeom>
+        </p:spPr>
+      </p:pic>
+      <p:sp>
+        <p:nvSpPr>
+          <p:cNvPr id="5" name="TextBox 4"/>
           <p:cNvSpPr txBox="1"/>
           <p:nvPr/>
         </p:nvSpPr>
@@ -9194,7 +10383,7 @@
               </a:defRPr>
             </a:pPr>
             <a:r>
-              <a:t>Exercises</a:t>
+              <a:t>Demo: Synthesizable do/avoid (assign, always_comb/@*, single driver;…</a:t>
             </a:r>
           </a:p>
         </p:txBody>
@@ -9207,13 +10396,15 @@
         </p:nvSpPr>
         <p:spPr>
           <a:xfrm>
-            <a:off x="548640" y="1234440"/>
-            <a:ext cx="11064240" cy="4937760"/>
-          </a:xfrm>
-          <a:prstGeom prst="rect">
-            <a:avLst/>
-          </a:prstGeom>
-          <a:noFill/>
+            <a:off x="548640" y="1051560"/>
+            <a:ext cx="11064240" cy="914400"/>
+          </a:xfrm>
+          <a:prstGeom prst="rect">
+            <a:avLst/>
+          </a:prstGeom>
+          <a:solidFill>
+            <a:srgbClr val="F4F4F4"/>
+          </a:solidFill>
         </p:spPr>
         <p:txBody>
           <a:bodyPr wrap="square">
@@ -9226,119 +10417,48 @@
                 <a:spcPts val="2200"/>
               </a:lnSpc>
               <a:spcAft>
-                <a:spcPts val="1000"/>
-              </a:spcAft>
-              <a:defRPr sz="2000" b="0">
-                <a:solidFill>
-                  <a:srgbClr val="333333"/>
-                </a:solidFill>
-                <a:latin typeface="Calibri"/>
-              </a:defRPr>
-            </a:pPr>
-            <a:r>
-              <a:t>• Assuming a construct is in an older standard</a:t>
-            </a:r>
-          </a:p>
-          <a:p>
-            <a:pPr>
-              <a:lnSpc>
-                <a:spcPts val="2200"/>
-              </a:lnSpc>
-              <a:spcAft>
-                <a:spcPts val="1000"/>
-              </a:spcAft>
-              <a:defRPr sz="2000" b="0">
-                <a:solidFill>
-                  <a:srgbClr val="333333"/>
-                </a:solidFill>
-                <a:latin typeface="Calibri"/>
-              </a:defRPr>
-            </a:pPr>
-            <a:r>
-              <a:t>• Mixing subsets without a rule</a:t>
-            </a:r>
-          </a:p>
-          <a:p>
-            <a:pPr>
-              <a:lnSpc>
-                <a:spcPts val="2200"/>
-              </a:lnSpc>
-              <a:spcAft>
-                <a:spcPts val="1000"/>
-              </a:spcAft>
-              <a:defRPr sz="2000" b="0">
-                <a:solidFill>
-                  <a:srgbClr val="333333"/>
-                </a:solidFill>
-                <a:latin typeface="Calibri"/>
-              </a:defRPr>
-            </a:pPr>
-            <a:r>
-              <a:t>• Skipping regression after migration</a:t>
-            </a:r>
-          </a:p>
-          <a:p>
-            <a:pPr>
-              <a:lnSpc>
-                <a:spcPts val="2200"/>
-              </a:lnSpc>
-              <a:spcAft>
-                <a:spcPts val="1000"/>
-              </a:spcAft>
-              <a:defRPr sz="2000" b="0">
-                <a:solidFill>
-                  <a:srgbClr val="333333"/>
-                </a:solidFill>
-                <a:latin typeface="Calibri"/>
-              </a:defRPr>
-            </a:pPr>
-            <a:r>
-              <a:t>• Forgetting tool support</a:t>
-            </a:r>
-          </a:p>
-          <a:p>
-            <a:pPr>
-              <a:lnSpc>
-                <a:spcPts val="2200"/>
-              </a:lnSpc>
-              <a:spcAft>
-                <a:spcPts val="1000"/>
-              </a:spcAft>
-              <a:defRPr sz="2000" b="0">
-                <a:solidFill>
-                  <a:srgbClr val="333333"/>
-                </a:solidFill>
-                <a:latin typeface="Calibri"/>
-              </a:defRPr>
-            </a:pPr>
-            <a:r>
-              <a:t>• Treating this module as a replacement for Modules</a:t>
-            </a:r>
-          </a:p>
-          <a:p>
-            <a:pPr>
-              <a:lnSpc>
-                <a:spcPts val="2200"/>
-              </a:lnSpc>
-              <a:spcAft>
-                <a:spcPts val="1000"/>
-              </a:spcAft>
-              <a:defRPr sz="2000" b="0">
-                <a:solidFill>
-                  <a:srgbClr val="333333"/>
-                </a:solidFill>
-                <a:latin typeface="Calibri"/>
-              </a:defRPr>
-            </a:pPr>
-            <a:r>
-              <a:t>      1–7</a:t>
-            </a:r>
-          </a:p>
-        </p:txBody>
-      </p:sp>
-      <p:sp>
-        <p:nvSpPr>
-          <p:cNvPr id="4" name="TextBox 3"/>
+                <a:spcPts val="200"/>
+              </a:spcAft>
+              <a:defRPr sz="2000" b="0">
+                <a:solidFill>
+                  <a:srgbClr val="333333"/>
+                </a:solidFill>
+                <a:latin typeface="Consolas"/>
+              </a:defRPr>
+            </a:pPr>
+            <a:r>
+              <a:t>$ cd module8/examples/synthesizable_subset &amp;&amp; make clean &amp;&amp; make run</a:t>
+            </a:r>
+          </a:p>
+        </p:txBody>
+      </p:sp>
+      <p:pic>
+        <p:nvPicPr>
+          <p:cNvPr id="4" name="Picture 3" descr="ex08_synthesizable_subset.png"/>
+          <p:cNvPicPr>
+            <a:picLocks noChangeAspect="1"/>
+          </p:cNvPicPr>
+          <p:nvPr/>
+        </p:nvPicPr>
+        <p:blipFill>
+          <a:blip r:embed="rId2"/>
+          <a:stretch>
+            <a:fillRect/>
+          </a:stretch>
+        </p:blipFill>
+        <p:spPr>
+          <a:xfrm>
+            <a:off x="548640" y="1965960"/>
+            <a:ext cx="7071358" cy="3977639"/>
+          </a:xfrm>
+          <a:prstGeom prst="rect">
+            <a:avLst/>
+          </a:prstGeom>
+        </p:spPr>
+      </p:pic>
+      <p:sp>
+        <p:nvSpPr>
+          <p:cNvPr id="5" name="TextBox 4"/>
           <p:cNvSpPr txBox="1"/>
           <p:nvPr/>
         </p:nvSpPr>
@@ -9427,7 +10547,7 @@
               </a:defRPr>
             </a:pPr>
             <a:r>
-              <a:t>Summary &amp; next steps</a:t>
+              <a:t>Demo: Version selection (match tools/IP, state one revision and subse…</a:t>
             </a:r>
           </a:p>
         </p:txBody>
@@ -9440,13 +10560,15 @@
         </p:nvSpPr>
         <p:spPr>
           <a:xfrm>
-            <a:off x="548640" y="1234440"/>
-            <a:ext cx="11064240" cy="4937760"/>
-          </a:xfrm>
-          <a:prstGeom prst="rect">
-            <a:avLst/>
-          </a:prstGeom>
-          <a:noFill/>
+            <a:off x="548640" y="1051560"/>
+            <a:ext cx="11064240" cy="914400"/>
+          </a:xfrm>
+          <a:prstGeom prst="rect">
+            <a:avLst/>
+          </a:prstGeom>
+          <a:solidFill>
+            <a:srgbClr val="F4F4F4"/>
+          </a:solidFill>
         </p:spPr>
         <p:txBody>
           <a:bodyPr wrap="square">
@@ -9459,6 +10581,592 @@
                 <a:spcPts val="2200"/>
               </a:lnSpc>
               <a:spcAft>
+                <a:spcPts val="200"/>
+              </a:spcAft>
+              <a:defRPr sz="2000" b="0">
+                <a:solidFill>
+                  <a:srgbClr val="333333"/>
+                </a:solidFill>
+                <a:latin typeface="Consolas"/>
+              </a:defRPr>
+            </a:pPr>
+            <a:r>
+              <a:t>$ cd module8/examples/version_selection &amp;&amp; make clean &amp;&amp; make run</a:t>
+            </a:r>
+          </a:p>
+        </p:txBody>
+      </p:sp>
+      <p:pic>
+        <p:nvPicPr>
+          <p:cNvPr id="4" name="Picture 3" descr="ex09_version_selection.png"/>
+          <p:cNvPicPr>
+            <a:picLocks noChangeAspect="1"/>
+          </p:cNvPicPr>
+          <p:nvPr/>
+        </p:nvPicPr>
+        <p:blipFill>
+          <a:blip r:embed="rId2"/>
+          <a:stretch>
+            <a:fillRect/>
+          </a:stretch>
+        </p:blipFill>
+        <p:spPr>
+          <a:xfrm>
+            <a:off x="548640" y="1965960"/>
+            <a:ext cx="7071358" cy="3977639"/>
+          </a:xfrm>
+          <a:prstGeom prst="rect">
+            <a:avLst/>
+          </a:prstGeom>
+        </p:spPr>
+      </p:pic>
+      <p:sp>
+        <p:nvSpPr>
+          <p:cNvPr id="5" name="TextBox 4"/>
+          <p:cNvSpPr txBox="1"/>
+          <p:nvPr/>
+        </p:nvSpPr>
+        <p:spPr>
+          <a:xfrm>
+            <a:off x="548640" y="6355080"/>
+            <a:ext cx="11064240" cy="320040"/>
+          </a:xfrm>
+          <a:prstGeom prst="rect">
+            <a:avLst/>
+          </a:prstGeom>
+          <a:noFill/>
+        </p:spPr>
+        <p:txBody>
+          <a:bodyPr wrap="square">
+            <a:noAutofit/>
+          </a:bodyPr>
+          <a:lstStyle/>
+          <a:p>
+            <a:pPr algn="r">
+              <a:lnSpc>
+                <a:spcPts val="2200"/>
+              </a:lnSpc>
+              <a:defRPr sz="1000" b="0">
+                <a:solidFill>
+                  <a:srgbClr val="666666"/>
+                </a:solidFill>
+                <a:latin typeface="Calibri"/>
+              </a:defRPr>
+            </a:pPr>
+            <a:r>
+              <a:t>learn_verilog_systemverilog / Module 8</a:t>
+            </a:r>
+          </a:p>
+        </p:txBody>
+      </p:sp>
+    </p:spTree>
+  </p:cSld>
+  <p:clrMapOvr>
+    <a:masterClrMapping/>
+  </p:clrMapOvr>
+</p:sld>
+</file>
+
+<file path=ppt/slides/slide35.xml><?xml version="1.0" encoding="utf-8"?>
+<p:sld xmlns:a="http://schemas.openxmlformats.org/drawingml/2006/main" xmlns:p="http://schemas.openxmlformats.org/presentationml/2006/main" xmlns:r="http://schemas.openxmlformats.org/officeDocument/2006/relationships">
+  <p:cSld>
+    <p:spTree>
+      <p:nvGrpSpPr>
+        <p:cNvPr id="1" name=""/>
+        <p:cNvGrpSpPr/>
+        <p:nvPr/>
+      </p:nvGrpSpPr>
+      <p:grpSpPr/>
+      <p:sp>
+        <p:nvSpPr>
+          <p:cNvPr id="2" name="TextBox 1"/>
+          <p:cNvSpPr txBox="1"/>
+          <p:nvPr/>
+        </p:nvSpPr>
+        <p:spPr>
+          <a:xfrm>
+            <a:off x="548640" y="411480"/>
+            <a:ext cx="11064240" cy="777240"/>
+          </a:xfrm>
+          <a:prstGeom prst="rect">
+            <a:avLst/>
+          </a:prstGeom>
+          <a:noFill/>
+        </p:spPr>
+        <p:txBody>
+          <a:bodyPr wrap="square">
+            <a:noAutofit/>
+          </a:bodyPr>
+          <a:lstStyle/>
+          <a:p>
+            <a:pPr>
+              <a:lnSpc>
+                <a:spcPts val="2200"/>
+              </a:lnSpc>
+              <a:defRPr sz="2800" b="1">
+                <a:solidFill>
+                  <a:srgbClr val="1A1A2E"/>
+                </a:solidFill>
+                <a:latin typeface="Calibri"/>
+              </a:defRPr>
+            </a:pPr>
+            <a:r>
+              <a:t>Demo: Learning path (1→…→6, then 7; use 8 as reference) and where to…</a:t>
+            </a:r>
+          </a:p>
+        </p:txBody>
+      </p:sp>
+      <p:sp>
+        <p:nvSpPr>
+          <p:cNvPr id="3" name="TextBox 2"/>
+          <p:cNvSpPr txBox="1"/>
+          <p:nvPr/>
+        </p:nvSpPr>
+        <p:spPr>
+          <a:xfrm>
+            <a:off x="548640" y="1051560"/>
+            <a:ext cx="11064240" cy="914400"/>
+          </a:xfrm>
+          <a:prstGeom prst="rect">
+            <a:avLst/>
+          </a:prstGeom>
+          <a:solidFill>
+            <a:srgbClr val="F4F4F4"/>
+          </a:solidFill>
+        </p:spPr>
+        <p:txBody>
+          <a:bodyPr wrap="square">
+            <a:noAutofit/>
+          </a:bodyPr>
+          <a:lstStyle/>
+          <a:p>
+            <a:pPr>
+              <a:lnSpc>
+                <a:spcPts val="2200"/>
+              </a:lnSpc>
+              <a:spcAft>
+                <a:spcPts val="200"/>
+              </a:spcAft>
+              <a:defRPr sz="2000" b="0">
+                <a:solidFill>
+                  <a:srgbClr val="333333"/>
+                </a:solidFill>
+                <a:latin typeface="Consolas"/>
+              </a:defRPr>
+            </a:pPr>
+            <a:r>
+              <a:t>$ cd module8/examples/learning_path &amp;&amp; make clean &amp;&amp; make run</a:t>
+            </a:r>
+          </a:p>
+        </p:txBody>
+      </p:sp>
+      <p:pic>
+        <p:nvPicPr>
+          <p:cNvPr id="4" name="Picture 3" descr="ex10_learning_path.png"/>
+          <p:cNvPicPr>
+            <a:picLocks noChangeAspect="1"/>
+          </p:cNvPicPr>
+          <p:nvPr/>
+        </p:nvPicPr>
+        <p:blipFill>
+          <a:blip r:embed="rId2"/>
+          <a:stretch>
+            <a:fillRect/>
+          </a:stretch>
+        </p:blipFill>
+        <p:spPr>
+          <a:xfrm>
+            <a:off x="548640" y="1965960"/>
+            <a:ext cx="7071358" cy="3977639"/>
+          </a:xfrm>
+          <a:prstGeom prst="rect">
+            <a:avLst/>
+          </a:prstGeom>
+        </p:spPr>
+      </p:pic>
+      <p:sp>
+        <p:nvSpPr>
+          <p:cNvPr id="5" name="TextBox 4"/>
+          <p:cNvSpPr txBox="1"/>
+          <p:nvPr/>
+        </p:nvSpPr>
+        <p:spPr>
+          <a:xfrm>
+            <a:off x="548640" y="6355080"/>
+            <a:ext cx="11064240" cy="320040"/>
+          </a:xfrm>
+          <a:prstGeom prst="rect">
+            <a:avLst/>
+          </a:prstGeom>
+          <a:noFill/>
+        </p:spPr>
+        <p:txBody>
+          <a:bodyPr wrap="square">
+            <a:noAutofit/>
+          </a:bodyPr>
+          <a:lstStyle/>
+          <a:p>
+            <a:pPr algn="r">
+              <a:lnSpc>
+                <a:spcPts val="2200"/>
+              </a:lnSpc>
+              <a:defRPr sz="1000" b="0">
+                <a:solidFill>
+                  <a:srgbClr val="666666"/>
+                </a:solidFill>
+                <a:latin typeface="Calibri"/>
+              </a:defRPr>
+            </a:pPr>
+            <a:r>
+              <a:t>learn_verilog_systemverilog / Module 8</a:t>
+            </a:r>
+          </a:p>
+        </p:txBody>
+      </p:sp>
+    </p:spTree>
+  </p:cSld>
+  <p:clrMapOvr>
+    <a:masterClrMapping/>
+  </p:clrMapOvr>
+</p:sld>
+</file>
+
+<file path=ppt/slides/slide36.xml><?xml version="1.0" encoding="utf-8"?>
+<p:sld xmlns:a="http://schemas.openxmlformats.org/drawingml/2006/main" xmlns:p="http://schemas.openxmlformats.org/presentationml/2006/main" xmlns:r="http://schemas.openxmlformats.org/officeDocument/2006/relationships">
+  <p:cSld>
+    <p:spTree>
+      <p:nvGrpSpPr>
+        <p:cNvPr id="1" name=""/>
+        <p:cNvGrpSpPr/>
+        <p:nvPr/>
+      </p:nvGrpSpPr>
+      <p:grpSpPr/>
+      <p:sp>
+        <p:nvSpPr>
+          <p:cNvPr id="2" name="TextBox 1"/>
+          <p:cNvSpPr txBox="1"/>
+          <p:nvPr/>
+        </p:nvSpPr>
+        <p:spPr>
+          <a:xfrm>
+            <a:off x="548640" y="411480"/>
+            <a:ext cx="11064240" cy="777240"/>
+          </a:xfrm>
+          <a:prstGeom prst="rect">
+            <a:avLst/>
+          </a:prstGeom>
+          <a:noFill/>
+        </p:spPr>
+        <p:txBody>
+          <a:bodyPr wrap="square">
+            <a:noAutofit/>
+          </a:bodyPr>
+          <a:lstStyle/>
+          <a:p>
+            <a:pPr>
+              <a:lnSpc>
+                <a:spcPts val="2200"/>
+              </a:lnSpc>
+              <a:defRPr sz="2800" b="1">
+                <a:solidFill>
+                  <a:srgbClr val="1A1A2E"/>
+                </a:solidFill>
+                <a:latin typeface="Calibri"/>
+              </a:defRPr>
+            </a:pPr>
+            <a:r>
+              <a:t>Demo: Common pitfalls quick reference (construct table, subset rule,…</a:t>
+            </a:r>
+          </a:p>
+        </p:txBody>
+      </p:sp>
+      <p:sp>
+        <p:nvSpPr>
+          <p:cNvPr id="3" name="TextBox 2"/>
+          <p:cNvSpPr txBox="1"/>
+          <p:nvPr/>
+        </p:nvSpPr>
+        <p:spPr>
+          <a:xfrm>
+            <a:off x="548640" y="1051560"/>
+            <a:ext cx="11064240" cy="914400"/>
+          </a:xfrm>
+          <a:prstGeom prst="rect">
+            <a:avLst/>
+          </a:prstGeom>
+          <a:solidFill>
+            <a:srgbClr val="F4F4F4"/>
+          </a:solidFill>
+        </p:spPr>
+        <p:txBody>
+          <a:bodyPr wrap="square">
+            <a:noAutofit/>
+          </a:bodyPr>
+          <a:lstStyle/>
+          <a:p>
+            <a:pPr>
+              <a:lnSpc>
+                <a:spcPts val="2200"/>
+              </a:lnSpc>
+              <a:spcAft>
+                <a:spcPts val="200"/>
+              </a:spcAft>
+              <a:defRPr sz="2000" b="0">
+                <a:solidFill>
+                  <a:srgbClr val="333333"/>
+                </a:solidFill>
+                <a:latin typeface="Consolas"/>
+              </a:defRPr>
+            </a:pPr>
+            <a:r>
+              <a:t>$ cd module8/examples/pitfalls &amp;&amp; make clean &amp;&amp; make run</a:t>
+            </a:r>
+          </a:p>
+        </p:txBody>
+      </p:sp>
+      <p:pic>
+        <p:nvPicPr>
+          <p:cNvPr id="4" name="Picture 3" descr="ex11_pitfalls.png"/>
+          <p:cNvPicPr>
+            <a:picLocks noChangeAspect="1"/>
+          </p:cNvPicPr>
+          <p:nvPr/>
+        </p:nvPicPr>
+        <p:blipFill>
+          <a:blip r:embed="rId2"/>
+          <a:stretch>
+            <a:fillRect/>
+          </a:stretch>
+        </p:blipFill>
+        <p:spPr>
+          <a:xfrm>
+            <a:off x="548640" y="1965960"/>
+            <a:ext cx="7071358" cy="3977639"/>
+          </a:xfrm>
+          <a:prstGeom prst="rect">
+            <a:avLst/>
+          </a:prstGeom>
+        </p:spPr>
+      </p:pic>
+      <p:sp>
+        <p:nvSpPr>
+          <p:cNvPr id="5" name="TextBox 4"/>
+          <p:cNvSpPr txBox="1"/>
+          <p:nvPr/>
+        </p:nvSpPr>
+        <p:spPr>
+          <a:xfrm>
+            <a:off x="548640" y="6355080"/>
+            <a:ext cx="11064240" cy="320040"/>
+          </a:xfrm>
+          <a:prstGeom prst="rect">
+            <a:avLst/>
+          </a:prstGeom>
+          <a:noFill/>
+        </p:spPr>
+        <p:txBody>
+          <a:bodyPr wrap="square">
+            <a:noAutofit/>
+          </a:bodyPr>
+          <a:lstStyle/>
+          <a:p>
+            <a:pPr algn="r">
+              <a:lnSpc>
+                <a:spcPts val="2200"/>
+              </a:lnSpc>
+              <a:defRPr sz="1000" b="0">
+                <a:solidFill>
+                  <a:srgbClr val="666666"/>
+                </a:solidFill>
+                <a:latin typeface="Calibri"/>
+              </a:defRPr>
+            </a:pPr>
+            <a:r>
+              <a:t>learn_verilog_systemverilog / Module 8</a:t>
+            </a:r>
+          </a:p>
+        </p:txBody>
+      </p:sp>
+    </p:spTree>
+  </p:cSld>
+  <p:clrMapOvr>
+    <a:masterClrMapping/>
+  </p:clrMapOvr>
+</p:sld>
+</file>
+
+<file path=ppt/slides/slide37.xml><?xml version="1.0" encoding="utf-8"?>
+<p:sld xmlns:a="http://schemas.openxmlformats.org/drawingml/2006/main" xmlns:p="http://schemas.openxmlformats.org/presentationml/2006/main" xmlns:r="http://schemas.openxmlformats.org/officeDocument/2006/relationships">
+  <p:cSld>
+    <p:spTree>
+      <p:nvGrpSpPr>
+        <p:cNvPr id="1" name=""/>
+        <p:cNvGrpSpPr/>
+        <p:nvPr/>
+      </p:nvGrpSpPr>
+      <p:grpSpPr/>
+      <p:sp>
+        <p:nvSpPr>
+          <p:cNvPr id="2" name="TextBox 1"/>
+          <p:cNvSpPr txBox="1"/>
+          <p:nvPr/>
+        </p:nvSpPr>
+        <p:spPr>
+          <a:xfrm>
+            <a:off x="548640" y="2743200"/>
+            <a:ext cx="11064240" cy="1371600"/>
+          </a:xfrm>
+          <a:prstGeom prst="rect">
+            <a:avLst/>
+          </a:prstGeom>
+          <a:noFill/>
+        </p:spPr>
+        <p:txBody>
+          <a:bodyPr wrap="square">
+            <a:noAutofit/>
+          </a:bodyPr>
+          <a:lstStyle/>
+          <a:p>
+            <a:pPr algn="ctr">
+              <a:lnSpc>
+                <a:spcPts val="2200"/>
+              </a:lnSpc>
+              <a:defRPr sz="3600" b="1">
+                <a:solidFill>
+                  <a:srgbClr val="1A1A2E"/>
+                </a:solidFill>
+                <a:latin typeface="Calibri"/>
+              </a:defRPr>
+            </a:pPr>
+            <a:r>
+              <a:t>Practice &amp; assessment</a:t>
+            </a:r>
+          </a:p>
+        </p:txBody>
+      </p:sp>
+      <p:sp>
+        <p:nvSpPr>
+          <p:cNvPr id="3" name="TextBox 2"/>
+          <p:cNvSpPr txBox="1"/>
+          <p:nvPr/>
+        </p:nvSpPr>
+        <p:spPr>
+          <a:xfrm>
+            <a:off x="548640" y="6355080"/>
+            <a:ext cx="11064240" cy="320040"/>
+          </a:xfrm>
+          <a:prstGeom prst="rect">
+            <a:avLst/>
+          </a:prstGeom>
+          <a:noFill/>
+        </p:spPr>
+        <p:txBody>
+          <a:bodyPr wrap="square">
+            <a:noAutofit/>
+          </a:bodyPr>
+          <a:lstStyle/>
+          <a:p>
+            <a:pPr algn="r">
+              <a:lnSpc>
+                <a:spcPts val="2200"/>
+              </a:lnSpc>
+              <a:defRPr sz="1000" b="0">
+                <a:solidFill>
+                  <a:srgbClr val="666666"/>
+                </a:solidFill>
+                <a:latin typeface="Calibri"/>
+              </a:defRPr>
+            </a:pPr>
+            <a:r>
+              <a:t>learn_verilog_systemverilog / Module 8</a:t>
+            </a:r>
+          </a:p>
+        </p:txBody>
+      </p:sp>
+    </p:spTree>
+  </p:cSld>
+  <p:clrMapOvr>
+    <a:masterClrMapping/>
+  </p:clrMapOvr>
+</p:sld>
+</file>
+
+<file path=ppt/slides/slide38.xml><?xml version="1.0" encoding="utf-8"?>
+<p:sld xmlns:a="http://schemas.openxmlformats.org/drawingml/2006/main" xmlns:p="http://schemas.openxmlformats.org/presentationml/2006/main" xmlns:r="http://schemas.openxmlformats.org/officeDocument/2006/relationships">
+  <p:cSld>
+    <p:spTree>
+      <p:nvGrpSpPr>
+        <p:cNvPr id="1" name=""/>
+        <p:cNvGrpSpPr/>
+        <p:nvPr/>
+      </p:nvGrpSpPr>
+      <p:grpSpPr/>
+      <p:sp>
+        <p:nvSpPr>
+          <p:cNvPr id="2" name="TextBox 1"/>
+          <p:cNvSpPr txBox="1"/>
+          <p:nvPr/>
+        </p:nvSpPr>
+        <p:spPr>
+          <a:xfrm>
+            <a:off x="548640" y="411480"/>
+            <a:ext cx="11064240" cy="777240"/>
+          </a:xfrm>
+          <a:prstGeom prst="rect">
+            <a:avLst/>
+          </a:prstGeom>
+          <a:noFill/>
+        </p:spPr>
+        <p:txBody>
+          <a:bodyPr wrap="square">
+            <a:noAutofit/>
+          </a:bodyPr>
+          <a:lstStyle/>
+          <a:p>
+            <a:pPr>
+              <a:lnSpc>
+                <a:spcPts val="2200"/>
+              </a:lnSpc>
+              <a:defRPr sz="2800" b="1">
+                <a:solidFill>
+                  <a:srgbClr val="1A1A2E"/>
+                </a:solidFill>
+                <a:latin typeface="Calibri"/>
+              </a:defRPr>
+            </a:pPr>
+            <a:r>
+              <a:t>What you should know</a:t>
+            </a:r>
+          </a:p>
+        </p:txBody>
+      </p:sp>
+      <p:sp>
+        <p:nvSpPr>
+          <p:cNvPr id="3" name="TextBox 2"/>
+          <p:cNvSpPr txBox="1"/>
+          <p:nvPr/>
+        </p:nvSpPr>
+        <p:spPr>
+          <a:xfrm>
+            <a:off x="548640" y="1234440"/>
+            <a:ext cx="11064240" cy="4937760"/>
+          </a:xfrm>
+          <a:prstGeom prst="rect">
+            <a:avLst/>
+          </a:prstGeom>
+          <a:noFill/>
+        </p:spPr>
+        <p:txBody>
+          <a:bodyPr wrap="square">
+            <a:noAutofit/>
+          </a:bodyPr>
+          <a:lstStyle/>
+          <a:p>
+            <a:pPr>
+              <a:lnSpc>
+                <a:spcPts val="2200"/>
+              </a:lnSpc>
+              <a:spcAft>
                 <a:spcPts val="1000"/>
               </a:spcAft>
               <a:defRPr sz="2000" b="0">
@@ -9469,7 +11177,7 @@
               </a:defRPr>
             </a:pPr>
             <a:r>
-              <a:t>• Provide a single quick reference and course summary</a:t>
+              <a:t>• ✓ Use the version timeline and construct-by-standard</a:t>
             </a:r>
           </a:p>
           <a:p>
@@ -9488,7 +11196,7 @@
               </a:defRPr>
             </a:pPr>
             <a:r>
-              <a:t>      for Verilog and SystemVerilog across IEEE versi…</a:t>
+              <a:t>      table to look up “which standard has X?”</a:t>
             </a:r>
           </a:p>
           <a:p>
@@ -9507,7 +11215,7 @@
               </a:defRPr>
             </a:pPr>
             <a:r>
-              <a:t>• Complete module8/CHECKLIST.md</a:t>
+              <a:t>• ✓ Use the design-subset quick reference to choose</a:t>
             </a:r>
           </a:p>
           <a:p>
@@ -9526,7 +11234,7 @@
               </a:defRPr>
             </a:pPr>
             <a:r>
-              <a:t>• Run ./scripts/module8.sh --check</a:t>
+              <a:t>      Verilog-only vs SystemVerilog design</a:t>
             </a:r>
           </a:p>
           <a:p>
@@ -9545,7 +11253,316 @@
               </a:defRPr>
             </a:pPr>
             <a:r>
-              <a:t>• Next: Next module in course</a:t>
+              <a:t>• ✓ Use the migration quick reference and Module 7</a:t>
+            </a:r>
+          </a:p>
+          <a:p>
+            <a:pPr>
+              <a:lnSpc>
+                <a:spcPts val="2200"/>
+              </a:lnSpc>
+              <a:spcAft>
+                <a:spcPts val="1000"/>
+              </a:spcAft>
+              <a:defRPr sz="2000" b="0">
+                <a:solidFill>
+                  <a:srgbClr val="333333"/>
+                </a:solidFill>
+                <a:latin typeface="Calibri"/>
+              </a:defRPr>
+            </a:pPr>
+            <a:r>
+              <a:t>      checklists for migration and version selection</a:t>
+            </a:r>
+          </a:p>
+          <a:p>
+            <a:pPr>
+              <a:lnSpc>
+                <a:spcPts val="2200"/>
+              </a:lnSpc>
+              <a:spcAft>
+                <a:spcPts val="1000"/>
+              </a:spcAft>
+              <a:defRPr sz="2000" b="0">
+                <a:solidFill>
+                  <a:srgbClr val="333333"/>
+                </a:solidFill>
+                <a:latin typeface="Calibri"/>
+              </a:defRPr>
+            </a:pPr>
+            <a:r>
+              <a:t>• ✓ Use the course map to find which module covers a</a:t>
+            </a:r>
+          </a:p>
+          <a:p>
+            <a:pPr>
+              <a:lnSpc>
+                <a:spcPts val="2200"/>
+              </a:lnSpc>
+              <a:spcAft>
+                <a:spcPts val="1000"/>
+              </a:spcAft>
+              <a:defRPr sz="2000" b="0">
+                <a:solidFill>
+                  <a:srgbClr val="333333"/>
+                </a:solidFill>
+                <a:latin typeface="Calibri"/>
+              </a:defRPr>
+            </a:pPr>
+            <a:r>
+              <a:t>      given standard or topic</a:t>
+            </a:r>
+          </a:p>
+          <a:p>
+            <a:pPr>
+              <a:lnSpc>
+                <a:spcPts val="2200"/>
+              </a:lnSpc>
+              <a:spcAft>
+                <a:spcPts val="1000"/>
+              </a:spcAft>
+              <a:defRPr sz="2000" b="0">
+                <a:solidFill>
+                  <a:srgbClr val="333333"/>
+                </a:solidFill>
+                <a:latin typeface="Calibri"/>
+              </a:defRPr>
+            </a:pPr>
+            <a:r>
+              <a:t>• ✓ Use this module as a single reference after</a:t>
+            </a:r>
+          </a:p>
+          <a:p>
+            <a:pPr>
+              <a:lnSpc>
+                <a:spcPts val="2200"/>
+              </a:lnSpc>
+              <a:spcAft>
+                <a:spcPts val="1000"/>
+              </a:spcAft>
+              <a:defRPr sz="2000" b="0">
+                <a:solidFill>
+                  <a:srgbClr val="333333"/>
+                </a:solidFill>
+                <a:latin typeface="Calibri"/>
+              </a:defRPr>
+            </a:pPr>
+            <a:r>
+              <a:t>      completing the course</a:t>
+            </a:r>
+          </a:p>
+        </p:txBody>
+      </p:sp>
+      <p:sp>
+        <p:nvSpPr>
+          <p:cNvPr id="4" name="TextBox 3"/>
+          <p:cNvSpPr txBox="1"/>
+          <p:nvPr/>
+        </p:nvSpPr>
+        <p:spPr>
+          <a:xfrm>
+            <a:off x="548640" y="6355080"/>
+            <a:ext cx="11064240" cy="320040"/>
+          </a:xfrm>
+          <a:prstGeom prst="rect">
+            <a:avLst/>
+          </a:prstGeom>
+          <a:noFill/>
+        </p:spPr>
+        <p:txBody>
+          <a:bodyPr wrap="square">
+            <a:noAutofit/>
+          </a:bodyPr>
+          <a:lstStyle/>
+          <a:p>
+            <a:pPr algn="r">
+              <a:lnSpc>
+                <a:spcPts val="2200"/>
+              </a:lnSpc>
+              <a:defRPr sz="1000" b="0">
+                <a:solidFill>
+                  <a:srgbClr val="666666"/>
+                </a:solidFill>
+                <a:latin typeface="Calibri"/>
+              </a:defRPr>
+            </a:pPr>
+            <a:r>
+              <a:t>learn_verilog_systemverilog / Module 8</a:t>
+            </a:r>
+          </a:p>
+        </p:txBody>
+      </p:sp>
+    </p:spTree>
+  </p:cSld>
+  <p:clrMapOvr>
+    <a:masterClrMapping/>
+  </p:clrMapOvr>
+</p:sld>
+</file>
+
+<file path=ppt/slides/slide39.xml><?xml version="1.0" encoding="utf-8"?>
+<p:sld xmlns:a="http://schemas.openxmlformats.org/drawingml/2006/main" xmlns:p="http://schemas.openxmlformats.org/presentationml/2006/main" xmlns:r="http://schemas.openxmlformats.org/officeDocument/2006/relationships">
+  <p:cSld>
+    <p:spTree>
+      <p:nvGrpSpPr>
+        <p:cNvPr id="1" name=""/>
+        <p:cNvGrpSpPr/>
+        <p:nvPr/>
+      </p:nvGrpSpPr>
+      <p:grpSpPr/>
+      <p:sp>
+        <p:nvSpPr>
+          <p:cNvPr id="2" name="TextBox 1"/>
+          <p:cNvSpPr txBox="1"/>
+          <p:nvPr/>
+        </p:nvSpPr>
+        <p:spPr>
+          <a:xfrm>
+            <a:off x="548640" y="411480"/>
+            <a:ext cx="11064240" cy="777240"/>
+          </a:xfrm>
+          <a:prstGeom prst="rect">
+            <a:avLst/>
+          </a:prstGeom>
+          <a:noFill/>
+        </p:spPr>
+        <p:txBody>
+          <a:bodyPr wrap="square">
+            <a:noAutofit/>
+          </a:bodyPr>
+          <a:lstStyle/>
+          <a:p>
+            <a:pPr>
+              <a:lnSpc>
+                <a:spcPts val="2200"/>
+              </a:lnSpc>
+              <a:defRPr sz="2800" b="1">
+                <a:solidFill>
+                  <a:srgbClr val="1A1A2E"/>
+                </a:solidFill>
+                <a:latin typeface="Calibri"/>
+              </a:defRPr>
+            </a:pPr>
+            <a:r>
+              <a:t>Exercises</a:t>
+            </a:r>
+          </a:p>
+        </p:txBody>
+      </p:sp>
+      <p:sp>
+        <p:nvSpPr>
+          <p:cNvPr id="3" name="TextBox 2"/>
+          <p:cNvSpPr txBox="1"/>
+          <p:nvPr/>
+        </p:nvSpPr>
+        <p:spPr>
+          <a:xfrm>
+            <a:off x="548640" y="1234440"/>
+            <a:ext cx="11064240" cy="4937760"/>
+          </a:xfrm>
+          <a:prstGeom prst="rect">
+            <a:avLst/>
+          </a:prstGeom>
+          <a:noFill/>
+        </p:spPr>
+        <p:txBody>
+          <a:bodyPr wrap="square">
+            <a:noAutofit/>
+          </a:bodyPr>
+          <a:lstStyle/>
+          <a:p>
+            <a:pPr>
+              <a:lnSpc>
+                <a:spcPts val="2200"/>
+              </a:lnSpc>
+              <a:spcAft>
+                <a:spcPts val="1000"/>
+              </a:spcAft>
+              <a:defRPr sz="2000" b="0">
+                <a:solidFill>
+                  <a:srgbClr val="333333"/>
+                </a:solidFill>
+                <a:latin typeface="Calibri"/>
+              </a:defRPr>
+            </a:pPr>
+            <a:r>
+              <a:t>• Lookup</a:t>
+            </a:r>
+          </a:p>
+          <a:p>
+            <a:pPr>
+              <a:lnSpc>
+                <a:spcPts val="2200"/>
+              </a:lnSpc>
+              <a:spcAft>
+                <a:spcPts val="1000"/>
+              </a:spcAft>
+              <a:defRPr sz="2000" b="0">
+                <a:solidFill>
+                  <a:srgbClr val="333333"/>
+                </a:solidFill>
+                <a:latin typeface="Calibri"/>
+              </a:defRPr>
+            </a:pPr>
+            <a:r>
+              <a:t>• Subset</a:t>
+            </a:r>
+          </a:p>
+          <a:p>
+            <a:pPr>
+              <a:lnSpc>
+                <a:spcPts val="2200"/>
+              </a:lnSpc>
+              <a:spcAft>
+                <a:spcPts val="1000"/>
+              </a:spcAft>
+              <a:defRPr sz="2000" b="0">
+                <a:solidFill>
+                  <a:srgbClr val="333333"/>
+                </a:solidFill>
+                <a:latin typeface="Calibri"/>
+              </a:defRPr>
+            </a:pPr>
+            <a:r>
+              <a:t>• Migration</a:t>
+            </a:r>
+          </a:p>
+          <a:p>
+            <a:pPr>
+              <a:lnSpc>
+                <a:spcPts val="2200"/>
+              </a:lnSpc>
+              <a:spcAft>
+                <a:spcPts val="1000"/>
+              </a:spcAft>
+              <a:defRPr sz="2000" b="0">
+                <a:solidFill>
+                  <a:srgbClr val="333333"/>
+                </a:solidFill>
+                <a:latin typeface="Calibri"/>
+              </a:defRPr>
+            </a:pPr>
+            <a:r>
+              <a:t>• Course map</a:t>
+            </a:r>
+          </a:p>
+          <a:p>
+            <a:pPr>
+              <a:lnSpc>
+                <a:spcPts val="2200"/>
+              </a:lnSpc>
+              <a:spcAft>
+                <a:spcPts val="1000"/>
+              </a:spcAft>
+              <a:defRPr sz="2000" b="0">
+                <a:solidFill>
+                  <a:srgbClr val="333333"/>
+                </a:solidFill>
+                <a:latin typeface="Calibri"/>
+              </a:defRPr>
+            </a:pPr>
+            <a:r>
+              <a:t>• Cheat sheet</a:t>
             </a:r>
           </a:p>
         </p:txBody>
@@ -9756,6 +11773,453 @@
 </p:sld>
 </file>
 
+<file path=ppt/slides/slide40.xml><?xml version="1.0" encoding="utf-8"?>
+<p:sld xmlns:a="http://schemas.openxmlformats.org/drawingml/2006/main" xmlns:p="http://schemas.openxmlformats.org/presentationml/2006/main" xmlns:r="http://schemas.openxmlformats.org/officeDocument/2006/relationships">
+  <p:cSld>
+    <p:spTree>
+      <p:nvGrpSpPr>
+        <p:cNvPr id="1" name=""/>
+        <p:cNvGrpSpPr/>
+        <p:nvPr/>
+      </p:nvGrpSpPr>
+      <p:grpSpPr/>
+      <p:sp>
+        <p:nvSpPr>
+          <p:cNvPr id="2" name="TextBox 1"/>
+          <p:cNvSpPr txBox="1"/>
+          <p:nvPr/>
+        </p:nvSpPr>
+        <p:spPr>
+          <a:xfrm>
+            <a:off x="548640" y="411480"/>
+            <a:ext cx="11064240" cy="777240"/>
+          </a:xfrm>
+          <a:prstGeom prst="rect">
+            <a:avLst/>
+          </a:prstGeom>
+          <a:noFill/>
+        </p:spPr>
+        <p:txBody>
+          <a:bodyPr wrap="square">
+            <a:noAutofit/>
+          </a:bodyPr>
+          <a:lstStyle/>
+          <a:p>
+            <a:pPr>
+              <a:lnSpc>
+                <a:spcPts val="2200"/>
+              </a:lnSpc>
+              <a:defRPr sz="2800" b="1">
+                <a:solidFill>
+                  <a:srgbClr val="1A1A2E"/>
+                </a:solidFill>
+                <a:latin typeface="Calibri"/>
+              </a:defRPr>
+            </a:pPr>
+            <a:r>
+              <a:t>Exercises</a:t>
+            </a:r>
+          </a:p>
+        </p:txBody>
+      </p:sp>
+      <p:sp>
+        <p:nvSpPr>
+          <p:cNvPr id="3" name="TextBox 2"/>
+          <p:cNvSpPr txBox="1"/>
+          <p:nvPr/>
+        </p:nvSpPr>
+        <p:spPr>
+          <a:xfrm>
+            <a:off x="548640" y="1234440"/>
+            <a:ext cx="11064240" cy="4937760"/>
+          </a:xfrm>
+          <a:prstGeom prst="rect">
+            <a:avLst/>
+          </a:prstGeom>
+          <a:noFill/>
+        </p:spPr>
+        <p:txBody>
+          <a:bodyPr wrap="square">
+            <a:noAutofit/>
+          </a:bodyPr>
+          <a:lstStyle/>
+          <a:p>
+            <a:pPr>
+              <a:lnSpc>
+                <a:spcPts val="2200"/>
+              </a:lnSpc>
+              <a:spcAft>
+                <a:spcPts val="1000"/>
+              </a:spcAft>
+              <a:defRPr sz="2000" b="0">
+                <a:solidFill>
+                  <a:srgbClr val="333333"/>
+                </a:solidFill>
+                <a:latin typeface="Calibri"/>
+              </a:defRPr>
+            </a:pPr>
+            <a:r>
+              <a:t>• Assuming a construct is in an older standard</a:t>
+            </a:r>
+          </a:p>
+          <a:p>
+            <a:pPr>
+              <a:lnSpc>
+                <a:spcPts val="2200"/>
+              </a:lnSpc>
+              <a:spcAft>
+                <a:spcPts val="1000"/>
+              </a:spcAft>
+              <a:defRPr sz="2000" b="0">
+                <a:solidFill>
+                  <a:srgbClr val="333333"/>
+                </a:solidFill>
+                <a:latin typeface="Calibri"/>
+              </a:defRPr>
+            </a:pPr>
+            <a:r>
+              <a:t>• Mixing subsets without a rule</a:t>
+            </a:r>
+          </a:p>
+          <a:p>
+            <a:pPr>
+              <a:lnSpc>
+                <a:spcPts val="2200"/>
+              </a:lnSpc>
+              <a:spcAft>
+                <a:spcPts val="1000"/>
+              </a:spcAft>
+              <a:defRPr sz="2000" b="0">
+                <a:solidFill>
+                  <a:srgbClr val="333333"/>
+                </a:solidFill>
+                <a:latin typeface="Calibri"/>
+              </a:defRPr>
+            </a:pPr>
+            <a:r>
+              <a:t>• Skipping regression after migration</a:t>
+            </a:r>
+          </a:p>
+          <a:p>
+            <a:pPr>
+              <a:lnSpc>
+                <a:spcPts val="2200"/>
+              </a:lnSpc>
+              <a:spcAft>
+                <a:spcPts val="1000"/>
+              </a:spcAft>
+              <a:defRPr sz="2000" b="0">
+                <a:solidFill>
+                  <a:srgbClr val="333333"/>
+                </a:solidFill>
+                <a:latin typeface="Calibri"/>
+              </a:defRPr>
+            </a:pPr>
+            <a:r>
+              <a:t>• Forgetting tool support</a:t>
+            </a:r>
+          </a:p>
+          <a:p>
+            <a:pPr>
+              <a:lnSpc>
+                <a:spcPts val="2200"/>
+              </a:lnSpc>
+              <a:spcAft>
+                <a:spcPts val="1000"/>
+              </a:spcAft>
+              <a:defRPr sz="2000" b="0">
+                <a:solidFill>
+                  <a:srgbClr val="333333"/>
+                </a:solidFill>
+                <a:latin typeface="Calibri"/>
+              </a:defRPr>
+            </a:pPr>
+            <a:r>
+              <a:t>• Treating this module as a replacement for Modules</a:t>
+            </a:r>
+          </a:p>
+          <a:p>
+            <a:pPr>
+              <a:lnSpc>
+                <a:spcPts val="2200"/>
+              </a:lnSpc>
+              <a:spcAft>
+                <a:spcPts val="1000"/>
+              </a:spcAft>
+              <a:defRPr sz="2000" b="0">
+                <a:solidFill>
+                  <a:srgbClr val="333333"/>
+                </a:solidFill>
+                <a:latin typeface="Calibri"/>
+              </a:defRPr>
+            </a:pPr>
+            <a:r>
+              <a:t>      1–7</a:t>
+            </a:r>
+          </a:p>
+        </p:txBody>
+      </p:sp>
+      <p:sp>
+        <p:nvSpPr>
+          <p:cNvPr id="4" name="TextBox 3"/>
+          <p:cNvSpPr txBox="1"/>
+          <p:nvPr/>
+        </p:nvSpPr>
+        <p:spPr>
+          <a:xfrm>
+            <a:off x="548640" y="6355080"/>
+            <a:ext cx="11064240" cy="320040"/>
+          </a:xfrm>
+          <a:prstGeom prst="rect">
+            <a:avLst/>
+          </a:prstGeom>
+          <a:noFill/>
+        </p:spPr>
+        <p:txBody>
+          <a:bodyPr wrap="square">
+            <a:noAutofit/>
+          </a:bodyPr>
+          <a:lstStyle/>
+          <a:p>
+            <a:pPr algn="r">
+              <a:lnSpc>
+                <a:spcPts val="2200"/>
+              </a:lnSpc>
+              <a:defRPr sz="1000" b="0">
+                <a:solidFill>
+                  <a:srgbClr val="666666"/>
+                </a:solidFill>
+                <a:latin typeface="Calibri"/>
+              </a:defRPr>
+            </a:pPr>
+            <a:r>
+              <a:t>learn_verilog_systemverilog / Module 8</a:t>
+            </a:r>
+          </a:p>
+        </p:txBody>
+      </p:sp>
+    </p:spTree>
+  </p:cSld>
+  <p:clrMapOvr>
+    <a:masterClrMapping/>
+  </p:clrMapOvr>
+</p:sld>
+</file>
+
+<file path=ppt/slides/slide41.xml><?xml version="1.0" encoding="utf-8"?>
+<p:sld xmlns:a="http://schemas.openxmlformats.org/drawingml/2006/main" xmlns:p="http://schemas.openxmlformats.org/presentationml/2006/main" xmlns:r="http://schemas.openxmlformats.org/officeDocument/2006/relationships">
+  <p:cSld>
+    <p:spTree>
+      <p:nvGrpSpPr>
+        <p:cNvPr id="1" name=""/>
+        <p:cNvGrpSpPr/>
+        <p:nvPr/>
+      </p:nvGrpSpPr>
+      <p:grpSpPr/>
+      <p:sp>
+        <p:nvSpPr>
+          <p:cNvPr id="2" name="TextBox 1"/>
+          <p:cNvSpPr txBox="1"/>
+          <p:nvPr/>
+        </p:nvSpPr>
+        <p:spPr>
+          <a:xfrm>
+            <a:off x="548640" y="411480"/>
+            <a:ext cx="11064240" cy="777240"/>
+          </a:xfrm>
+          <a:prstGeom prst="rect">
+            <a:avLst/>
+          </a:prstGeom>
+          <a:noFill/>
+        </p:spPr>
+        <p:txBody>
+          <a:bodyPr wrap="square">
+            <a:noAutofit/>
+          </a:bodyPr>
+          <a:lstStyle/>
+          <a:p>
+            <a:pPr>
+              <a:lnSpc>
+                <a:spcPts val="2200"/>
+              </a:lnSpc>
+              <a:defRPr sz="2800" b="1">
+                <a:solidFill>
+                  <a:srgbClr val="1A1A2E"/>
+                </a:solidFill>
+                <a:latin typeface="Calibri"/>
+              </a:defRPr>
+            </a:pPr>
+            <a:r>
+              <a:t>Summary &amp; next steps</a:t>
+            </a:r>
+          </a:p>
+        </p:txBody>
+      </p:sp>
+      <p:sp>
+        <p:nvSpPr>
+          <p:cNvPr id="3" name="TextBox 2"/>
+          <p:cNvSpPr txBox="1"/>
+          <p:nvPr/>
+        </p:nvSpPr>
+        <p:spPr>
+          <a:xfrm>
+            <a:off x="548640" y="1234440"/>
+            <a:ext cx="11064240" cy="4937760"/>
+          </a:xfrm>
+          <a:prstGeom prst="rect">
+            <a:avLst/>
+          </a:prstGeom>
+          <a:noFill/>
+        </p:spPr>
+        <p:txBody>
+          <a:bodyPr wrap="square">
+            <a:noAutofit/>
+          </a:bodyPr>
+          <a:lstStyle/>
+          <a:p>
+            <a:pPr>
+              <a:lnSpc>
+                <a:spcPts val="2200"/>
+              </a:lnSpc>
+              <a:spcAft>
+                <a:spcPts val="1000"/>
+              </a:spcAft>
+              <a:defRPr sz="2000" b="0">
+                <a:solidFill>
+                  <a:srgbClr val="333333"/>
+                </a:solidFill>
+                <a:latin typeface="Calibri"/>
+              </a:defRPr>
+            </a:pPr>
+            <a:r>
+              <a:t>• Provide a single quick reference and course summary</a:t>
+            </a:r>
+          </a:p>
+          <a:p>
+            <a:pPr>
+              <a:lnSpc>
+                <a:spcPts val="2200"/>
+              </a:lnSpc>
+              <a:spcAft>
+                <a:spcPts val="1000"/>
+              </a:spcAft>
+              <a:defRPr sz="2000" b="0">
+                <a:solidFill>
+                  <a:srgbClr val="333333"/>
+                </a:solidFill>
+                <a:latin typeface="Calibri"/>
+              </a:defRPr>
+            </a:pPr>
+            <a:r>
+              <a:t>      for Verilog and SystemVerilog across IEEE versi…</a:t>
+            </a:r>
+          </a:p>
+          <a:p>
+            <a:pPr>
+              <a:lnSpc>
+                <a:spcPts val="2200"/>
+              </a:lnSpc>
+              <a:spcAft>
+                <a:spcPts val="1000"/>
+              </a:spcAft>
+              <a:defRPr sz="2000" b="0">
+                <a:solidFill>
+                  <a:srgbClr val="333333"/>
+                </a:solidFill>
+                <a:latin typeface="Calibri"/>
+              </a:defRPr>
+            </a:pPr>
+            <a:r>
+              <a:t>• Complete module8/CHECKLIST.md</a:t>
+            </a:r>
+          </a:p>
+          <a:p>
+            <a:pPr>
+              <a:lnSpc>
+                <a:spcPts val="2200"/>
+              </a:lnSpc>
+              <a:spcAft>
+                <a:spcPts val="1000"/>
+              </a:spcAft>
+              <a:defRPr sz="2000" b="0">
+                <a:solidFill>
+                  <a:srgbClr val="333333"/>
+                </a:solidFill>
+                <a:latin typeface="Calibri"/>
+              </a:defRPr>
+            </a:pPr>
+            <a:r>
+              <a:t>• Review module8/EXAMPLES.md and run each lab</a:t>
+            </a:r>
+          </a:p>
+          <a:p>
+            <a:pPr>
+              <a:lnSpc>
+                <a:spcPts val="2200"/>
+              </a:lnSpc>
+              <a:spcAft>
+                <a:spcPts val="1000"/>
+              </a:spcAft>
+              <a:defRPr sz="2000" b="0">
+                <a:solidFill>
+                  <a:srgbClr val="333333"/>
+                </a:solidFill>
+                <a:latin typeface="Calibri"/>
+              </a:defRPr>
+            </a:pPr>
+            <a:r>
+              <a:t>• Next: Next module in course</a:t>
+            </a:r>
+          </a:p>
+        </p:txBody>
+      </p:sp>
+      <p:sp>
+        <p:nvSpPr>
+          <p:cNvPr id="4" name="TextBox 3"/>
+          <p:cNvSpPr txBox="1"/>
+          <p:nvPr/>
+        </p:nvSpPr>
+        <p:spPr>
+          <a:xfrm>
+            <a:off x="548640" y="6355080"/>
+            <a:ext cx="11064240" cy="320040"/>
+          </a:xfrm>
+          <a:prstGeom prst="rect">
+            <a:avLst/>
+          </a:prstGeom>
+          <a:noFill/>
+        </p:spPr>
+        <p:txBody>
+          <a:bodyPr wrap="square">
+            <a:noAutofit/>
+          </a:bodyPr>
+          <a:lstStyle/>
+          <a:p>
+            <a:pPr algn="r">
+              <a:lnSpc>
+                <a:spcPts val="2200"/>
+              </a:lnSpc>
+              <a:defRPr sz="1000" b="0">
+                <a:solidFill>
+                  <a:srgbClr val="666666"/>
+                </a:solidFill>
+                <a:latin typeface="Calibri"/>
+              </a:defRPr>
+            </a:pPr>
+            <a:r>
+              <a:t>learn_verilog_systemverilog / Module 8</a:t>
+            </a:r>
+          </a:p>
+        </p:txBody>
+      </p:sp>
+    </p:spTree>
+  </p:cSld>
+  <p:clrMapOvr>
+    <a:masterClrMapping/>
+  </p:clrMapOvr>
+</p:sld>
+</file>
+
 <file path=ppt/slides/slide5.xml><?xml version="1.0" encoding="utf-8"?>
 <p:sld xmlns:a="http://schemas.openxmlformats.org/drawingml/2006/main" xmlns:p="http://schemas.openxmlformats.org/presentationml/2006/main" xmlns:r="http://schemas.openxmlformats.org/officeDocument/2006/relationships">
   <p:cSld>
@@ -9957,7 +12421,7 @@
               </a:defRPr>
             </a:pPr>
             <a:r>
-              <a:t>Design architecture</a:t>
+              <a:t>How to learn this module</a:t>
             </a:r>
           </a:p>
         </p:txBody>
@@ -10053,45 +12517,21 @@
               </a:defRPr>
             </a:pPr>
             <a:r>
-              <a:t>RTL / block architecture</a:t>
-            </a:r>
-          </a:p>
-        </p:txBody>
-      </p:sp>
-      <p:pic>
-        <p:nvPicPr>
-          <p:cNvPr id="3" name="Picture 2" descr="rtl_architecture.png"/>
-          <p:cNvPicPr>
-            <a:picLocks noChangeAspect="1"/>
-          </p:cNvPicPr>
-          <p:nvPr/>
-        </p:nvPicPr>
-        <p:blipFill>
-          <a:blip r:embed="rId2"/>
-          <a:stretch>
-            <a:fillRect/>
-          </a:stretch>
-        </p:blipFill>
-        <p:spPr>
-          <a:xfrm>
-            <a:off x="548640" y="1143000"/>
-            <a:ext cx="8128000" cy="4572000"/>
-          </a:xfrm>
-          <a:prstGeom prst="rect">
-            <a:avLst/>
-          </a:prstGeom>
-        </p:spPr>
-      </p:pic>
-      <p:sp>
-        <p:nvSpPr>
-          <p:cNvPr id="4" name="TextBox 3"/>
+              <a:t>Suggested learning path (1/2)</a:t>
+            </a:r>
+          </a:p>
+        </p:txBody>
+      </p:sp>
+      <p:sp>
+        <p:nvSpPr>
+          <p:cNvPr id="3" name="TextBox 2"/>
           <p:cNvSpPr txBox="1"/>
           <p:nvPr/>
         </p:nvSpPr>
         <p:spPr>
           <a:xfrm>
-            <a:off x="548640" y="5897880"/>
-            <a:ext cx="11064240" cy="411480"/>
+            <a:off x="548640" y="1234440"/>
+            <a:ext cx="11064240" cy="4937760"/>
           </a:xfrm>
           <a:prstGeom prst="rect">
             <a:avLst/>
@@ -10108,22 +12548,215 @@
               <a:lnSpc>
                 <a:spcPts val="2200"/>
               </a:lnSpc>
-              <a:defRPr sz="1200" b="0">
-                <a:solidFill>
-                  <a:srgbClr val="333333"/>
-                </a:solidFill>
-                <a:latin typeface="Calibri"/>
-              </a:defRPr>
-            </a:pPr>
-            <a:r>
-              <a:t>Module 8: DUT structure and key interfaces (see common_dut/rtl/).</a:t>
-            </a:r>
-          </a:p>
-        </p:txBody>
-      </p:sp>
-      <p:sp>
-        <p:nvSpPr>
-          <p:cNvPr id="5" name="TextBox 4"/>
+              <a:spcAft>
+                <a:spcPts val="1000"/>
+              </a:spcAft>
+              <a:defRPr sz="2000" b="0">
+                <a:solidFill>
+                  <a:srgbClr val="333333"/>
+                </a:solidFill>
+                <a:latin typeface="Calibri"/>
+              </a:defRPr>
+            </a:pPr>
+            <a:r>
+              <a:t>• Skim this document — Goal, Overview, and Topics</a:t>
+            </a:r>
+          </a:p>
+          <a:p>
+            <a:pPr>
+              <a:lnSpc>
+                <a:spcPts val="2200"/>
+              </a:lnSpc>
+              <a:spcAft>
+                <a:spcPts val="1000"/>
+              </a:spcAft>
+              <a:defRPr sz="2000" b="0">
+                <a:solidFill>
+                  <a:srgbClr val="333333"/>
+                </a:solidFill>
+                <a:latin typeface="Calibri"/>
+              </a:defRPr>
+            </a:pPr>
+            <a:r>
+              <a:t>      Covered set the IEEE scope for Module 8.</a:t>
+            </a:r>
+          </a:p>
+          <a:p>
+            <a:pPr>
+              <a:lnSpc>
+                <a:spcPts val="2200"/>
+              </a:lnSpc>
+              <a:spcAft>
+                <a:spcPts val="1000"/>
+              </a:spcAft>
+              <a:defRPr sz="2000" b="0">
+                <a:solidFill>
+                  <a:srgbClr val="333333"/>
+                </a:solidFill>
+                <a:latin typeface="Calibri"/>
+              </a:defRPr>
+            </a:pPr>
+            <a:r>
+              <a:t>• Study design architecture — See how DUTs, examples,</a:t>
+            </a:r>
+          </a:p>
+          <a:p>
+            <a:pPr>
+              <a:lnSpc>
+                <a:spcPts val="2200"/>
+              </a:lnSpc>
+              <a:spcAft>
+                <a:spcPts val="1000"/>
+              </a:spcAft>
+              <a:defRPr sz="2000" b="0">
+                <a:solidFill>
+                  <a:srgbClr val="333333"/>
+                </a:solidFill>
+                <a:latin typeface="Calibri"/>
+              </a:defRPr>
+            </a:pPr>
+            <a:r>
+              <a:t>      and testbenches fit together under `module8/`.</a:t>
+            </a:r>
+          </a:p>
+          <a:p>
+            <a:pPr>
+              <a:lnSpc>
+                <a:spcPts val="2200"/>
+              </a:lnSpc>
+              <a:spcAft>
+                <a:spcPts val="1000"/>
+              </a:spcAft>
+              <a:defRPr sz="2000" b="0">
+                <a:solidFill>
+                  <a:srgbClr val="333333"/>
+                </a:solidFill>
+                <a:latin typeface="Calibri"/>
+              </a:defRPr>
+            </a:pPr>
+            <a:r>
+              <a:t>• Work through labs in order — Open</a:t>
+            </a:r>
+          </a:p>
+          <a:p>
+            <a:pPr>
+              <a:lnSpc>
+                <a:spcPts val="2200"/>
+              </a:lnSpc>
+              <a:spcAft>
+                <a:spcPts val="1000"/>
+              </a:spcAft>
+              <a:defRPr sz="2000" b="0">
+                <a:solidFill>
+                  <a:srgbClr val="333333"/>
+                </a:solidFill>
+                <a:latin typeface="Calibri"/>
+              </a:defRPr>
+            </a:pPr>
+            <a:r>
+              <a:t>      `module8/EXAMPLES.md` and run each `make clean &amp;&amp;</a:t>
+            </a:r>
+          </a:p>
+          <a:p>
+            <a:pPr>
+              <a:lnSpc>
+                <a:spcPts val="2200"/>
+              </a:lnSpc>
+              <a:spcAft>
+                <a:spcPts val="1000"/>
+              </a:spcAft>
+              <a:defRPr sz="2000" b="0">
+                <a:solidFill>
+                  <a:srgbClr val="333333"/>
+                </a:solidFill>
+                <a:latin typeface="Calibri"/>
+              </a:defRPr>
+            </a:pPr>
+            <a:r>
+              <a:t>      make run` from…</a:t>
+            </a:r>
+          </a:p>
+          <a:p>
+            <a:pPr>
+              <a:lnSpc>
+                <a:spcPts val="2200"/>
+              </a:lnSpc>
+              <a:spcAft>
+                <a:spcPts val="1000"/>
+              </a:spcAft>
+              <a:defRPr sz="2000" b="0">
+                <a:solidFill>
+                  <a:srgbClr val="333333"/>
+                </a:solidFill>
+                <a:latin typeface="Calibri"/>
+              </a:defRPr>
+            </a:pPr>
+            <a:r>
+              <a:t>• Run the full module script — `./scripts/module8.sh`</a:t>
+            </a:r>
+          </a:p>
+          <a:p>
+            <a:pPr>
+              <a:lnSpc>
+                <a:spcPts val="2200"/>
+              </a:lnSpc>
+              <a:spcAft>
+                <a:spcPts val="1000"/>
+              </a:spcAft>
+              <a:defRPr sz="2000" b="0">
+                <a:solidFill>
+                  <a:srgbClr val="333333"/>
+                </a:solidFill>
+                <a:latin typeface="Calibri"/>
+              </a:defRPr>
+            </a:pPr>
+            <a:r>
+              <a:t>      from the repo root to simulate all examples and…</a:t>
+            </a:r>
+          </a:p>
+          <a:p>
+            <a:pPr>
+              <a:lnSpc>
+                <a:spcPts val="2200"/>
+              </a:lnSpc>
+              <a:spcAft>
+                <a:spcPts val="1000"/>
+              </a:spcAft>
+              <a:defRPr sz="2000" b="0">
+                <a:solidFill>
+                  <a:srgbClr val="333333"/>
+                </a:solidFill>
+                <a:latin typeface="Calibri"/>
+              </a:defRPr>
+            </a:pPr>
+            <a:r>
+              <a:t>• Complete the exercises — Try each exercise in this</a:t>
+            </a:r>
+          </a:p>
+          <a:p>
+            <a:pPr>
+              <a:lnSpc>
+                <a:spcPts val="2200"/>
+              </a:lnSpc>
+              <a:spcAft>
+                <a:spcPts val="1000"/>
+              </a:spcAft>
+              <a:defRPr sz="2000" b="0">
+                <a:solidFill>
+                  <a:srgbClr val="333333"/>
+                </a:solidFill>
+                <a:latin typeface="Calibri"/>
+              </a:defRPr>
+            </a:pPr>
+            <a:r>
+              <a:t>      document before reading solutions or peeking at…</a:t>
+            </a:r>
+          </a:p>
+        </p:txBody>
+      </p:sp>
+      <p:sp>
+        <p:nvSpPr>
+          <p:cNvPr id="4" name="TextBox 3"/>
           <p:cNvSpPr txBox="1"/>
           <p:nvPr/>
         </p:nvSpPr>
@@ -10212,45 +12845,21 @@
               </a:defRPr>
             </a:pPr>
             <a:r>
-              <a:t>Verification environment architecture</a:t>
-            </a:r>
-          </a:p>
-        </p:txBody>
-      </p:sp>
-      <p:pic>
-        <p:nvPicPr>
-          <p:cNvPr id="3" name="Picture 2" descr="verification_architecture.png"/>
-          <p:cNvPicPr>
-            <a:picLocks noChangeAspect="1"/>
-          </p:cNvPicPr>
-          <p:nvPr/>
-        </p:nvPicPr>
-        <p:blipFill>
-          <a:blip r:embed="rId2"/>
-          <a:stretch>
-            <a:fillRect/>
-          </a:stretch>
-        </p:blipFill>
-        <p:spPr>
-          <a:xfrm>
-            <a:off x="548640" y="1143000"/>
-            <a:ext cx="8128000" cy="4572000"/>
-          </a:xfrm>
-          <a:prstGeom prst="rect">
-            <a:avLst/>
-          </a:prstGeom>
-        </p:spPr>
-      </p:pic>
-      <p:sp>
-        <p:nvSpPr>
-          <p:cNvPr id="4" name="TextBox 3"/>
+              <a:t>Suggested learning path (2/2)</a:t>
+            </a:r>
+          </a:p>
+        </p:txBody>
+      </p:sp>
+      <p:sp>
+        <p:nvSpPr>
+          <p:cNvPr id="3" name="TextBox 2"/>
           <p:cNvSpPr txBox="1"/>
           <p:nvPr/>
         </p:nvSpPr>
         <p:spPr>
           <a:xfrm>
-            <a:off x="548640" y="5897880"/>
-            <a:ext cx="11064240" cy="411480"/>
+            <a:off x="548640" y="1234440"/>
+            <a:ext cx="11064240" cy="4937760"/>
           </a:xfrm>
           <a:prstGeom prst="rect">
             <a:avLst/>
@@ -10267,22 +12876,120 @@
               <a:lnSpc>
                 <a:spcPts val="2200"/>
               </a:lnSpc>
-              <a:defRPr sz="1200" b="0">
-                <a:solidFill>
-                  <a:srgbClr val="333333"/>
-                </a:solidFill>
-                <a:latin typeface="Calibri"/>
-              </a:defRPr>
-            </a:pPr>
-            <a:r>
-              <a:t>Module 8: UVM layers, agents, and checkers for this phase.</a:t>
-            </a:r>
-          </a:p>
-        </p:txBody>
-      </p:sp>
-      <p:sp>
-        <p:nvSpPr>
-          <p:cNvPr id="5" name="TextBox 4"/>
+              <a:spcAft>
+                <a:spcPts val="1000"/>
+              </a:spcAft>
+              <a:defRPr sz="2000" b="0">
+                <a:solidFill>
+                  <a:srgbClr val="333333"/>
+                </a:solidFill>
+                <a:latin typeface="Calibri"/>
+              </a:defRPr>
+            </a:pPr>
+            <a:r>
+              <a:t>• Use as reference — Module 8 summarizes the full</a:t>
+            </a:r>
+          </a:p>
+          <a:p>
+            <a:pPr>
+              <a:lnSpc>
+                <a:spcPts val="2200"/>
+              </a:lnSpc>
+              <a:spcAft>
+                <a:spcPts val="1000"/>
+              </a:spcAft>
+              <a:defRPr sz="2000" b="0">
+                <a:solidFill>
+                  <a:srgbClr val="333333"/>
+                </a:solidFill>
+                <a:latin typeface="Calibri"/>
+              </a:defRPr>
+            </a:pPr>
+            <a:r>
+              <a:t>      course; run examples to print quick-reference slice…</a:t>
+            </a:r>
+          </a:p>
+          <a:p>
+            <a:pPr>
+              <a:lnSpc>
+                <a:spcPts val="2200"/>
+              </a:lnSpc>
+              <a:spcAft>
+                <a:spcPts val="1000"/>
+              </a:spcAft>
+              <a:defRPr sz="2000" b="0">
+                <a:solidFill>
+                  <a:srgbClr val="333333"/>
+                </a:solidFill>
+                <a:latin typeface="Calibri"/>
+              </a:defRPr>
+            </a:pPr>
+            <a:r>
+              <a:t>• Review Common Pitfalls — Can you explain each</a:t>
+            </a:r>
+          </a:p>
+          <a:p>
+            <a:pPr>
+              <a:lnSpc>
+                <a:spcPts val="2200"/>
+              </a:lnSpc>
+              <a:spcAft>
+                <a:spcPts val="1000"/>
+              </a:spcAft>
+              <a:defRPr sz="2000" b="0">
+                <a:solidFill>
+                  <a:srgbClr val="333333"/>
+                </a:solidFill>
+                <a:latin typeface="Calibri"/>
+              </a:defRPr>
+            </a:pPr>
+            <a:r>
+              <a:t>      mistake and the fix?</a:t>
+            </a:r>
+          </a:p>
+          <a:p>
+            <a:pPr>
+              <a:lnSpc>
+                <a:spcPts val="2200"/>
+              </a:lnSpc>
+              <a:spcAft>
+                <a:spcPts val="1000"/>
+              </a:spcAft>
+              <a:defRPr sz="2000" b="0">
+                <a:solidFill>
+                  <a:srgbClr val="333333"/>
+                </a:solidFill>
+                <a:latin typeface="Calibri"/>
+              </a:defRPr>
+            </a:pPr>
+            <a:r>
+              <a:t>• Self-check — Use `module8/CHECKLIST.md` before</a:t>
+            </a:r>
+          </a:p>
+          <a:p>
+            <a:pPr>
+              <a:lnSpc>
+                <a:spcPts val="2200"/>
+              </a:lnSpc>
+              <a:spcAft>
+                <a:spcPts val="1000"/>
+              </a:spcAft>
+              <a:defRPr sz="2000" b="0">
+                <a:solidFill>
+                  <a:srgbClr val="333333"/>
+                </a:solidFill>
+                <a:latin typeface="Calibri"/>
+              </a:defRPr>
+            </a:pPr>
+            <a:r>
+              <a:t>      starting the next module.</a:t>
+            </a:r>
+          </a:p>
+        </p:txBody>
+      </p:sp>
+      <p:sp>
+        <p:nvSpPr>
+          <p:cNvPr id="4" name="TextBox 3"/>
           <p:cNvSpPr txBox="1"/>
           <p:nvPr/>
         </p:nvSpPr>
@@ -10345,8 +13052,8 @@
         </p:nvSpPr>
         <p:spPr>
           <a:xfrm>
-            <a:off x="548640" y="411480"/>
-            <a:ext cx="11064240" cy="777240"/>
+            <a:off x="548640" y="2743200"/>
+            <a:ext cx="11064240" cy="1371600"/>
           </a:xfrm>
           <a:prstGeom prst="rect">
             <a:avLst/>
@@ -10359,11 +13066,11 @@
           </a:bodyPr>
           <a:lstStyle/>
           <a:p>
-            <a:pPr>
-              <a:lnSpc>
-                <a:spcPts val="2200"/>
-              </a:lnSpc>
-              <a:defRPr sz="2800" b="1">
+            <a:pPr algn="ctr">
+              <a:lnSpc>
+                <a:spcPts val="2200"/>
+              </a:lnSpc>
+              <a:defRPr sz="3600" b="1">
                 <a:solidFill>
                   <a:srgbClr val="1A1A2E"/>
                 </a:solidFill>
@@ -10371,7 +13078,7 @@
               </a:defRPr>
             </a:pPr>
             <a:r>
-              <a:t>1. Course knowledge architecture (not a new DUT)</a:t>
+              <a:t>Design architecture</a:t>
             </a:r>
           </a:p>
         </p:txBody>
@@ -10379,181 +13086,6 @@
       <p:sp>
         <p:nvSpPr>
           <p:cNvPr id="3" name="TextBox 2"/>
-          <p:cNvSpPr txBox="1"/>
-          <p:nvPr/>
-        </p:nvSpPr>
-        <p:spPr>
-          <a:xfrm>
-            <a:off x="548640" y="1234440"/>
-            <a:ext cx="11064240" cy="4937760"/>
-          </a:xfrm>
-          <a:prstGeom prst="rect">
-            <a:avLst/>
-          </a:prstGeom>
-          <a:noFill/>
-        </p:spPr>
-        <p:txBody>
-          <a:bodyPr wrap="square">
-            <a:noAutofit/>
-          </a:bodyPr>
-          <a:lstStyle/>
-          <a:p>
-            <a:pPr>
-              <a:lnSpc>
-                <a:spcPts val="2200"/>
-              </a:lnSpc>
-              <a:spcAft>
-                <a:spcPts val="1000"/>
-              </a:spcAft>
-              <a:defRPr sz="2000" b="0">
-                <a:solidFill>
-                  <a:srgbClr val="333333"/>
-                </a:solidFill>
-                <a:latin typeface="Calibri"/>
-              </a:defRPr>
-            </a:pPr>
-            <a:r>
-              <a:t>• Module 8 is a meta-layer: maps Modules 1–7 to</a:t>
-            </a:r>
-          </a:p>
-          <a:p>
-            <a:pPr>
-              <a:lnSpc>
-                <a:spcPts val="2200"/>
-              </a:lnSpc>
-              <a:spcAft>
-                <a:spcPts val="1000"/>
-              </a:spcAft>
-              <a:defRPr sz="2000" b="0">
-                <a:solidFill>
-                  <a:srgbClr val="333333"/>
-                </a:solidFill>
-                <a:latin typeface="Calibri"/>
-              </a:defRPr>
-            </a:pPr>
-            <a:r>
-              <a:t>      standards, constructs, and learning path</a:t>
-            </a:r>
-          </a:p>
-          <a:p>
-            <a:pPr>
-              <a:lnSpc>
-                <a:spcPts val="2200"/>
-              </a:lnSpc>
-              <a:spcAft>
-                <a:spcPts val="1000"/>
-              </a:spcAft>
-              <a:defRPr sz="2000" b="0">
-                <a:solidFill>
-                  <a:srgbClr val="333333"/>
-                </a:solidFill>
-                <a:latin typeface="Calibri"/>
-              </a:defRPr>
-            </a:pPr>
-            <a:r>
-              <a:t>• No new RTL — architecture here is how reference</a:t>
-            </a:r>
-          </a:p>
-          <a:p>
-            <a:pPr>
-              <a:lnSpc>
-                <a:spcPts val="2200"/>
-              </a:lnSpc>
-              <a:spcAft>
-                <a:spcPts val="1000"/>
-              </a:spcAft>
-              <a:defRPr sz="2000" b="0">
-                <a:solidFill>
-                  <a:srgbClr val="333333"/>
-                </a:solidFill>
-                <a:latin typeface="Calibri"/>
-              </a:defRPr>
-            </a:pPr>
-            <a:r>
-              <a:t>      material is organized, not a chip block</a:t>
-            </a:r>
-          </a:p>
-          <a:p>
-            <a:pPr>
-              <a:lnSpc>
-                <a:spcPts val="2200"/>
-              </a:lnSpc>
-              <a:spcAft>
-                <a:spcPts val="1000"/>
-              </a:spcAft>
-              <a:defRPr sz="2000" b="0">
-                <a:solidFill>
-                  <a:srgbClr val="333333"/>
-                </a:solidFill>
-                <a:latin typeface="Calibri"/>
-              </a:defRPr>
-            </a:pPr>
-            <a:r>
-              <a:t>• Sections: version timeline → construct-by-standard →</a:t>
-            </a:r>
-          </a:p>
-          <a:p>
-            <a:pPr>
-              <a:lnSpc>
-                <a:spcPts val="2200"/>
-              </a:lnSpc>
-              <a:spcAft>
-                <a:spcPts val="1000"/>
-              </a:spcAft>
-              <a:defRPr sz="2000" b="0">
-                <a:solidFill>
-                  <a:srgbClr val="333333"/>
-                </a:solidFill>
-                <a:latin typeface="Calibri"/>
-              </a:defRPr>
-            </a:pPr>
-            <a:r>
-              <a:t>      design subset → migration → tool support</a:t>
-            </a:r>
-          </a:p>
-          <a:p>
-            <a:pPr>
-              <a:lnSpc>
-                <a:spcPts val="2200"/>
-              </a:lnSpc>
-              <a:spcAft>
-                <a:spcPts val="1000"/>
-              </a:spcAft>
-              <a:defRPr sz="2000" b="0">
-                <a:solidFill>
-                  <a:srgbClr val="333333"/>
-                </a:solidFill>
-                <a:latin typeface="Calibri"/>
-              </a:defRPr>
-            </a:pPr>
-            <a:r>
-              <a:t>• Runnable examples (`module8/examples/`): each prints</a:t>
-            </a:r>
-          </a:p>
-          <a:p>
-            <a:pPr>
-              <a:lnSpc>
-                <a:spcPts val="2200"/>
-              </a:lnSpc>
-              <a:spcAft>
-                <a:spcPts val="1000"/>
-              </a:spcAft>
-              <a:defRPr sz="2000" b="0">
-                <a:solidFill>
-                  <a:srgbClr val="333333"/>
-                </a:solidFill>
-                <a:latin typeface="Calibri"/>
-              </a:defRPr>
-            </a:pPr>
-            <a:r>
-              <a:t>      one slice of the quick reference for terminal…</a:t>
-            </a:r>
-          </a:p>
-        </p:txBody>
-      </p:sp>
-      <p:sp>
-        <p:nvSpPr>
-          <p:cNvPr id="4" name="TextBox 3"/>
           <p:cNvSpPr txBox="1"/>
           <p:nvPr/>
         </p:nvSpPr>
